--- a/exports/pptx/lessons/middle-module-12-movement-of-sun/day-08-project-session-1.pptx
+++ b/exports/pptx/lessons/middle-module-12-movement-of-sun/day-08-project-session-1.pptx
@@ -4979,6 +4979,370 @@
         </p:nvSpPr>
         <p:spPr>
           <a:xfrm>
+            <a:off x="406301" y="870942"/>
+            <a:ext cx="8498026" cy="213271"/>
+          </a:xfrm>
+          <a:prstGeom prst="rect">
+            <a:avLst/>
+          </a:prstGeom>
+          <a:noFill/>
+          <a:ln/>
+        </p:spPr>
+        <p:txBody>
+          <a:bodyPr wrap="square" lIns="0" tIns="0" rIns="0" bIns="0" rtlCol="0" anchor="t"/>
+          <a:lstStyle/>
+          <a:p>
+            <a:pPr algn="l" indent="0" marL="0">
+              <a:lnSpc>
+                <a:spcPts val="1680"/>
+              </a:lnSpc>
+              <a:spcBef>
+                <a:spcPts val="300"/>
+              </a:spcBef>
+              <a:spcAft>
+                <a:spcPts val="300"/>
+              </a:spcAft>
+              <a:buNone/>
+            </a:pPr>
+            <a:r>
+              <a:rPr lang="en-US" sz="1200" i="1" dirty="0">
+                <a:solidFill>
+                  <a:srgbClr val="1C2833"/>
+                </a:solidFill>
+                <a:latin typeface="Arial" pitchFamily="34" charset="0"/>
+                <a:ea typeface="Arial" pitchFamily="34" charset="-122"/>
+                <a:cs typeface="Arial" pitchFamily="34" charset="-120"/>
+              </a:rPr>
+              <a:t>Each row: If you see ... · Try saying ....</a:t>
+            </a:r>
+            <a:endParaRPr lang="en-US" sz="1200" dirty="0"/>
+          </a:p>
+        </p:txBody>
+      </p:sp>
+      <p:sp>
+        <p:nvSpPr>
+          <p:cNvPr id="5" name="Text 3"/>
+          <p:cNvSpPr/>
+          <p:nvPr/>
+        </p:nvSpPr>
+        <p:spPr>
+          <a:xfrm>
+            <a:off x="634901" y="1173063"/>
+            <a:ext cx="8102798" cy="525661"/>
+          </a:xfrm>
+          <a:prstGeom prst="rect">
+            <a:avLst/>
+          </a:prstGeom>
+          <a:noFill/>
+          <a:ln/>
+        </p:spPr>
+        <p:txBody>
+          <a:bodyPr wrap="square" lIns="0" tIns="0" rIns="0" bIns="0" rtlCol="0" anchor="t"/>
+          <a:lstStyle/>
+          <a:p>
+            <a:pPr algn="l" marL="342900" indent="-342900">
+              <a:lnSpc>
+                <a:spcPts val="1620"/>
+              </a:lnSpc>
+              <a:spcAft>
+                <a:spcPts val="300"/>
+              </a:spcAft>
+              <a:buSzPct val="100000"/>
+              <a:buChar char="•"/>
+            </a:pPr>
+            <a:r>
+              <a:rPr lang="en-US" sz="1200" b="1" dirty="0">
+                <a:solidFill>
+                  <a:srgbClr val="1C2833"/>
+                </a:solidFill>
+                <a:latin typeface="Arial" pitchFamily="34" charset="0"/>
+                <a:ea typeface="Arial" pitchFamily="34" charset="-122"/>
+                <a:cs typeface="Arial" pitchFamily="34" charset="-120"/>
+              </a:rPr>
+              <a:t>One partner doing all the drawing</a:t>
+            </a:r>
+            <a:pPr algn="l" indent="0" marL="0">
+              <a:lnSpc>
+                <a:spcPts val="1620"/>
+              </a:lnSpc>
+              <a:spcAft>
+                <a:spcPts val="300"/>
+              </a:spcAft>
+              <a:buNone/>
+            </a:pPr>
+            <a:r>
+              <a:rPr lang="en-US" sz="1200" dirty="0">
+                <a:solidFill>
+                  <a:srgbClr val="1C2833"/>
+                </a:solidFill>
+                <a:latin typeface="Arial" pitchFamily="34" charset="0"/>
+                <a:ea typeface="Arial" pitchFamily="34" charset="-122"/>
+                <a:cs typeface="Arial" pitchFamily="34" charset="-120"/>
+              </a:rPr>
+              <a:t> — "Tell me what your partner is contributing. Where will their writing go?"</a:t>
+            </a:r>
+            <a:endParaRPr lang="en-US" sz="1200" dirty="0"/>
+          </a:p>
+          <a:p>
+            <a:pPr algn="l" marL="342900" indent="-342900">
+              <a:lnSpc>
+                <a:spcPts val="1620"/>
+              </a:lnSpc>
+              <a:spcAft>
+                <a:spcPts val="300"/>
+              </a:spcAft>
+              <a:buSzPct val="100000"/>
+              <a:buChar char="•"/>
+            </a:pPr>
+            <a:r>
+              <a:rPr lang="en-US" sz="1200" b="1" dirty="0">
+                <a:solidFill>
+                  <a:srgbClr val="1C2833"/>
+                </a:solidFill>
+                <a:latin typeface="Arial" pitchFamily="34" charset="0"/>
+                <a:ea typeface="Arial" pitchFamily="34" charset="-122"/>
+                <a:cs typeface="Arial" pitchFamily="34" charset="-120"/>
+              </a:rPr>
+              <a:t>A wheel with English names only</a:t>
+            </a:r>
+            <a:pPr algn="l" indent="0" marL="0">
+              <a:lnSpc>
+                <a:spcPts val="1620"/>
+              </a:lnSpc>
+              <a:spcAft>
+                <a:spcPts val="300"/>
+              </a:spcAft>
+              <a:buNone/>
+            </a:pPr>
+            <a:r>
+              <a:rPr lang="en-US" sz="1200" dirty="0">
+                <a:solidFill>
+                  <a:srgbClr val="1C2833"/>
+                </a:solidFill>
+                <a:latin typeface="Arial" pitchFamily="34" charset="0"/>
+                <a:ea typeface="Arial" pitchFamily="34" charset="-122"/>
+                <a:cs typeface="Arial" pitchFamily="34" charset="-120"/>
+              </a:rPr>
+              <a:t> — "Where do the Sanskrit names go? Show me."</a:t>
+            </a:r>
+            <a:endParaRPr lang="en-US" sz="1200" dirty="0"/>
+          </a:p>
+        </p:txBody>
+      </p:sp>
+      <p:sp>
+        <p:nvSpPr>
+          <p:cNvPr id="6" name="Text 4"/>
+          <p:cNvSpPr/>
+          <p:nvPr/>
+        </p:nvSpPr>
+        <p:spPr>
+          <a:xfrm>
+            <a:off x="406301" y="1787575"/>
+            <a:ext cx="8498026" cy="426541"/>
+          </a:xfrm>
+          <a:prstGeom prst="rect">
+            <a:avLst/>
+          </a:prstGeom>
+          <a:noFill/>
+          <a:ln/>
+        </p:spPr>
+        <p:txBody>
+          <a:bodyPr wrap="square" lIns="0" tIns="0" rIns="0" bIns="0" rtlCol="0" anchor="t"/>
+          <a:lstStyle/>
+          <a:p>
+            <a:pPr algn="l" indent="0" marL="0">
+              <a:lnSpc>
+                <a:spcPts val="1680"/>
+              </a:lnSpc>
+              <a:spcBef>
+                <a:spcPts val="300"/>
+              </a:spcBef>
+              <a:spcAft>
+                <a:spcPts val="300"/>
+              </a:spcAft>
+              <a:buNone/>
+            </a:pPr>
+            <a:r>
+              <a:rPr lang="en-US" sz="1200" dirty="0">
+                <a:solidFill>
+                  <a:srgbClr val="1C2833"/>
+                </a:solidFill>
+                <a:latin typeface="Arial" pitchFamily="34" charset="0"/>
+                <a:ea typeface="Arial" pitchFamily="34" charset="-122"/>
+                <a:cs typeface="Arial" pitchFamily="34" charset="-120"/>
+              </a:rPr>
+              <a:t>– Confusion about </a:t>
+            </a:r>
+            <a:pPr algn="l" indent="0" marL="0">
+              <a:lnSpc>
+                <a:spcPts val="1680"/>
+              </a:lnSpc>
+              <a:spcBef>
+                <a:spcPts val="300"/>
+              </a:spcBef>
+              <a:spcAft>
+                <a:spcPts val="300"/>
+              </a:spcAft>
+              <a:buNone/>
+            </a:pPr>
+            <a:r>
+              <a:rPr lang="en-US" sz="1200" i="1" dirty="0">
+                <a:solidFill>
+                  <a:srgbClr val="1C2833"/>
+                </a:solidFill>
+                <a:latin typeface="Arial" pitchFamily="34" charset="0"/>
+                <a:ea typeface="Arial" pitchFamily="34" charset="-122"/>
+                <a:cs typeface="Arial" pitchFamily="34" charset="-120"/>
+              </a:rPr>
+              <a:t>sāyana</a:t>
+            </a:r>
+            <a:pPr algn="l" indent="0" marL="0">
+              <a:lnSpc>
+                <a:spcPts val="1680"/>
+              </a:lnSpc>
+              <a:spcBef>
+                <a:spcPts val="300"/>
+              </a:spcBef>
+              <a:spcAft>
+                <a:spcPts val="300"/>
+              </a:spcAft>
+              <a:buNone/>
+            </a:pPr>
+            <a:r>
+              <a:rPr lang="en-US" sz="1200" dirty="0">
+                <a:solidFill>
+                  <a:srgbClr val="1C2833"/>
+                </a:solidFill>
+                <a:latin typeface="Arial" pitchFamily="34" charset="0"/>
+                <a:ea typeface="Arial" pitchFamily="34" charset="-122"/>
+                <a:cs typeface="Arial" pitchFamily="34" charset="-120"/>
+              </a:rPr>
+              <a:t> vs </a:t>
+            </a:r>
+            <a:pPr algn="l" indent="0" marL="0">
+              <a:lnSpc>
+                <a:spcPts val="1680"/>
+              </a:lnSpc>
+              <a:spcBef>
+                <a:spcPts val="300"/>
+              </a:spcBef>
+              <a:spcAft>
+                <a:spcPts val="300"/>
+              </a:spcAft>
+              <a:buNone/>
+            </a:pPr>
+            <a:r>
+              <a:rPr lang="en-US" sz="1200" i="1" dirty="0">
+                <a:solidFill>
+                  <a:srgbClr val="1C2833"/>
+                </a:solidFill>
+                <a:latin typeface="Arial" pitchFamily="34" charset="0"/>
+                <a:ea typeface="Arial" pitchFamily="34" charset="-122"/>
+                <a:cs typeface="Arial" pitchFamily="34" charset="-120"/>
+              </a:rPr>
+              <a:t>nirayana</a:t>
+            </a:r>
+            <a:pPr algn="l" indent="0" marL="0">
+              <a:lnSpc>
+                <a:spcPts val="1680"/>
+              </a:lnSpc>
+              <a:spcBef>
+                <a:spcPts val="300"/>
+              </a:spcBef>
+              <a:spcAft>
+                <a:spcPts val="300"/>
+              </a:spcAft>
+              <a:buNone/>
+            </a:pPr>
+            <a:r>
+              <a:rPr lang="en-US" sz="1200" dirty="0">
+                <a:solidFill>
+                  <a:srgbClr val="1C2833"/>
+                </a:solidFill>
+                <a:latin typeface="Arial" pitchFamily="34" charset="0"/>
+                <a:ea typeface="Arial" pitchFamily="34" charset="-122"/>
+                <a:cs typeface="Arial" pitchFamily="34" charset="-120"/>
+              </a:rPr>
+              <a:t> — "Pick the four turning-points. Write the December solstice date on one line. Now write the Makara Saṁkrānti date below it. They're different — your job is to make that visible on the wheel."</a:t>
+            </a:r>
+            <a:endParaRPr lang="en-US" sz="1200" dirty="0"/>
+          </a:p>
+        </p:txBody>
+      </p:sp>
+      <p:sp>
+        <p:nvSpPr>
+          <p:cNvPr id="7" name="Text 5"/>
+          <p:cNvSpPr/>
+          <p:nvPr/>
+        </p:nvSpPr>
+        <p:spPr>
+          <a:xfrm>
+            <a:off x="634901" y="2302966"/>
+            <a:ext cx="8102798" cy="487561"/>
+          </a:xfrm>
+          <a:prstGeom prst="rect">
+            <a:avLst/>
+          </a:prstGeom>
+          <a:noFill/>
+          <a:ln/>
+        </p:spPr>
+        <p:txBody>
+          <a:bodyPr wrap="square" lIns="0" tIns="0" rIns="0" bIns="0" rtlCol="0" anchor="t"/>
+          <a:lstStyle/>
+          <a:p>
+            <a:pPr algn="l" marL="342900" indent="-342900">
+              <a:lnSpc>
+                <a:spcPts val="1620"/>
+              </a:lnSpc>
+              <a:spcAft>
+                <a:spcPts val="300"/>
+              </a:spcAft>
+              <a:buSzPct val="100000"/>
+              <a:buChar char="•"/>
+            </a:pPr>
+            <a:r>
+              <a:rPr lang="en-US" sz="1200" b="1" dirty="0">
+                <a:solidFill>
+                  <a:srgbClr val="1C2833"/>
+                </a:solidFill>
+                <a:latin typeface="Arial" pitchFamily="34" charset="0"/>
+                <a:ea typeface="Arial" pitchFamily="34" charset="-122"/>
+                <a:cs typeface="Arial" pitchFamily="34" charset="-120"/>
+              </a:rPr>
+              <a:t>Beautiful art, no astronomy</a:t>
+            </a:r>
+            <a:pPr algn="l" indent="0" marL="0">
+              <a:lnSpc>
+                <a:spcPts val="1620"/>
+              </a:lnSpc>
+              <a:spcAft>
+                <a:spcPts val="300"/>
+              </a:spcAft>
+              <a:buNone/>
+            </a:pPr>
+            <a:r>
+              <a:rPr lang="en-US" sz="1200" dirty="0">
+                <a:solidFill>
+                  <a:srgbClr val="1C2833"/>
+                </a:solidFill>
+                <a:latin typeface="Arial" pitchFamily="34" charset="0"/>
+                <a:ea typeface="Arial" pitchFamily="34" charset="-122"/>
+                <a:cs typeface="Arial" pitchFamily="34" charset="-120"/>
+              </a:rPr>
+              <a:t> — "Where on the wheel does the reader learn that the seasons come from axial tilt? Add a sentence."</a:t>
+            </a:r>
+            <a:endParaRPr lang="en-US" sz="1200" dirty="0"/>
+          </a:p>
+        </p:txBody>
+      </p:sp>
+      <p:sp>
+        <p:nvSpPr>
+          <p:cNvPr id="8" name="Text 6"/>
+          <p:cNvSpPr/>
+          <p:nvPr/>
+        </p:nvSpPr>
+        <p:spPr>
+          <a:xfrm>
             <a:off x="406301" y="4434929"/>
             <a:ext cx="8498026" cy="213271"/>
           </a:xfrm>

--- a/exports/pptx/lessons/middle-module-12-movement-of-sun/day-08-project-session-1.pptx
+++ b/exports/pptx/lessons/middle-module-12-movement-of-sun/day-08-project-session-1.pptx
@@ -16,9 +16,14 @@
     <p:sldId id="264" r:id="rId10"/>
     <p:sldId id="265" r:id="rId11"/>
     <p:sldId id="266" r:id="rId12"/>
+    <p:sldId id="267" r:id="rId13"/>
+    <p:sldId id="268" r:id="rId14"/>
+    <p:sldId id="269" r:id="rId15"/>
+    <p:sldId id="270" r:id="rId16"/>
+    <p:sldId id="271" r:id="rId17"/>
   </p:sldIdLst>
   <p:notesMasterIdLst>
-    <p:notesMasterId r:id="rId13"/>
+    <p:notesMasterId r:id="rId18"/>
   </p:notesMasterIdLst>
   <p:sldSz cx="9144000" cy="5143500"/>
   <p:notesSz cx="5143500" cy="9144000"/>
@@ -712,6 +717,446 @@
             <a:fld id="{F7021451-1387-4CA6-816F-3879F97B5CBC}" type="slidenum">
               <a:rPr lang="en-US"/>
               <a:t>11</a:t>
+            </a:fld>
+            <a:endParaRPr lang="en-US"/>
+          </a:p>
+        </p:txBody>
+      </p:sp>
+    </p:spTree>
+    <p:extLst>
+      <p:ext uri="{BB962C8B-B14F-4D97-AF65-F5344CB8AC3E}">
+        <p14:creationId xmlns:p14="http://schemas.microsoft.com/office/powerpoint/2010/main" val="1024086991"/>
+      </p:ext>
+    </p:extLst>
+  </p:cSld>
+  <p:clrMapOvr>
+    <a:masterClrMapping/>
+  </p:clrMapOvr>
+</p:notes>
+</file>
+
+<file path=ppt/notesSlides/notesSlide12.xml><?xml version="1.0" encoding="utf-8"?>
+<p:notes xmlns:a="http://schemas.openxmlformats.org/drawingml/2006/main" xmlns:r="http://schemas.openxmlformats.org/officeDocument/2006/relationships" xmlns:p="http://schemas.openxmlformats.org/presentationml/2006/main">
+  <p:cSld>
+    <p:spTree>
+      <p:nvGrpSpPr>
+        <p:cNvPr id="1" name=""/>
+        <p:cNvGrpSpPr/>
+        <p:nvPr/>
+      </p:nvGrpSpPr>
+      <p:grpSpPr>
+        <a:xfrm>
+          <a:off x="0" y="0"/>
+          <a:ext cx="0" cy="0"/>
+          <a:chOff x="0" y="0"/>
+          <a:chExt cx="0" cy="0"/>
+        </a:xfrm>
+      </p:grpSpPr>
+      <p:sp>
+        <p:nvSpPr>
+          <p:cNvPr id="2" name="Slide Image Placeholder 1"/>
+          <p:cNvSpPr>
+            <a:spLocks noGrp="1" noRot="1" noChangeAspect="1"/>
+          </p:cNvSpPr>
+          <p:nvPr>
+            <p:ph type="sldImg"/>
+          </p:nvPr>
+        </p:nvSpPr>
+        <p:spPr/>
+      </p:sp>
+      <p:sp>
+        <p:nvSpPr>
+          <p:cNvPr id="3" name="Notes Placeholder 2"/>
+          <p:cNvSpPr>
+            <a:spLocks noGrp="1"/>
+          </p:cNvSpPr>
+          <p:nvPr>
+            <p:ph type="body" idx="1"/>
+          </p:nvPr>
+        </p:nvSpPr>
+        <p:spPr/>
+        <p:txBody>
+          <a:bodyPr/>
+          <a:lstStyle/>
+          <a:p>
+            <a:r>
+              <a:rPr lang="en-US" dirty="0"/>
+              <a:t/>
+            </a:r>
+            <a:endParaRPr lang="en-US" dirty="0"/>
+          </a:p>
+        </p:txBody>
+      </p:sp>
+      <p:sp>
+        <p:nvSpPr>
+          <p:cNvPr id="4" name="Slide Number Placeholder 3"/>
+          <p:cNvSpPr>
+            <a:spLocks noGrp="1"/>
+          </p:cNvSpPr>
+          <p:nvPr>
+            <p:ph type="sldNum" sz="quarter" idx="10"/>
+          </p:nvPr>
+        </p:nvSpPr>
+        <p:spPr/>
+        <p:txBody>
+          <a:bodyPr/>
+          <a:lstStyle/>
+          <a:p>
+            <a:fld id="{F7021451-1387-4CA6-816F-3879F97B5CBC}" type="slidenum">
+              <a:rPr lang="en-US"/>
+              <a:t>12</a:t>
+            </a:fld>
+            <a:endParaRPr lang="en-US"/>
+          </a:p>
+        </p:txBody>
+      </p:sp>
+    </p:spTree>
+    <p:extLst>
+      <p:ext uri="{BB962C8B-B14F-4D97-AF65-F5344CB8AC3E}">
+        <p14:creationId xmlns:p14="http://schemas.microsoft.com/office/powerpoint/2010/main" val="1024086991"/>
+      </p:ext>
+    </p:extLst>
+  </p:cSld>
+  <p:clrMapOvr>
+    <a:masterClrMapping/>
+  </p:clrMapOvr>
+</p:notes>
+</file>
+
+<file path=ppt/notesSlides/notesSlide13.xml><?xml version="1.0" encoding="utf-8"?>
+<p:notes xmlns:a="http://schemas.openxmlformats.org/drawingml/2006/main" xmlns:r="http://schemas.openxmlformats.org/officeDocument/2006/relationships" xmlns:p="http://schemas.openxmlformats.org/presentationml/2006/main">
+  <p:cSld>
+    <p:spTree>
+      <p:nvGrpSpPr>
+        <p:cNvPr id="1" name=""/>
+        <p:cNvGrpSpPr/>
+        <p:nvPr/>
+      </p:nvGrpSpPr>
+      <p:grpSpPr>
+        <a:xfrm>
+          <a:off x="0" y="0"/>
+          <a:ext cx="0" cy="0"/>
+          <a:chOff x="0" y="0"/>
+          <a:chExt cx="0" cy="0"/>
+        </a:xfrm>
+      </p:grpSpPr>
+      <p:sp>
+        <p:nvSpPr>
+          <p:cNvPr id="2" name="Slide Image Placeholder 1"/>
+          <p:cNvSpPr>
+            <a:spLocks noGrp="1" noRot="1" noChangeAspect="1"/>
+          </p:cNvSpPr>
+          <p:nvPr>
+            <p:ph type="sldImg"/>
+          </p:nvPr>
+        </p:nvSpPr>
+        <p:spPr/>
+      </p:sp>
+      <p:sp>
+        <p:nvSpPr>
+          <p:cNvPr id="3" name="Notes Placeholder 2"/>
+          <p:cNvSpPr>
+            <a:spLocks noGrp="1"/>
+          </p:cNvSpPr>
+          <p:nvPr>
+            <p:ph type="body" idx="1"/>
+          </p:nvPr>
+        </p:nvSpPr>
+        <p:spPr/>
+        <p:txBody>
+          <a:bodyPr/>
+          <a:lstStyle/>
+          <a:p>
+            <a:r>
+              <a:rPr lang="en-US" dirty="0"/>
+              <a:t/>
+            </a:r>
+            <a:endParaRPr lang="en-US" dirty="0"/>
+          </a:p>
+        </p:txBody>
+      </p:sp>
+      <p:sp>
+        <p:nvSpPr>
+          <p:cNvPr id="4" name="Slide Number Placeholder 3"/>
+          <p:cNvSpPr>
+            <a:spLocks noGrp="1"/>
+          </p:cNvSpPr>
+          <p:nvPr>
+            <p:ph type="sldNum" sz="quarter" idx="10"/>
+          </p:nvPr>
+        </p:nvSpPr>
+        <p:spPr/>
+        <p:txBody>
+          <a:bodyPr/>
+          <a:lstStyle/>
+          <a:p>
+            <a:fld id="{F7021451-1387-4CA6-816F-3879F97B5CBC}" type="slidenum">
+              <a:rPr lang="en-US"/>
+              <a:t>13</a:t>
+            </a:fld>
+            <a:endParaRPr lang="en-US"/>
+          </a:p>
+        </p:txBody>
+      </p:sp>
+    </p:spTree>
+    <p:extLst>
+      <p:ext uri="{BB962C8B-B14F-4D97-AF65-F5344CB8AC3E}">
+        <p14:creationId xmlns:p14="http://schemas.microsoft.com/office/powerpoint/2010/main" val="1024086991"/>
+      </p:ext>
+    </p:extLst>
+  </p:cSld>
+  <p:clrMapOvr>
+    <a:masterClrMapping/>
+  </p:clrMapOvr>
+</p:notes>
+</file>
+
+<file path=ppt/notesSlides/notesSlide14.xml><?xml version="1.0" encoding="utf-8"?>
+<p:notes xmlns:a="http://schemas.openxmlformats.org/drawingml/2006/main" xmlns:r="http://schemas.openxmlformats.org/officeDocument/2006/relationships" xmlns:p="http://schemas.openxmlformats.org/presentationml/2006/main">
+  <p:cSld>
+    <p:spTree>
+      <p:nvGrpSpPr>
+        <p:cNvPr id="1" name=""/>
+        <p:cNvGrpSpPr/>
+        <p:nvPr/>
+      </p:nvGrpSpPr>
+      <p:grpSpPr>
+        <a:xfrm>
+          <a:off x="0" y="0"/>
+          <a:ext cx="0" cy="0"/>
+          <a:chOff x="0" y="0"/>
+          <a:chExt cx="0" cy="0"/>
+        </a:xfrm>
+      </p:grpSpPr>
+      <p:sp>
+        <p:nvSpPr>
+          <p:cNvPr id="2" name="Slide Image Placeholder 1"/>
+          <p:cNvSpPr>
+            <a:spLocks noGrp="1" noRot="1" noChangeAspect="1"/>
+          </p:cNvSpPr>
+          <p:nvPr>
+            <p:ph type="sldImg"/>
+          </p:nvPr>
+        </p:nvSpPr>
+        <p:spPr/>
+      </p:sp>
+      <p:sp>
+        <p:nvSpPr>
+          <p:cNvPr id="3" name="Notes Placeholder 2"/>
+          <p:cNvSpPr>
+            <a:spLocks noGrp="1"/>
+          </p:cNvSpPr>
+          <p:nvPr>
+            <p:ph type="body" idx="1"/>
+          </p:nvPr>
+        </p:nvSpPr>
+        <p:spPr/>
+        <p:txBody>
+          <a:bodyPr/>
+          <a:lstStyle/>
+          <a:p>
+            <a:r>
+              <a:rPr lang="en-US" dirty="0"/>
+              <a:t/>
+            </a:r>
+            <a:endParaRPr lang="en-US" dirty="0"/>
+          </a:p>
+        </p:txBody>
+      </p:sp>
+      <p:sp>
+        <p:nvSpPr>
+          <p:cNvPr id="4" name="Slide Number Placeholder 3"/>
+          <p:cNvSpPr>
+            <a:spLocks noGrp="1"/>
+          </p:cNvSpPr>
+          <p:nvPr>
+            <p:ph type="sldNum" sz="quarter" idx="10"/>
+          </p:nvPr>
+        </p:nvSpPr>
+        <p:spPr/>
+        <p:txBody>
+          <a:bodyPr/>
+          <a:lstStyle/>
+          <a:p>
+            <a:fld id="{F7021451-1387-4CA6-816F-3879F97B5CBC}" type="slidenum">
+              <a:rPr lang="en-US"/>
+              <a:t>14</a:t>
+            </a:fld>
+            <a:endParaRPr lang="en-US"/>
+          </a:p>
+        </p:txBody>
+      </p:sp>
+    </p:spTree>
+    <p:extLst>
+      <p:ext uri="{BB962C8B-B14F-4D97-AF65-F5344CB8AC3E}">
+        <p14:creationId xmlns:p14="http://schemas.microsoft.com/office/powerpoint/2010/main" val="1024086991"/>
+      </p:ext>
+    </p:extLst>
+  </p:cSld>
+  <p:clrMapOvr>
+    <a:masterClrMapping/>
+  </p:clrMapOvr>
+</p:notes>
+</file>
+
+<file path=ppt/notesSlides/notesSlide15.xml><?xml version="1.0" encoding="utf-8"?>
+<p:notes xmlns:a="http://schemas.openxmlformats.org/drawingml/2006/main" xmlns:r="http://schemas.openxmlformats.org/officeDocument/2006/relationships" xmlns:p="http://schemas.openxmlformats.org/presentationml/2006/main">
+  <p:cSld>
+    <p:spTree>
+      <p:nvGrpSpPr>
+        <p:cNvPr id="1" name=""/>
+        <p:cNvGrpSpPr/>
+        <p:nvPr/>
+      </p:nvGrpSpPr>
+      <p:grpSpPr>
+        <a:xfrm>
+          <a:off x="0" y="0"/>
+          <a:ext cx="0" cy="0"/>
+          <a:chOff x="0" y="0"/>
+          <a:chExt cx="0" cy="0"/>
+        </a:xfrm>
+      </p:grpSpPr>
+      <p:sp>
+        <p:nvSpPr>
+          <p:cNvPr id="2" name="Slide Image Placeholder 1"/>
+          <p:cNvSpPr>
+            <a:spLocks noGrp="1" noRot="1" noChangeAspect="1"/>
+          </p:cNvSpPr>
+          <p:nvPr>
+            <p:ph type="sldImg"/>
+          </p:nvPr>
+        </p:nvSpPr>
+        <p:spPr/>
+      </p:sp>
+      <p:sp>
+        <p:nvSpPr>
+          <p:cNvPr id="3" name="Notes Placeholder 2"/>
+          <p:cNvSpPr>
+            <a:spLocks noGrp="1"/>
+          </p:cNvSpPr>
+          <p:nvPr>
+            <p:ph type="body" idx="1"/>
+          </p:nvPr>
+        </p:nvSpPr>
+        <p:spPr/>
+        <p:txBody>
+          <a:bodyPr/>
+          <a:lstStyle/>
+          <a:p>
+            <a:r>
+              <a:rPr lang="en-US" dirty="0"/>
+              <a:t/>
+            </a:r>
+            <a:endParaRPr lang="en-US" dirty="0"/>
+          </a:p>
+        </p:txBody>
+      </p:sp>
+      <p:sp>
+        <p:nvSpPr>
+          <p:cNvPr id="4" name="Slide Number Placeholder 3"/>
+          <p:cNvSpPr>
+            <a:spLocks noGrp="1"/>
+          </p:cNvSpPr>
+          <p:nvPr>
+            <p:ph type="sldNum" sz="quarter" idx="10"/>
+          </p:nvPr>
+        </p:nvSpPr>
+        <p:spPr/>
+        <p:txBody>
+          <a:bodyPr/>
+          <a:lstStyle/>
+          <a:p>
+            <a:fld id="{F7021451-1387-4CA6-816F-3879F97B5CBC}" type="slidenum">
+              <a:rPr lang="en-US"/>
+              <a:t>15</a:t>
+            </a:fld>
+            <a:endParaRPr lang="en-US"/>
+          </a:p>
+        </p:txBody>
+      </p:sp>
+    </p:spTree>
+    <p:extLst>
+      <p:ext uri="{BB962C8B-B14F-4D97-AF65-F5344CB8AC3E}">
+        <p14:creationId xmlns:p14="http://schemas.microsoft.com/office/powerpoint/2010/main" val="1024086991"/>
+      </p:ext>
+    </p:extLst>
+  </p:cSld>
+  <p:clrMapOvr>
+    <a:masterClrMapping/>
+  </p:clrMapOvr>
+</p:notes>
+</file>
+
+<file path=ppt/notesSlides/notesSlide16.xml><?xml version="1.0" encoding="utf-8"?>
+<p:notes xmlns:a="http://schemas.openxmlformats.org/drawingml/2006/main" xmlns:r="http://schemas.openxmlformats.org/officeDocument/2006/relationships" xmlns:p="http://schemas.openxmlformats.org/presentationml/2006/main">
+  <p:cSld>
+    <p:spTree>
+      <p:nvGrpSpPr>
+        <p:cNvPr id="1" name=""/>
+        <p:cNvGrpSpPr/>
+        <p:nvPr/>
+      </p:nvGrpSpPr>
+      <p:grpSpPr>
+        <a:xfrm>
+          <a:off x="0" y="0"/>
+          <a:ext cx="0" cy="0"/>
+          <a:chOff x="0" y="0"/>
+          <a:chExt cx="0" cy="0"/>
+        </a:xfrm>
+      </p:grpSpPr>
+      <p:sp>
+        <p:nvSpPr>
+          <p:cNvPr id="2" name="Slide Image Placeholder 1"/>
+          <p:cNvSpPr>
+            <a:spLocks noGrp="1" noRot="1" noChangeAspect="1"/>
+          </p:cNvSpPr>
+          <p:nvPr>
+            <p:ph type="sldImg"/>
+          </p:nvPr>
+        </p:nvSpPr>
+        <p:spPr/>
+      </p:sp>
+      <p:sp>
+        <p:nvSpPr>
+          <p:cNvPr id="3" name="Notes Placeholder 2"/>
+          <p:cNvSpPr>
+            <a:spLocks noGrp="1"/>
+          </p:cNvSpPr>
+          <p:nvPr>
+            <p:ph type="body" idx="1"/>
+          </p:nvPr>
+        </p:nvSpPr>
+        <p:spPr/>
+        <p:txBody>
+          <a:bodyPr/>
+          <a:lstStyle/>
+          <a:p>
+            <a:r>
+              <a:rPr lang="en-US" dirty="0"/>
+              <a:t/>
+            </a:r>
+            <a:endParaRPr lang="en-US" dirty="0"/>
+          </a:p>
+        </p:txBody>
+      </p:sp>
+      <p:sp>
+        <p:nvSpPr>
+          <p:cNvPr id="4" name="Slide Number Placeholder 3"/>
+          <p:cNvSpPr>
+            <a:spLocks noGrp="1"/>
+          </p:cNvSpPr>
+          <p:nvPr>
+            <p:ph type="sldNum" sz="quarter" idx="10"/>
+          </p:nvPr>
+        </p:nvSpPr>
+        <p:spPr/>
+        <p:txBody>
+          <a:bodyPr/>
+          <a:lstStyle/>
+          <a:p>
+            <a:fld id="{F7021451-1387-4CA6-816F-3879F97B5CBC}" type="slidenum">
+              <a:rPr lang="en-US"/>
+              <a:t>16</a:t>
             </a:fld>
             <a:endParaRPr lang="en-US"/>
           </a:p>
@@ -2011,194 +2456,6 @@
         </p:nvSpPr>
         <p:spPr>
           <a:xfrm>
-            <a:off x="406301" y="1223963"/>
-            <a:ext cx="8498026" cy="274290"/>
-          </a:xfrm>
-          <a:prstGeom prst="rect">
-            <a:avLst/>
-          </a:prstGeom>
-          <a:noFill/>
-          <a:ln/>
-        </p:spPr>
-        <p:txBody>
-          <a:bodyPr wrap="square" lIns="0" tIns="0" rIns="0" bIns="0" rtlCol="0" anchor="t"/>
-          <a:lstStyle/>
-          <a:p>
-            <a:pPr algn="l" indent="0" marL="0">
-              <a:lnSpc>
-                <a:spcPts val="2160"/>
-              </a:lnSpc>
-              <a:spcBef>
-                <a:spcPts val="600"/>
-              </a:spcBef>
-              <a:spcAft>
-                <a:spcPts val="800"/>
-              </a:spcAft>
-              <a:buNone/>
-            </a:pPr>
-            <a:r>
-              <a:rPr lang="en-US" sz="1800" b="1" dirty="0">
-                <a:solidFill>
-                  <a:srgbClr val="FE4447"/>
-                </a:solidFill>
-                <a:latin typeface="Georgia" pitchFamily="34" charset="0"/>
-                <a:ea typeface="Georgia" pitchFamily="34" charset="-122"/>
-                <a:cs typeface="Georgia" pitchFamily="34" charset="-120"/>
-              </a:rPr>
-              <a:t>Learning objective</a:t>
-            </a:r>
-            <a:endParaRPr lang="en-US" sz="1800" dirty="0"/>
-          </a:p>
-        </p:txBody>
-      </p:sp>
-      <p:sp>
-        <p:nvSpPr>
-          <p:cNvPr id="6" name="Text 4"/>
-          <p:cNvSpPr/>
-          <p:nvPr/>
-        </p:nvSpPr>
-        <p:spPr>
-          <a:xfrm>
-            <a:off x="406301" y="1637854"/>
-            <a:ext cx="8498026" cy="426541"/>
-          </a:xfrm>
-          <a:prstGeom prst="rect">
-            <a:avLst/>
-          </a:prstGeom>
-          <a:noFill/>
-          <a:ln/>
-        </p:spPr>
-        <p:txBody>
-          <a:bodyPr wrap="square" lIns="0" tIns="0" rIns="0" bIns="0" rtlCol="0" anchor="t"/>
-          <a:lstStyle/>
-          <a:p>
-            <a:pPr algn="l" indent="0" marL="0">
-              <a:lnSpc>
-                <a:spcPts val="1680"/>
-              </a:lnSpc>
-              <a:spcBef>
-                <a:spcPts val="300"/>
-              </a:spcBef>
-              <a:spcAft>
-                <a:spcPts val="300"/>
-              </a:spcAft>
-              <a:buNone/>
-            </a:pPr>
-            <a:r>
-              <a:rPr lang="en-US" sz="1200" dirty="0">
-                <a:solidFill>
-                  <a:srgbClr val="1C2833"/>
-                </a:solidFill>
-                <a:latin typeface="Arial" pitchFamily="34" charset="0"/>
-                <a:ea typeface="Arial" pitchFamily="34" charset="-122"/>
-                <a:cs typeface="Arial" pitchFamily="34" charset="-120"/>
-              </a:rPr>
-              <a:t>By the end of this session, every pair has a substantial draft of the </a:t>
-            </a:r>
-            <a:pPr algn="l" indent="0" marL="0">
-              <a:lnSpc>
-                <a:spcPts val="1680"/>
-              </a:lnSpc>
-              <a:spcBef>
-                <a:spcPts val="300"/>
-              </a:spcBef>
-              <a:spcAft>
-                <a:spcPts val="300"/>
-              </a:spcAft>
-              <a:buNone/>
-            </a:pPr>
-            <a:r>
-              <a:rPr lang="en-US" sz="1200" i="1" dirty="0">
-                <a:solidFill>
-                  <a:srgbClr val="1C2833"/>
-                </a:solidFill>
-                <a:latin typeface="Arial" pitchFamily="34" charset="0"/>
-                <a:ea typeface="Arial" pitchFamily="34" charset="-122"/>
-                <a:cs typeface="Arial" pitchFamily="34" charset="-120"/>
-              </a:rPr>
-              <a:t>rāśi</a:t>
-            </a:r>
-            <a:pPr algn="l" indent="0" marL="0">
-              <a:lnSpc>
-                <a:spcPts val="1680"/>
-              </a:lnSpc>
-              <a:spcBef>
-                <a:spcPts val="300"/>
-              </a:spcBef>
-              <a:spcAft>
-                <a:spcPts val="300"/>
-              </a:spcAft>
-              <a:buNone/>
-            </a:pPr>
-            <a:r>
-              <a:rPr lang="en-US" sz="1200" dirty="0">
-                <a:solidFill>
-                  <a:srgbClr val="1C2833"/>
-                </a:solidFill>
-                <a:latin typeface="Arial" pitchFamily="34" charset="0"/>
-                <a:ea typeface="Arial" pitchFamily="34" charset="-122"/>
-                <a:cs typeface="Arial" pitchFamily="34" charset="-120"/>
-              </a:rPr>
-              <a:t>-wheel project — labelled, coloured, with the four solstice/equinox markers and at least 6 of the 12 </a:t>
-            </a:r>
-            <a:pPr algn="l" indent="0" marL="0">
-              <a:lnSpc>
-                <a:spcPts val="1680"/>
-              </a:lnSpc>
-              <a:spcBef>
-                <a:spcPts val="300"/>
-              </a:spcBef>
-              <a:spcAft>
-                <a:spcPts val="300"/>
-              </a:spcAft>
-              <a:buNone/>
-            </a:pPr>
-            <a:r>
-              <a:rPr lang="en-US" sz="1200" i="1" dirty="0">
-                <a:solidFill>
-                  <a:srgbClr val="1C2833"/>
-                </a:solidFill>
-                <a:latin typeface="Arial" pitchFamily="34" charset="0"/>
-                <a:ea typeface="Arial" pitchFamily="34" charset="-122"/>
-                <a:cs typeface="Arial" pitchFamily="34" charset="-120"/>
-              </a:rPr>
-              <a:t>saṁkrānti</a:t>
-            </a:r>
-            <a:pPr algn="l" indent="0" marL="0">
-              <a:lnSpc>
-                <a:spcPts val="1680"/>
-              </a:lnSpc>
-              <a:spcBef>
-                <a:spcPts val="300"/>
-              </a:spcBef>
-              <a:spcAft>
-                <a:spcPts val="300"/>
-              </a:spcAft>
-              <a:buNone/>
-            </a:pPr>
-            <a:r>
-              <a:rPr lang="en-US" sz="1200" dirty="0">
-                <a:solidFill>
-                  <a:srgbClr val="1C2833"/>
-                </a:solidFill>
-                <a:latin typeface="Arial" pitchFamily="34" charset="0"/>
-                <a:ea typeface="Arial" pitchFamily="34" charset="-122"/>
-                <a:cs typeface="Arial" pitchFamily="34" charset="-120"/>
-              </a:rPr>
-              <a:t> dates filled in.</a:t>
-            </a:r>
-            <a:endParaRPr lang="en-US" sz="1200" dirty="0"/>
-          </a:p>
-        </p:txBody>
-      </p:sp>
-      <p:sp>
-        <p:nvSpPr>
-          <p:cNvPr id="7" name="Text 5"/>
-          <p:cNvSpPr/>
-          <p:nvPr/>
-        </p:nvSpPr>
-        <p:spPr>
-          <a:xfrm>
             <a:off x="406301" y="4434929"/>
             <a:ext cx="8498026" cy="213271"/>
           </a:xfrm>
@@ -2343,7 +2600,7 @@
                 <a:ea typeface="Georgia" pitchFamily="34" charset="-122"/>
                 <a:cs typeface="Georgia" pitchFamily="34" charset="-120"/>
               </a:rPr>
-              <a:t>Teacher notes</a:t>
+              <a:t>Build time (30 min) (cont.)</a:t>
             </a:r>
             <a:endParaRPr lang="en-US" sz="1800" dirty="0"/>
           </a:p>
@@ -2357,8 +2614,8 @@
         </p:nvSpPr>
         <p:spPr>
           <a:xfrm>
-            <a:off x="406301" y="870942"/>
-            <a:ext cx="8498026" cy="639812"/>
+            <a:off x="634901" y="883593"/>
+            <a:ext cx="8102798" cy="975122"/>
           </a:xfrm>
           <a:prstGeom prst="rect">
             <a:avLst/>
@@ -2370,120 +2627,74 @@
           <a:bodyPr wrap="square" lIns="0" tIns="0" rIns="0" bIns="0" rtlCol="0" anchor="t"/>
           <a:lstStyle/>
           <a:p>
-            <a:pPr algn="l" indent="0" marL="0">
-              <a:lnSpc>
-                <a:spcPts val="1680"/>
-              </a:lnSpc>
-              <a:spcBef>
-                <a:spcPts val="300"/>
-              </a:spcBef>
-              <a:spcAft>
-                <a:spcPts val="300"/>
-              </a:spcAft>
-              <a:buNone/>
-            </a:pPr>
-            <a:r>
-              <a:rPr lang="en-US" sz="1200" dirty="0">
-                <a:solidFill>
-                  <a:srgbClr val="1C2833"/>
-                </a:solidFill>
-                <a:latin typeface="Arial" pitchFamily="34" charset="0"/>
-                <a:ea typeface="Arial" pitchFamily="34" charset="-122"/>
-                <a:cs typeface="Arial" pitchFamily="34" charset="-120"/>
-              </a:rPr>
-              <a:t>– Some pairs will spend the entire 45 minutes colouring and lose the astronomy. Intervene at minute 20: "show me your written paragraph on axial tilt." If it doesn't exist yet, stop the colouring. – A surprising number of pairs will get the </a:t>
-            </a:r>
-            <a:pPr algn="l" indent="0" marL="0">
-              <a:lnSpc>
-                <a:spcPts val="1680"/>
-              </a:lnSpc>
-              <a:spcBef>
-                <a:spcPts val="300"/>
-              </a:spcBef>
-              <a:spcAft>
-                <a:spcPts val="300"/>
-              </a:spcAft>
-              <a:buNone/>
-            </a:pPr>
-            <a:r>
-              <a:rPr lang="en-US" sz="1200" i="1" dirty="0">
-                <a:solidFill>
-                  <a:srgbClr val="1C2833"/>
-                </a:solidFill>
-                <a:latin typeface="Arial" pitchFamily="34" charset="0"/>
-                <a:ea typeface="Arial" pitchFamily="34" charset="-122"/>
-                <a:cs typeface="Arial" pitchFamily="34" charset="-120"/>
-              </a:rPr>
-              <a:t>rāśi</a:t>
-            </a:r>
-            <a:pPr algn="l" indent="0" marL="0">
-              <a:lnSpc>
-                <a:spcPts val="1680"/>
-              </a:lnSpc>
-              <a:spcBef>
-                <a:spcPts val="300"/>
-              </a:spcBef>
-              <a:spcAft>
-                <a:spcPts val="300"/>
-              </a:spcAft>
-              <a:buNone/>
-            </a:pPr>
-            <a:r>
-              <a:rPr lang="en-US" sz="1200" dirty="0">
-                <a:solidFill>
-                  <a:srgbClr val="1C2833"/>
-                </a:solidFill>
-                <a:latin typeface="Arial" pitchFamily="34" charset="0"/>
-                <a:ea typeface="Arial" pitchFamily="34" charset="-122"/>
-                <a:cs typeface="Arial" pitchFamily="34" charset="-120"/>
-              </a:rPr>
-              <a:t> order slightly wrong (especially </a:t>
-            </a:r>
-            <a:pPr algn="l" indent="0" marL="0">
-              <a:lnSpc>
-                <a:spcPts val="1680"/>
-              </a:lnSpc>
-              <a:spcBef>
-                <a:spcPts val="300"/>
-              </a:spcBef>
-              <a:spcAft>
-                <a:spcPts val="300"/>
-              </a:spcAft>
-              <a:buNone/>
-            </a:pPr>
-            <a:r>
-              <a:rPr lang="en-US" sz="1200" i="1" dirty="0">
-                <a:solidFill>
-                  <a:srgbClr val="1C2833"/>
-                </a:solidFill>
-                <a:latin typeface="Arial" pitchFamily="34" charset="0"/>
-                <a:ea typeface="Arial" pitchFamily="34" charset="-122"/>
-                <a:cs typeface="Arial" pitchFamily="34" charset="-120"/>
-              </a:rPr>
-              <a:t>Tulā ↔ Vṛścika</a:t>
-            </a:r>
-            <a:pPr algn="l" indent="0" marL="0">
-              <a:lnSpc>
-                <a:spcPts val="1680"/>
-              </a:lnSpc>
-              <a:spcBef>
-                <a:spcPts val="300"/>
-              </a:spcBef>
-              <a:spcAft>
-                <a:spcPts val="300"/>
-              </a:spcAft>
-              <a:buNone/>
-            </a:pPr>
-            <a:r>
-              <a:rPr lang="en-US" sz="1200" dirty="0">
-                <a:solidFill>
-                  <a:srgbClr val="1C2833"/>
-                </a:solidFill>
-                <a:latin typeface="Arial" pitchFamily="34" charset="0"/>
-                <a:ea typeface="Arial" pitchFamily="34" charset="-122"/>
-                <a:cs typeface="Arial" pitchFamily="34" charset="-120"/>
-              </a:rPr>
-              <a:t>). Catch this early.</a:t>
+            <a:pPr algn="l" marL="342900" indent="-342900">
+              <a:lnSpc>
+                <a:spcPts val="1620"/>
+              </a:lnSpc>
+              <a:spcAft>
+                <a:spcPts val="300"/>
+              </a:spcAft>
+              <a:buSzPct val="100000"/>
+              <a:buChar char="•"/>
+            </a:pPr>
+            <a:r>
+              <a:rPr lang="en-US" sz="1200" dirty="0">
+                <a:solidFill>
+                  <a:srgbClr val="1C2833"/>
+                </a:solidFill>
+                <a:latin typeface="Arial" pitchFamily="34" charset="0"/>
+                <a:ea typeface="Arial" pitchFamily="34" charset="-122"/>
+                <a:cs typeface="Arial" pitchFamily="34" charset="-120"/>
+              </a:rPr>
+              <a:t>For pairs stuck on labelling: hand them the printed reference table from Day 5.</a:t>
+            </a:r>
+            <a:endParaRPr lang="en-US" sz="1200" dirty="0"/>
+          </a:p>
+          <a:p>
+            <a:pPr algn="l" marL="342900" indent="-342900">
+              <a:lnSpc>
+                <a:spcPts val="1620"/>
+              </a:lnSpc>
+              <a:spcAft>
+                <a:spcPts val="300"/>
+              </a:spcAft>
+              <a:buSzPct val="100000"/>
+              <a:buChar char="•"/>
+            </a:pPr>
+            <a:r>
+              <a:rPr lang="en-US" sz="1200" dirty="0">
+                <a:solidFill>
+                  <a:srgbClr val="1C2833"/>
+                </a:solidFill>
+                <a:latin typeface="Arial" pitchFamily="34" charset="0"/>
+                <a:ea typeface="Arial" pitchFamily="34" charset="-122"/>
+                <a:cs typeface="Arial" pitchFamily="34" charset="-120"/>
+              </a:rPr>
+              <a:t>For pairs stuck on axial-tilt explanation: redirect to the Day 2 sketch in their notebook.</a:t>
+            </a:r>
+            <a:endParaRPr lang="en-US" sz="1200" dirty="0"/>
+          </a:p>
+          <a:p>
+            <a:pPr algn="l" marL="342900" indent="-342900">
+              <a:lnSpc>
+                <a:spcPts val="1620"/>
+              </a:lnSpc>
+              <a:spcAft>
+                <a:spcPts val="300"/>
+              </a:spcAft>
+              <a:buSzPct val="100000"/>
+              <a:buChar char="•"/>
+            </a:pPr>
+            <a:r>
+              <a:rPr lang="en-US" sz="1200" dirty="0">
+                <a:solidFill>
+                  <a:srgbClr val="1C2833"/>
+                </a:solidFill>
+                <a:latin typeface="Arial" pitchFamily="34" charset="0"/>
+                <a:ea typeface="Arial" pitchFamily="34" charset="-122"/>
+                <a:cs typeface="Arial" pitchFamily="34" charset="-120"/>
+              </a:rPr>
+              <a:t>For pairs racing ahead: ask "what would happen if the tilt were 0°?" or "how would a Babylonian astronomer label this wheel differently?"</a:t>
             </a:r>
             <a:endParaRPr lang="en-US" sz="1200" dirty="0"/>
           </a:p>
@@ -2641,7 +2852,7 @@
                 <a:ea typeface="Georgia" pitchFamily="34" charset="-122"/>
                 <a:cs typeface="Georgia" pitchFamily="34" charset="-120"/>
               </a:rPr>
-              <a:t>Homework</a:t>
+              <a:t>Check-in (5 min)</a:t>
             </a:r>
             <a:endParaRPr lang="en-US" sz="1800" dirty="0"/>
           </a:p>
@@ -2689,7 +2900,1723 @@
                 <a:ea typeface="Arial" pitchFamily="34" charset="-122"/>
                 <a:cs typeface="Arial" pitchFamily="34" charset="-120"/>
               </a:rPr>
-              <a:t>– Finish at home what didn't get done in class. Bring back tomorrow ready to refine, not start. – If the pair worked separately, agree (over WhatsApp or in person) who finishes what.</a:t>
+              <a:t>Stop work at minute 40. Each pair holds up their current draft. The teacher does a quick visual scan and notes 2–3 pairs to circle back to first thing tomorrow.</a:t>
+            </a:r>
+            <a:endParaRPr lang="en-US" sz="1200" dirty="0"/>
+          </a:p>
+        </p:txBody>
+      </p:sp>
+      <p:sp>
+        <p:nvSpPr>
+          <p:cNvPr id="5" name="Text 3"/>
+          <p:cNvSpPr/>
+          <p:nvPr/>
+        </p:nvSpPr>
+        <p:spPr>
+          <a:xfrm>
+            <a:off x="634901" y="1386334"/>
+            <a:ext cx="8102798" cy="525661"/>
+          </a:xfrm>
+          <a:prstGeom prst="rect">
+            <a:avLst/>
+          </a:prstGeom>
+          <a:noFill/>
+          <a:ln/>
+        </p:spPr>
+        <p:txBody>
+          <a:bodyPr wrap="square" lIns="0" tIns="0" rIns="0" bIns="0" rtlCol="0" anchor="t"/>
+          <a:lstStyle/>
+          <a:p>
+            <a:pPr algn="l" marL="342900" indent="-342900">
+              <a:lnSpc>
+                <a:spcPts val="1620"/>
+              </a:lnSpc>
+              <a:spcAft>
+                <a:spcPts val="300"/>
+              </a:spcAft>
+              <a:buSzPct val="100000"/>
+              <a:buChar char="•"/>
+            </a:pPr>
+            <a:r>
+              <a:rPr lang="en-US" sz="1200" dirty="0">
+                <a:solidFill>
+                  <a:srgbClr val="1C2833"/>
+                </a:solidFill>
+                <a:latin typeface="Arial" pitchFamily="34" charset="0"/>
+                <a:ea typeface="Arial" pitchFamily="34" charset="-122"/>
+                <a:cs typeface="Arial" pitchFamily="34" charset="-120"/>
+              </a:rPr>
+              <a:t>Exit prompt: </a:t>
+            </a:r>
+            <a:pPr algn="l" indent="0" marL="0">
+              <a:lnSpc>
+                <a:spcPts val="1620"/>
+              </a:lnSpc>
+              <a:spcAft>
+                <a:spcPts val="300"/>
+              </a:spcAft>
+              <a:buNone/>
+            </a:pPr>
+            <a:r>
+              <a:rPr lang="en-US" sz="1200" i="1" dirty="0">
+                <a:solidFill>
+                  <a:srgbClr val="1C2833"/>
+                </a:solidFill>
+                <a:latin typeface="Arial" pitchFamily="34" charset="0"/>
+                <a:ea typeface="Arial" pitchFamily="34" charset="-122"/>
+                <a:cs typeface="Arial" pitchFamily="34" charset="-120"/>
+              </a:rPr>
+              <a:t>"What's the ONE thing you still need to finish before tomorrow?"</a:t>
+            </a:r>
+            <a:endParaRPr lang="en-US" sz="1200" dirty="0"/>
+          </a:p>
+          <a:p>
+            <a:pPr algn="l" marL="342900" indent="-342900">
+              <a:lnSpc>
+                <a:spcPts val="1620"/>
+              </a:lnSpc>
+              <a:spcAft>
+                <a:spcPts val="300"/>
+              </a:spcAft>
+              <a:buSzPct val="100000"/>
+              <a:buChar char="•"/>
+            </a:pPr>
+            <a:r>
+              <a:rPr lang="en-US" sz="1200" dirty="0">
+                <a:solidFill>
+                  <a:srgbClr val="1C2833"/>
+                </a:solidFill>
+                <a:latin typeface="Arial" pitchFamily="34" charset="0"/>
+                <a:ea typeface="Arial" pitchFamily="34" charset="-122"/>
+                <a:cs typeface="Arial" pitchFamily="34" charset="-120"/>
+              </a:rPr>
+              <a:t>Write it on a sticky note attached to the wheel.</a:t>
+            </a:r>
+            <a:endParaRPr lang="en-US" sz="1200" dirty="0"/>
+          </a:p>
+        </p:txBody>
+      </p:sp>
+      <p:sp>
+        <p:nvSpPr>
+          <p:cNvPr id="6" name="Text 4"/>
+          <p:cNvSpPr/>
+          <p:nvPr/>
+        </p:nvSpPr>
+        <p:spPr>
+          <a:xfrm>
+            <a:off x="406301" y="4434929"/>
+            <a:ext cx="8498026" cy="213271"/>
+          </a:xfrm>
+          <a:prstGeom prst="rect">
+            <a:avLst/>
+          </a:prstGeom>
+          <a:noFill/>
+          <a:ln/>
+        </p:spPr>
+        <p:txBody>
+          <a:bodyPr wrap="square" lIns="0" tIns="0" rIns="0" bIns="0" rtlCol="0" anchor="t"/>
+          <a:lstStyle/>
+          <a:p>
+            <a:pPr algn="l" indent="0" marL="0">
+              <a:lnSpc>
+                <a:spcPts val="1680"/>
+              </a:lnSpc>
+              <a:spcBef>
+                <a:spcPts val="300"/>
+              </a:spcBef>
+              <a:spcAft>
+                <a:spcPts val="300"/>
+              </a:spcAft>
+              <a:buNone/>
+            </a:pPr>
+            <a:r>
+              <a:rPr lang="en-US" sz="1200" dirty="0">
+                <a:solidFill>
+                  <a:srgbClr val="1C2833"/>
+                </a:solidFill>
+                <a:latin typeface="Arial" pitchFamily="34" charset="0"/>
+                <a:ea typeface="Arial" pitchFamily="34" charset="-122"/>
+                <a:cs typeface="Arial" pitchFamily="34" charset="-120"/>
+              </a:rPr>
+              <a:t>Middle ·  · IKS Curriculum</a:t>
+            </a:r>
+            <a:endParaRPr lang="en-US" sz="1200" dirty="0"/>
+          </a:p>
+        </p:txBody>
+      </p:sp>
+    </p:spTree>
+  </p:cSld>
+  <p:clrMapOvr>
+    <a:masterClrMapping/>
+  </p:clrMapOvr>
+</p:sld>
+</file>
+
+<file path=ppt/slides/slide12.xml><?xml version="1.0" encoding="utf-8"?>
+<p:sld xmlns:a="http://schemas.openxmlformats.org/drawingml/2006/main" xmlns:r="http://schemas.openxmlformats.org/officeDocument/2006/relationships" xmlns:p="http://schemas.openxmlformats.org/presentationml/2006/main">
+  <p:cSld name="Slide 12">
+    <p:bg>
+      <p:bgPr>
+        <a:solidFill>
+          <a:srgbClr val="FFFFFF"/>
+        </a:solidFill>
+      </p:bgPr>
+    </p:bg>
+    <p:spTree>
+      <p:nvGrpSpPr>
+        <p:cNvPr id="1" name=""/>
+        <p:cNvGrpSpPr/>
+        <p:nvPr/>
+      </p:nvGrpSpPr>
+      <p:grpSpPr>
+        <a:xfrm>
+          <a:off x="0" y="0"/>
+          <a:ext cx="0" cy="0"/>
+          <a:chOff x="0" y="0"/>
+          <a:chExt cx="0" cy="0"/>
+        </a:xfrm>
+      </p:grpSpPr>
+      <p:sp>
+        <p:nvSpPr>
+          <p:cNvPr id="2" name="Text 0"/>
+          <p:cNvSpPr/>
+          <p:nvPr/>
+        </p:nvSpPr>
+        <p:spPr>
+          <a:xfrm>
+            <a:off x="0" y="0"/>
+            <a:ext cx="9144000" cy="101501"/>
+          </a:xfrm>
+          <a:prstGeom prst="rect">
+            <a:avLst/>
+          </a:prstGeom>
+          <a:solidFill>
+            <a:srgbClr val="277884"/>
+          </a:solidFill>
+          <a:ln/>
+        </p:spPr>
+        <p:txBody>
+          <a:bodyPr wrap="square" rtlCol="0" anchor="ctr"/>
+          <a:lstStyle/>
+          <a:p>
+            <a:pPr indent="0" marL="0">
+              <a:buNone/>
+            </a:pPr>
+            <a:endParaRPr lang="en-US" dirty="0"/>
+          </a:p>
+        </p:txBody>
+      </p:sp>
+      <p:sp>
+        <p:nvSpPr>
+          <p:cNvPr id="3" name="Text 1"/>
+          <p:cNvSpPr/>
+          <p:nvPr/>
+        </p:nvSpPr>
+        <p:spPr>
+          <a:xfrm>
+            <a:off x="406301" y="457051"/>
+            <a:ext cx="8498026" cy="274290"/>
+          </a:xfrm>
+          <a:prstGeom prst="rect">
+            <a:avLst/>
+          </a:prstGeom>
+          <a:noFill/>
+          <a:ln/>
+        </p:spPr>
+        <p:txBody>
+          <a:bodyPr wrap="square" lIns="0" tIns="0" rIns="0" bIns="0" rtlCol="0" anchor="t"/>
+          <a:lstStyle/>
+          <a:p>
+            <a:pPr algn="l" indent="0" marL="0">
+              <a:lnSpc>
+                <a:spcPts val="2160"/>
+              </a:lnSpc>
+              <a:spcBef>
+                <a:spcPts val="600"/>
+              </a:spcBef>
+              <a:spcAft>
+                <a:spcPts val="800"/>
+              </a:spcAft>
+              <a:buNone/>
+            </a:pPr>
+            <a:r>
+              <a:rPr lang="en-US" sz="1800" b="1" dirty="0">
+                <a:solidFill>
+                  <a:srgbClr val="FE4447"/>
+                </a:solidFill>
+                <a:latin typeface="Georgia" pitchFamily="34" charset="0"/>
+                <a:ea typeface="Georgia" pitchFamily="34" charset="-122"/>
+                <a:cs typeface="Georgia" pitchFamily="34" charset="-120"/>
+              </a:rPr>
+              <a:t>Pair coaching prompts (for the teacher)</a:t>
+            </a:r>
+            <a:endParaRPr lang="en-US" sz="1800" dirty="0"/>
+          </a:p>
+        </p:txBody>
+      </p:sp>
+      <p:sp>
+        <p:nvSpPr>
+          <p:cNvPr id="4" name="Text 2"/>
+          <p:cNvSpPr/>
+          <p:nvPr/>
+        </p:nvSpPr>
+        <p:spPr>
+          <a:xfrm>
+            <a:off x="406301" y="870942"/>
+            <a:ext cx="8498026" cy="213271"/>
+          </a:xfrm>
+          <a:prstGeom prst="rect">
+            <a:avLst/>
+          </a:prstGeom>
+          <a:noFill/>
+          <a:ln/>
+        </p:spPr>
+        <p:txBody>
+          <a:bodyPr wrap="square" lIns="0" tIns="0" rIns="0" bIns="0" rtlCol="0" anchor="t"/>
+          <a:lstStyle/>
+          <a:p>
+            <a:pPr algn="l" indent="0" marL="0">
+              <a:lnSpc>
+                <a:spcPts val="1680"/>
+              </a:lnSpc>
+              <a:spcBef>
+                <a:spcPts val="300"/>
+              </a:spcBef>
+              <a:spcAft>
+                <a:spcPts val="300"/>
+              </a:spcAft>
+              <a:buNone/>
+            </a:pPr>
+            <a:r>
+              <a:rPr lang="en-US" sz="1200" i="1" dirty="0">
+                <a:solidFill>
+                  <a:srgbClr val="1C2833"/>
+                </a:solidFill>
+                <a:latin typeface="Arial" pitchFamily="34" charset="0"/>
+                <a:ea typeface="Arial" pitchFamily="34" charset="-122"/>
+                <a:cs typeface="Arial" pitchFamily="34" charset="-120"/>
+              </a:rPr>
+              <a:t>Each row: If you see ... · Try saying ....</a:t>
+            </a:r>
+            <a:endParaRPr lang="en-US" sz="1200" dirty="0"/>
+          </a:p>
+        </p:txBody>
+      </p:sp>
+      <p:sp>
+        <p:nvSpPr>
+          <p:cNvPr id="5" name="Text 3"/>
+          <p:cNvSpPr/>
+          <p:nvPr/>
+        </p:nvSpPr>
+        <p:spPr>
+          <a:xfrm>
+            <a:off x="406301" y="4434929"/>
+            <a:ext cx="8498026" cy="213271"/>
+          </a:xfrm>
+          <a:prstGeom prst="rect">
+            <a:avLst/>
+          </a:prstGeom>
+          <a:noFill/>
+          <a:ln/>
+        </p:spPr>
+        <p:txBody>
+          <a:bodyPr wrap="square" lIns="0" tIns="0" rIns="0" bIns="0" rtlCol="0" anchor="t"/>
+          <a:lstStyle/>
+          <a:p>
+            <a:pPr algn="l" indent="0" marL="0">
+              <a:lnSpc>
+                <a:spcPts val="1680"/>
+              </a:lnSpc>
+              <a:spcBef>
+                <a:spcPts val="300"/>
+              </a:spcBef>
+              <a:spcAft>
+                <a:spcPts val="300"/>
+              </a:spcAft>
+              <a:buNone/>
+            </a:pPr>
+            <a:r>
+              <a:rPr lang="en-US" sz="1200" dirty="0">
+                <a:solidFill>
+                  <a:srgbClr val="1C2833"/>
+                </a:solidFill>
+                <a:latin typeface="Arial" pitchFamily="34" charset="0"/>
+                <a:ea typeface="Arial" pitchFamily="34" charset="-122"/>
+                <a:cs typeface="Arial" pitchFamily="34" charset="-120"/>
+              </a:rPr>
+              <a:t>Middle ·  · IKS Curriculum</a:t>
+            </a:r>
+            <a:endParaRPr lang="en-US" sz="1200" dirty="0"/>
+          </a:p>
+        </p:txBody>
+      </p:sp>
+    </p:spTree>
+  </p:cSld>
+  <p:clrMapOvr>
+    <a:masterClrMapping/>
+  </p:clrMapOvr>
+</p:sld>
+</file>
+
+<file path=ppt/slides/slide13.xml><?xml version="1.0" encoding="utf-8"?>
+<p:sld xmlns:a="http://schemas.openxmlformats.org/drawingml/2006/main" xmlns:r="http://schemas.openxmlformats.org/officeDocument/2006/relationships" xmlns:p="http://schemas.openxmlformats.org/presentationml/2006/main">
+  <p:cSld name="Slide 13">
+    <p:bg>
+      <p:bgPr>
+        <a:solidFill>
+          <a:srgbClr val="FFFFFF"/>
+        </a:solidFill>
+      </p:bgPr>
+    </p:bg>
+    <p:spTree>
+      <p:nvGrpSpPr>
+        <p:cNvPr id="1" name=""/>
+        <p:cNvGrpSpPr/>
+        <p:nvPr/>
+      </p:nvGrpSpPr>
+      <p:grpSpPr>
+        <a:xfrm>
+          <a:off x="0" y="0"/>
+          <a:ext cx="0" cy="0"/>
+          <a:chOff x="0" y="0"/>
+          <a:chExt cx="0" cy="0"/>
+        </a:xfrm>
+      </p:grpSpPr>
+      <p:sp>
+        <p:nvSpPr>
+          <p:cNvPr id="2" name="Text 0"/>
+          <p:cNvSpPr/>
+          <p:nvPr/>
+        </p:nvSpPr>
+        <p:spPr>
+          <a:xfrm>
+            <a:off x="0" y="0"/>
+            <a:ext cx="9144000" cy="101501"/>
+          </a:xfrm>
+          <a:prstGeom prst="rect">
+            <a:avLst/>
+          </a:prstGeom>
+          <a:solidFill>
+            <a:srgbClr val="277884"/>
+          </a:solidFill>
+          <a:ln/>
+        </p:spPr>
+        <p:txBody>
+          <a:bodyPr wrap="square" rtlCol="0" anchor="ctr"/>
+          <a:lstStyle/>
+          <a:p>
+            <a:pPr indent="0" marL="0">
+              <a:buNone/>
+            </a:pPr>
+            <a:endParaRPr lang="en-US" dirty="0"/>
+          </a:p>
+        </p:txBody>
+      </p:sp>
+      <p:sp>
+        <p:nvSpPr>
+          <p:cNvPr id="3" name="Text 1"/>
+          <p:cNvSpPr/>
+          <p:nvPr/>
+        </p:nvSpPr>
+        <p:spPr>
+          <a:xfrm>
+            <a:off x="406301" y="457051"/>
+            <a:ext cx="8498026" cy="274290"/>
+          </a:xfrm>
+          <a:prstGeom prst="rect">
+            <a:avLst/>
+          </a:prstGeom>
+          <a:noFill/>
+          <a:ln/>
+        </p:spPr>
+        <p:txBody>
+          <a:bodyPr wrap="square" lIns="0" tIns="0" rIns="0" bIns="0" rtlCol="0" anchor="t"/>
+          <a:lstStyle/>
+          <a:p>
+            <a:pPr algn="l" indent="0" marL="0">
+              <a:lnSpc>
+                <a:spcPts val="2160"/>
+              </a:lnSpc>
+              <a:spcBef>
+                <a:spcPts val="600"/>
+              </a:spcBef>
+              <a:spcAft>
+                <a:spcPts val="800"/>
+              </a:spcAft>
+              <a:buNone/>
+            </a:pPr>
+            <a:r>
+              <a:rPr lang="en-US" sz="1800" b="1" dirty="0">
+                <a:solidFill>
+                  <a:srgbClr val="FE4447"/>
+                </a:solidFill>
+                <a:latin typeface="Georgia" pitchFamily="34" charset="0"/>
+                <a:ea typeface="Georgia" pitchFamily="34" charset="-122"/>
+                <a:cs typeface="Georgia" pitchFamily="34" charset="-120"/>
+              </a:rPr>
+              <a:t>Pair coaching prompts (for the teacher) (cont.)</a:t>
+            </a:r>
+            <a:endParaRPr lang="en-US" sz="1800" dirty="0"/>
+          </a:p>
+        </p:txBody>
+      </p:sp>
+      <p:sp>
+        <p:nvSpPr>
+          <p:cNvPr id="4" name="Text 2"/>
+          <p:cNvSpPr/>
+          <p:nvPr/>
+        </p:nvSpPr>
+        <p:spPr>
+          <a:xfrm>
+            <a:off x="634901" y="883593"/>
+            <a:ext cx="8102798" cy="1424583"/>
+          </a:xfrm>
+          <a:prstGeom prst="rect">
+            <a:avLst/>
+          </a:prstGeom>
+          <a:noFill/>
+          <a:ln/>
+        </p:spPr>
+        <p:txBody>
+          <a:bodyPr wrap="square" lIns="0" tIns="0" rIns="0" bIns="0" rtlCol="0" anchor="t"/>
+          <a:lstStyle/>
+          <a:p>
+            <a:pPr algn="l" marL="342900" indent="-342900">
+              <a:lnSpc>
+                <a:spcPts val="1620"/>
+              </a:lnSpc>
+              <a:spcAft>
+                <a:spcPts val="300"/>
+              </a:spcAft>
+              <a:buSzPct val="100000"/>
+              <a:buChar char="•"/>
+            </a:pPr>
+            <a:r>
+              <a:rPr lang="en-US" sz="1200" b="1" dirty="0">
+                <a:solidFill>
+                  <a:srgbClr val="1C2833"/>
+                </a:solidFill>
+                <a:latin typeface="Arial" pitchFamily="34" charset="0"/>
+                <a:ea typeface="Arial" pitchFamily="34" charset="-122"/>
+                <a:cs typeface="Arial" pitchFamily="34" charset="-120"/>
+              </a:rPr>
+              <a:t>One partner doing all the drawing</a:t>
+            </a:r>
+            <a:pPr algn="l" indent="0" marL="0">
+              <a:lnSpc>
+                <a:spcPts val="1620"/>
+              </a:lnSpc>
+              <a:spcAft>
+                <a:spcPts val="300"/>
+              </a:spcAft>
+              <a:buNone/>
+            </a:pPr>
+            <a:r>
+              <a:rPr lang="en-US" sz="1200" dirty="0">
+                <a:solidFill>
+                  <a:srgbClr val="1C2833"/>
+                </a:solidFill>
+                <a:latin typeface="Arial" pitchFamily="34" charset="0"/>
+                <a:ea typeface="Arial" pitchFamily="34" charset="-122"/>
+                <a:cs typeface="Arial" pitchFamily="34" charset="-120"/>
+              </a:rPr>
+              <a:t> — "Tell me what your partner is contributing. Where will their writing go?"</a:t>
+            </a:r>
+            <a:endParaRPr lang="en-US" sz="1200" dirty="0"/>
+          </a:p>
+          <a:p>
+            <a:pPr algn="l" marL="342900" indent="-342900">
+              <a:lnSpc>
+                <a:spcPts val="1620"/>
+              </a:lnSpc>
+              <a:spcAft>
+                <a:spcPts val="300"/>
+              </a:spcAft>
+              <a:buSzPct val="100000"/>
+              <a:buChar char="•"/>
+            </a:pPr>
+            <a:r>
+              <a:rPr lang="en-US" sz="1200" b="1" dirty="0">
+                <a:solidFill>
+                  <a:srgbClr val="1C2833"/>
+                </a:solidFill>
+                <a:latin typeface="Arial" pitchFamily="34" charset="0"/>
+                <a:ea typeface="Arial" pitchFamily="34" charset="-122"/>
+                <a:cs typeface="Arial" pitchFamily="34" charset="-120"/>
+              </a:rPr>
+              <a:t>A wheel with English names only</a:t>
+            </a:r>
+            <a:pPr algn="l" indent="0" marL="0">
+              <a:lnSpc>
+                <a:spcPts val="1620"/>
+              </a:lnSpc>
+              <a:spcAft>
+                <a:spcPts val="300"/>
+              </a:spcAft>
+              <a:buNone/>
+            </a:pPr>
+            <a:r>
+              <a:rPr lang="en-US" sz="1200" dirty="0">
+                <a:solidFill>
+                  <a:srgbClr val="1C2833"/>
+                </a:solidFill>
+                <a:latin typeface="Arial" pitchFamily="34" charset="0"/>
+                <a:ea typeface="Arial" pitchFamily="34" charset="-122"/>
+                <a:cs typeface="Arial" pitchFamily="34" charset="-120"/>
+              </a:rPr>
+              <a:t> — "Where do the Sanskrit names go? Show me."</a:t>
+            </a:r>
+            <a:endParaRPr lang="en-US" sz="1200" dirty="0"/>
+          </a:p>
+          <a:p>
+            <a:pPr algn="l" marL="342900" indent="-342900">
+              <a:lnSpc>
+                <a:spcPts val="1620"/>
+              </a:lnSpc>
+              <a:spcAft>
+                <a:spcPts val="300"/>
+              </a:spcAft>
+              <a:buSzPct val="100000"/>
+              <a:buChar char="•"/>
+            </a:pPr>
+            <a:r>
+              <a:rPr lang="en-US" sz="1200" dirty="0">
+                <a:solidFill>
+                  <a:srgbClr val="1C2833"/>
+                </a:solidFill>
+                <a:latin typeface="Arial" pitchFamily="34" charset="0"/>
+                <a:ea typeface="Arial" pitchFamily="34" charset="-122"/>
+                <a:cs typeface="Arial" pitchFamily="34" charset="-120"/>
+              </a:rPr>
+              <a:t>Confusion about </a:t>
+            </a:r>
+            <a:pPr algn="l" indent="0" marL="0">
+              <a:lnSpc>
+                <a:spcPts val="1620"/>
+              </a:lnSpc>
+              <a:spcAft>
+                <a:spcPts val="300"/>
+              </a:spcAft>
+              <a:buNone/>
+            </a:pPr>
+            <a:r>
+              <a:rPr lang="en-US" sz="1200" i="1" dirty="0">
+                <a:solidFill>
+                  <a:srgbClr val="1C2833"/>
+                </a:solidFill>
+                <a:latin typeface="Arial" pitchFamily="34" charset="0"/>
+                <a:ea typeface="Arial" pitchFamily="34" charset="-122"/>
+                <a:cs typeface="Arial" pitchFamily="34" charset="-120"/>
+              </a:rPr>
+              <a:t>sāyana</a:t>
+            </a:r>
+            <a:pPr algn="l" indent="0" marL="0">
+              <a:lnSpc>
+                <a:spcPts val="1620"/>
+              </a:lnSpc>
+              <a:spcAft>
+                <a:spcPts val="300"/>
+              </a:spcAft>
+              <a:buNone/>
+            </a:pPr>
+            <a:r>
+              <a:rPr lang="en-US" sz="1200" dirty="0">
+                <a:solidFill>
+                  <a:srgbClr val="1C2833"/>
+                </a:solidFill>
+                <a:latin typeface="Arial" pitchFamily="34" charset="0"/>
+                <a:ea typeface="Arial" pitchFamily="34" charset="-122"/>
+                <a:cs typeface="Arial" pitchFamily="34" charset="-120"/>
+              </a:rPr>
+              <a:t> vs </a:t>
+            </a:r>
+            <a:pPr algn="l" indent="0" marL="0">
+              <a:lnSpc>
+                <a:spcPts val="1620"/>
+              </a:lnSpc>
+              <a:spcAft>
+                <a:spcPts val="300"/>
+              </a:spcAft>
+              <a:buNone/>
+            </a:pPr>
+            <a:r>
+              <a:rPr lang="en-US" sz="1200" i="1" dirty="0">
+                <a:solidFill>
+                  <a:srgbClr val="1C2833"/>
+                </a:solidFill>
+                <a:latin typeface="Arial" pitchFamily="34" charset="0"/>
+                <a:ea typeface="Arial" pitchFamily="34" charset="-122"/>
+                <a:cs typeface="Arial" pitchFamily="34" charset="-120"/>
+              </a:rPr>
+              <a:t>nirayana</a:t>
+            </a:r>
+            <a:pPr algn="l" indent="0" marL="0">
+              <a:lnSpc>
+                <a:spcPts val="1620"/>
+              </a:lnSpc>
+              <a:spcAft>
+                <a:spcPts val="300"/>
+              </a:spcAft>
+              <a:buNone/>
+            </a:pPr>
+            <a:r>
+              <a:rPr lang="en-US" sz="1200" dirty="0">
+                <a:solidFill>
+                  <a:srgbClr val="1C2833"/>
+                </a:solidFill>
+                <a:latin typeface="Arial" pitchFamily="34" charset="0"/>
+                <a:ea typeface="Arial" pitchFamily="34" charset="-122"/>
+                <a:cs typeface="Arial" pitchFamily="34" charset="-120"/>
+              </a:rPr>
+              <a:t> — "Pick the four turning-points. Write the December solstice date on one line. Now write the Makara Saṁkrānti date below it. They're different — your job is to make that visible on the wheel."</a:t>
+            </a:r>
+            <a:endParaRPr lang="en-US" sz="1200" dirty="0"/>
+          </a:p>
+          <a:p>
+            <a:pPr algn="l" marL="342900" indent="-342900">
+              <a:lnSpc>
+                <a:spcPts val="1620"/>
+              </a:lnSpc>
+              <a:spcAft>
+                <a:spcPts val="300"/>
+              </a:spcAft>
+              <a:buSzPct val="100000"/>
+              <a:buChar char="•"/>
+            </a:pPr>
+            <a:r>
+              <a:rPr lang="en-US" sz="1200" b="1" dirty="0">
+                <a:solidFill>
+                  <a:srgbClr val="1C2833"/>
+                </a:solidFill>
+                <a:latin typeface="Arial" pitchFamily="34" charset="0"/>
+                <a:ea typeface="Arial" pitchFamily="34" charset="-122"/>
+                <a:cs typeface="Arial" pitchFamily="34" charset="-120"/>
+              </a:rPr>
+              <a:t>Beautiful art, no astronomy</a:t>
+            </a:r>
+            <a:pPr algn="l" indent="0" marL="0">
+              <a:lnSpc>
+                <a:spcPts val="1620"/>
+              </a:lnSpc>
+              <a:spcAft>
+                <a:spcPts val="300"/>
+              </a:spcAft>
+              <a:buNone/>
+            </a:pPr>
+            <a:r>
+              <a:rPr lang="en-US" sz="1200" dirty="0">
+                <a:solidFill>
+                  <a:srgbClr val="1C2833"/>
+                </a:solidFill>
+                <a:latin typeface="Arial" pitchFamily="34" charset="0"/>
+                <a:ea typeface="Arial" pitchFamily="34" charset="-122"/>
+                <a:cs typeface="Arial" pitchFamily="34" charset="-120"/>
+              </a:rPr>
+              <a:t> — "Where on the wheel does the reader learn that the seasons come from axial tilt? Add a sentence."</a:t>
+            </a:r>
+            <a:endParaRPr lang="en-US" sz="1200" dirty="0"/>
+          </a:p>
+        </p:txBody>
+      </p:sp>
+      <p:sp>
+        <p:nvSpPr>
+          <p:cNvPr id="5" name="Text 3"/>
+          <p:cNvSpPr/>
+          <p:nvPr/>
+        </p:nvSpPr>
+        <p:spPr>
+          <a:xfrm>
+            <a:off x="406301" y="4434929"/>
+            <a:ext cx="8498026" cy="213271"/>
+          </a:xfrm>
+          <a:prstGeom prst="rect">
+            <a:avLst/>
+          </a:prstGeom>
+          <a:noFill/>
+          <a:ln/>
+        </p:spPr>
+        <p:txBody>
+          <a:bodyPr wrap="square" lIns="0" tIns="0" rIns="0" bIns="0" rtlCol="0" anchor="t"/>
+          <a:lstStyle/>
+          <a:p>
+            <a:pPr algn="l" indent="0" marL="0">
+              <a:lnSpc>
+                <a:spcPts val="1680"/>
+              </a:lnSpc>
+              <a:spcBef>
+                <a:spcPts val="300"/>
+              </a:spcBef>
+              <a:spcAft>
+                <a:spcPts val="300"/>
+              </a:spcAft>
+              <a:buNone/>
+            </a:pPr>
+            <a:r>
+              <a:rPr lang="en-US" sz="1200" dirty="0">
+                <a:solidFill>
+                  <a:srgbClr val="1C2833"/>
+                </a:solidFill>
+                <a:latin typeface="Arial" pitchFamily="34" charset="0"/>
+                <a:ea typeface="Arial" pitchFamily="34" charset="-122"/>
+                <a:cs typeface="Arial" pitchFamily="34" charset="-120"/>
+              </a:rPr>
+              <a:t>Middle ·  · IKS Curriculum</a:t>
+            </a:r>
+            <a:endParaRPr lang="en-US" sz="1200" dirty="0"/>
+          </a:p>
+        </p:txBody>
+      </p:sp>
+    </p:spTree>
+  </p:cSld>
+  <p:clrMapOvr>
+    <a:masterClrMapping/>
+  </p:clrMapOvr>
+</p:sld>
+</file>
+
+<file path=ppt/slides/slide14.xml><?xml version="1.0" encoding="utf-8"?>
+<p:sld xmlns:a="http://schemas.openxmlformats.org/drawingml/2006/main" xmlns:r="http://schemas.openxmlformats.org/officeDocument/2006/relationships" xmlns:p="http://schemas.openxmlformats.org/presentationml/2006/main">
+  <p:cSld name="Slide 14">
+    <p:bg>
+      <p:bgPr>
+        <a:solidFill>
+          <a:srgbClr val="FFFFFF"/>
+        </a:solidFill>
+      </p:bgPr>
+    </p:bg>
+    <p:spTree>
+      <p:nvGrpSpPr>
+        <p:cNvPr id="1" name=""/>
+        <p:cNvGrpSpPr/>
+        <p:nvPr/>
+      </p:nvGrpSpPr>
+      <p:grpSpPr>
+        <a:xfrm>
+          <a:off x="0" y="0"/>
+          <a:ext cx="0" cy="0"/>
+          <a:chOff x="0" y="0"/>
+          <a:chExt cx="0" cy="0"/>
+        </a:xfrm>
+      </p:grpSpPr>
+      <p:sp>
+        <p:nvSpPr>
+          <p:cNvPr id="2" name="Text 0"/>
+          <p:cNvSpPr/>
+          <p:nvPr/>
+        </p:nvSpPr>
+        <p:spPr>
+          <a:xfrm>
+            <a:off x="0" y="0"/>
+            <a:ext cx="9144000" cy="101501"/>
+          </a:xfrm>
+          <a:prstGeom prst="rect">
+            <a:avLst/>
+          </a:prstGeom>
+          <a:solidFill>
+            <a:srgbClr val="277884"/>
+          </a:solidFill>
+          <a:ln/>
+        </p:spPr>
+        <p:txBody>
+          <a:bodyPr wrap="square" rtlCol="0" anchor="ctr"/>
+          <a:lstStyle/>
+          <a:p>
+            <a:pPr indent="0" marL="0">
+              <a:buNone/>
+            </a:pPr>
+            <a:endParaRPr lang="en-US" dirty="0"/>
+          </a:p>
+        </p:txBody>
+      </p:sp>
+      <p:sp>
+        <p:nvSpPr>
+          <p:cNvPr id="3" name="Text 1"/>
+          <p:cNvSpPr/>
+          <p:nvPr/>
+        </p:nvSpPr>
+        <p:spPr>
+          <a:xfrm>
+            <a:off x="406301" y="457051"/>
+            <a:ext cx="8498026" cy="274290"/>
+          </a:xfrm>
+          <a:prstGeom prst="rect">
+            <a:avLst/>
+          </a:prstGeom>
+          <a:noFill/>
+          <a:ln/>
+        </p:spPr>
+        <p:txBody>
+          <a:bodyPr wrap="square" lIns="0" tIns="0" rIns="0" bIns="0" rtlCol="0" anchor="t"/>
+          <a:lstStyle/>
+          <a:p>
+            <a:pPr algn="l" indent="0" marL="0">
+              <a:lnSpc>
+                <a:spcPts val="2160"/>
+              </a:lnSpc>
+              <a:spcBef>
+                <a:spcPts val="600"/>
+              </a:spcBef>
+              <a:spcAft>
+                <a:spcPts val="800"/>
+              </a:spcAft>
+              <a:buNone/>
+            </a:pPr>
+            <a:r>
+              <a:rPr lang="en-US" sz="1800" b="1" dirty="0">
+                <a:solidFill>
+                  <a:srgbClr val="FE4447"/>
+                </a:solidFill>
+                <a:latin typeface="Georgia" pitchFamily="34" charset="0"/>
+                <a:ea typeface="Georgia" pitchFamily="34" charset="-122"/>
+                <a:cs typeface="Georgia" pitchFamily="34" charset="-120"/>
+              </a:rPr>
+              <a:t>Differentiation</a:t>
+            </a:r>
+            <a:endParaRPr lang="en-US" sz="1800" dirty="0"/>
+          </a:p>
+        </p:txBody>
+      </p:sp>
+      <p:sp>
+        <p:nvSpPr>
+          <p:cNvPr id="4" name="Text 2"/>
+          <p:cNvSpPr/>
+          <p:nvPr/>
+        </p:nvSpPr>
+        <p:spPr>
+          <a:xfrm>
+            <a:off x="634901" y="883593"/>
+            <a:ext cx="8102798" cy="937022"/>
+          </a:xfrm>
+          <a:prstGeom prst="rect">
+            <a:avLst/>
+          </a:prstGeom>
+          <a:noFill/>
+          <a:ln/>
+        </p:spPr>
+        <p:txBody>
+          <a:bodyPr wrap="square" lIns="0" tIns="0" rIns="0" bIns="0" rtlCol="0" anchor="t"/>
+          <a:lstStyle/>
+          <a:p>
+            <a:pPr algn="l" marL="342900" indent="-342900">
+              <a:lnSpc>
+                <a:spcPts val="1620"/>
+              </a:lnSpc>
+              <a:spcAft>
+                <a:spcPts val="300"/>
+              </a:spcAft>
+              <a:buSzPct val="100000"/>
+              <a:buChar char="•"/>
+            </a:pPr>
+            <a:r>
+              <a:rPr lang="en-US" sz="1200" b="1" dirty="0">
+                <a:solidFill>
+                  <a:srgbClr val="1C2833"/>
+                </a:solidFill>
+                <a:latin typeface="Arial" pitchFamily="34" charset="0"/>
+                <a:ea typeface="Arial" pitchFamily="34" charset="-122"/>
+                <a:cs typeface="Arial" pitchFamily="34" charset="-120"/>
+              </a:rPr>
+              <a:t>One tier up:</a:t>
+            </a:r>
+            <a:pPr algn="l" indent="0" marL="0">
+              <a:lnSpc>
+                <a:spcPts val="1620"/>
+              </a:lnSpc>
+              <a:spcAft>
+                <a:spcPts val="300"/>
+              </a:spcAft>
+              <a:buNone/>
+            </a:pPr>
+            <a:r>
+              <a:rPr lang="en-US" sz="1200" dirty="0">
+                <a:solidFill>
+                  <a:srgbClr val="1C2833"/>
+                </a:solidFill>
+                <a:latin typeface="Arial" pitchFamily="34" charset="0"/>
+                <a:ea typeface="Arial" pitchFamily="34" charset="-122"/>
+                <a:cs typeface="Arial" pitchFamily="34" charset="-120"/>
+              </a:rPr>
+              <a:t> Add a second concentric ring showing the Western horoscope (</a:t>
+            </a:r>
+            <a:pPr algn="l" indent="0" marL="0">
+              <a:lnSpc>
+                <a:spcPts val="1620"/>
+              </a:lnSpc>
+              <a:spcAft>
+                <a:spcPts val="300"/>
+              </a:spcAft>
+              <a:buNone/>
+            </a:pPr>
+            <a:r>
+              <a:rPr lang="en-US" sz="1200" i="1" dirty="0">
+                <a:solidFill>
+                  <a:srgbClr val="1C2833"/>
+                </a:solidFill>
+                <a:latin typeface="Arial" pitchFamily="34" charset="0"/>
+                <a:ea typeface="Arial" pitchFamily="34" charset="-122"/>
+                <a:cs typeface="Arial" pitchFamily="34" charset="-120"/>
+              </a:rPr>
+              <a:t>sāyana</a:t>
+            </a:r>
+            <a:pPr algn="l" indent="0" marL="0">
+              <a:lnSpc>
+                <a:spcPts val="1620"/>
+              </a:lnSpc>
+              <a:spcAft>
+                <a:spcPts val="300"/>
+              </a:spcAft>
+              <a:buNone/>
+            </a:pPr>
+            <a:r>
+              <a:rPr lang="en-US" sz="1200" dirty="0">
+                <a:solidFill>
+                  <a:srgbClr val="1C2833"/>
+                </a:solidFill>
+                <a:latin typeface="Arial" pitchFamily="34" charset="0"/>
+                <a:ea typeface="Arial" pitchFamily="34" charset="-122"/>
+                <a:cs typeface="Arial" pitchFamily="34" charset="-120"/>
+              </a:rPr>
+              <a:t>) date range for each </a:t>
+            </a:r>
+            <a:pPr algn="l" indent="0" marL="0">
+              <a:lnSpc>
+                <a:spcPts val="1620"/>
+              </a:lnSpc>
+              <a:spcAft>
+                <a:spcPts val="300"/>
+              </a:spcAft>
+              <a:buNone/>
+            </a:pPr>
+            <a:r>
+              <a:rPr lang="en-US" sz="1200" i="1" dirty="0">
+                <a:solidFill>
+                  <a:srgbClr val="1C2833"/>
+                </a:solidFill>
+                <a:latin typeface="Arial" pitchFamily="34" charset="0"/>
+                <a:ea typeface="Arial" pitchFamily="34" charset="-122"/>
+                <a:cs typeface="Arial" pitchFamily="34" charset="-120"/>
+              </a:rPr>
+              <a:t>rāśi</a:t>
+            </a:r>
+            <a:pPr algn="l" indent="0" marL="0">
+              <a:lnSpc>
+                <a:spcPts val="1620"/>
+              </a:lnSpc>
+              <a:spcAft>
+                <a:spcPts val="300"/>
+              </a:spcAft>
+              <a:buNone/>
+            </a:pPr>
+            <a:r>
+              <a:rPr lang="en-US" sz="1200" dirty="0">
+                <a:solidFill>
+                  <a:srgbClr val="1C2833"/>
+                </a:solidFill>
+                <a:latin typeface="Arial" pitchFamily="34" charset="0"/>
+                <a:ea typeface="Arial" pitchFamily="34" charset="-122"/>
+                <a:cs typeface="Arial" pitchFamily="34" charset="-120"/>
+              </a:rPr>
+              <a:t>. The reader should be able to compare the two rings at a glance.</a:t>
+            </a:r>
+            <a:endParaRPr lang="en-US" sz="1200" dirty="0"/>
+          </a:p>
+          <a:p>
+            <a:pPr algn="l" marL="342900" indent="-342900">
+              <a:lnSpc>
+                <a:spcPts val="1620"/>
+              </a:lnSpc>
+              <a:spcAft>
+                <a:spcPts val="300"/>
+              </a:spcAft>
+              <a:buSzPct val="100000"/>
+              <a:buChar char="•"/>
+            </a:pPr>
+            <a:r>
+              <a:rPr lang="en-US" sz="1200" b="1" dirty="0">
+                <a:solidFill>
+                  <a:srgbClr val="1C2833"/>
+                </a:solidFill>
+                <a:latin typeface="Arial" pitchFamily="34" charset="0"/>
+                <a:ea typeface="Arial" pitchFamily="34" charset="-122"/>
+                <a:cs typeface="Arial" pitchFamily="34" charset="-120"/>
+              </a:rPr>
+              <a:t>One tier down:</a:t>
+            </a:r>
+            <a:pPr algn="l" indent="0" marL="0">
+              <a:lnSpc>
+                <a:spcPts val="1620"/>
+              </a:lnSpc>
+              <a:spcAft>
+                <a:spcPts val="300"/>
+              </a:spcAft>
+              <a:buNone/>
+            </a:pPr>
+            <a:r>
+              <a:rPr lang="en-US" sz="1200" dirty="0">
+                <a:solidFill>
+                  <a:srgbClr val="1C2833"/>
+                </a:solidFill>
+                <a:latin typeface="Arial" pitchFamily="34" charset="0"/>
+                <a:ea typeface="Arial" pitchFamily="34" charset="-122"/>
+                <a:cs typeface="Arial" pitchFamily="34" charset="-120"/>
+              </a:rPr>
+              <a:t> Drop the </a:t>
+            </a:r>
+            <a:pPr algn="l" indent="0" marL="0">
+              <a:lnSpc>
+                <a:spcPts val="1620"/>
+              </a:lnSpc>
+              <a:spcAft>
+                <a:spcPts val="300"/>
+              </a:spcAft>
+              <a:buNone/>
+            </a:pPr>
+            <a:r>
+              <a:rPr lang="en-US" sz="1200" i="1" dirty="0">
+                <a:solidFill>
+                  <a:srgbClr val="1C2833"/>
+                </a:solidFill>
+                <a:latin typeface="Arial" pitchFamily="34" charset="0"/>
+                <a:ea typeface="Arial" pitchFamily="34" charset="-122"/>
+                <a:cs typeface="Arial" pitchFamily="34" charset="-120"/>
+              </a:rPr>
+              <a:t>sāyana</a:t>
+            </a:r>
+            <a:pPr algn="l" indent="0" marL="0">
+              <a:lnSpc>
+                <a:spcPts val="1620"/>
+              </a:lnSpc>
+              <a:spcAft>
+                <a:spcPts val="300"/>
+              </a:spcAft>
+              <a:buNone/>
+            </a:pPr>
+            <a:r>
+              <a:rPr lang="en-US" sz="1200" dirty="0">
+                <a:solidFill>
+                  <a:srgbClr val="1C2833"/>
+                </a:solidFill>
+                <a:latin typeface="Arial" pitchFamily="34" charset="0"/>
+                <a:ea typeface="Arial" pitchFamily="34" charset="-122"/>
+                <a:cs typeface="Arial" pitchFamily="34" charset="-120"/>
+              </a:rPr>
+              <a:t> / </a:t>
+            </a:r>
+            <a:pPr algn="l" indent="0" marL="0">
+              <a:lnSpc>
+                <a:spcPts val="1620"/>
+              </a:lnSpc>
+              <a:spcAft>
+                <a:spcPts val="300"/>
+              </a:spcAft>
+              <a:buNone/>
+            </a:pPr>
+            <a:r>
+              <a:rPr lang="en-US" sz="1200" i="1" dirty="0">
+                <a:solidFill>
+                  <a:srgbClr val="1C2833"/>
+                </a:solidFill>
+                <a:latin typeface="Arial" pitchFamily="34" charset="0"/>
+                <a:ea typeface="Arial" pitchFamily="34" charset="-122"/>
+                <a:cs typeface="Arial" pitchFamily="34" charset="-120"/>
+              </a:rPr>
+              <a:t>nirayana</a:t>
+            </a:r>
+            <a:pPr algn="l" indent="0" marL="0">
+              <a:lnSpc>
+                <a:spcPts val="1620"/>
+              </a:lnSpc>
+              <a:spcAft>
+                <a:spcPts val="300"/>
+              </a:spcAft>
+              <a:buNone/>
+            </a:pPr>
+            <a:r>
+              <a:rPr lang="en-US" sz="1200" dirty="0">
+                <a:solidFill>
+                  <a:srgbClr val="1C2833"/>
+                </a:solidFill>
+                <a:latin typeface="Arial" pitchFamily="34" charset="0"/>
+                <a:ea typeface="Arial" pitchFamily="34" charset="-122"/>
+                <a:cs typeface="Arial" pitchFamily="34" charset="-120"/>
+              </a:rPr>
+              <a:t> dual labelling. Just label one set of dates clearly. The </a:t>
+            </a:r>
+            <a:pPr algn="l" indent="0" marL="0">
+              <a:lnSpc>
+                <a:spcPts val="1620"/>
+              </a:lnSpc>
+              <a:spcAft>
+                <a:spcPts val="300"/>
+              </a:spcAft>
+              <a:buNone/>
+            </a:pPr>
+            <a:r>
+              <a:rPr lang="en-US" sz="1200" i="1" dirty="0">
+                <a:solidFill>
+                  <a:srgbClr val="1C2833"/>
+                </a:solidFill>
+                <a:latin typeface="Arial" pitchFamily="34" charset="0"/>
+                <a:ea typeface="Arial" pitchFamily="34" charset="-122"/>
+                <a:cs typeface="Arial" pitchFamily="34" charset="-120"/>
+              </a:rPr>
+              <a:t>ayanāṁśa</a:t>
+            </a:r>
+            <a:pPr algn="l" indent="0" marL="0">
+              <a:lnSpc>
+                <a:spcPts val="1620"/>
+              </a:lnSpc>
+              <a:spcAft>
+                <a:spcPts val="300"/>
+              </a:spcAft>
+              <a:buNone/>
+            </a:pPr>
+            <a:r>
+              <a:rPr lang="en-US" sz="1200" dirty="0">
+                <a:solidFill>
+                  <a:srgbClr val="1C2833"/>
+                </a:solidFill>
+                <a:latin typeface="Arial" pitchFamily="34" charset="0"/>
+                <a:ea typeface="Arial" pitchFamily="34" charset="-122"/>
+                <a:cs typeface="Arial" pitchFamily="34" charset="-120"/>
+              </a:rPr>
+              <a:t> concept appears only in the written paragraph.</a:t>
+            </a:r>
+            <a:endParaRPr lang="en-US" sz="1200" dirty="0"/>
+          </a:p>
+        </p:txBody>
+      </p:sp>
+      <p:sp>
+        <p:nvSpPr>
+          <p:cNvPr id="5" name="Text 3"/>
+          <p:cNvSpPr/>
+          <p:nvPr/>
+        </p:nvSpPr>
+        <p:spPr>
+          <a:xfrm>
+            <a:off x="406301" y="4434929"/>
+            <a:ext cx="8498026" cy="213271"/>
+          </a:xfrm>
+          <a:prstGeom prst="rect">
+            <a:avLst/>
+          </a:prstGeom>
+          <a:noFill/>
+          <a:ln/>
+        </p:spPr>
+        <p:txBody>
+          <a:bodyPr wrap="square" lIns="0" tIns="0" rIns="0" bIns="0" rtlCol="0" anchor="t"/>
+          <a:lstStyle/>
+          <a:p>
+            <a:pPr algn="l" indent="0" marL="0">
+              <a:lnSpc>
+                <a:spcPts val="1680"/>
+              </a:lnSpc>
+              <a:spcBef>
+                <a:spcPts val="300"/>
+              </a:spcBef>
+              <a:spcAft>
+                <a:spcPts val="300"/>
+              </a:spcAft>
+              <a:buNone/>
+            </a:pPr>
+            <a:r>
+              <a:rPr lang="en-US" sz="1200" dirty="0">
+                <a:solidFill>
+                  <a:srgbClr val="1C2833"/>
+                </a:solidFill>
+                <a:latin typeface="Arial" pitchFamily="34" charset="0"/>
+                <a:ea typeface="Arial" pitchFamily="34" charset="-122"/>
+                <a:cs typeface="Arial" pitchFamily="34" charset="-120"/>
+              </a:rPr>
+              <a:t>Middle ·  · IKS Curriculum</a:t>
+            </a:r>
+            <a:endParaRPr lang="en-US" sz="1200" dirty="0"/>
+          </a:p>
+        </p:txBody>
+      </p:sp>
+    </p:spTree>
+  </p:cSld>
+  <p:clrMapOvr>
+    <a:masterClrMapping/>
+  </p:clrMapOvr>
+</p:sld>
+</file>
+
+<file path=ppt/slides/slide15.xml><?xml version="1.0" encoding="utf-8"?>
+<p:sld xmlns:a="http://schemas.openxmlformats.org/drawingml/2006/main" xmlns:r="http://schemas.openxmlformats.org/officeDocument/2006/relationships" xmlns:p="http://schemas.openxmlformats.org/presentationml/2006/main">
+  <p:cSld name="Slide 15">
+    <p:bg>
+      <p:bgPr>
+        <a:solidFill>
+          <a:srgbClr val="FFFFFF"/>
+        </a:solidFill>
+      </p:bgPr>
+    </p:bg>
+    <p:spTree>
+      <p:nvGrpSpPr>
+        <p:cNvPr id="1" name=""/>
+        <p:cNvGrpSpPr/>
+        <p:nvPr/>
+      </p:nvGrpSpPr>
+      <p:grpSpPr>
+        <a:xfrm>
+          <a:off x="0" y="0"/>
+          <a:ext cx="0" cy="0"/>
+          <a:chOff x="0" y="0"/>
+          <a:chExt cx="0" cy="0"/>
+        </a:xfrm>
+      </p:grpSpPr>
+      <p:sp>
+        <p:nvSpPr>
+          <p:cNvPr id="2" name="Text 0"/>
+          <p:cNvSpPr/>
+          <p:nvPr/>
+        </p:nvSpPr>
+        <p:spPr>
+          <a:xfrm>
+            <a:off x="0" y="0"/>
+            <a:ext cx="9144000" cy="101501"/>
+          </a:xfrm>
+          <a:prstGeom prst="rect">
+            <a:avLst/>
+          </a:prstGeom>
+          <a:solidFill>
+            <a:srgbClr val="277884"/>
+          </a:solidFill>
+          <a:ln/>
+        </p:spPr>
+        <p:txBody>
+          <a:bodyPr wrap="square" rtlCol="0" anchor="ctr"/>
+          <a:lstStyle/>
+          <a:p>
+            <a:pPr indent="0" marL="0">
+              <a:buNone/>
+            </a:pPr>
+            <a:endParaRPr lang="en-US" dirty="0"/>
+          </a:p>
+        </p:txBody>
+      </p:sp>
+      <p:sp>
+        <p:nvSpPr>
+          <p:cNvPr id="3" name="Text 1"/>
+          <p:cNvSpPr/>
+          <p:nvPr/>
+        </p:nvSpPr>
+        <p:spPr>
+          <a:xfrm>
+            <a:off x="406301" y="457051"/>
+            <a:ext cx="8498026" cy="274290"/>
+          </a:xfrm>
+          <a:prstGeom prst="rect">
+            <a:avLst/>
+          </a:prstGeom>
+          <a:noFill/>
+          <a:ln/>
+        </p:spPr>
+        <p:txBody>
+          <a:bodyPr wrap="square" lIns="0" tIns="0" rIns="0" bIns="0" rtlCol="0" anchor="t"/>
+          <a:lstStyle/>
+          <a:p>
+            <a:pPr algn="l" indent="0" marL="0">
+              <a:lnSpc>
+                <a:spcPts val="2160"/>
+              </a:lnSpc>
+              <a:spcBef>
+                <a:spcPts val="600"/>
+              </a:spcBef>
+              <a:spcAft>
+                <a:spcPts val="800"/>
+              </a:spcAft>
+              <a:buNone/>
+            </a:pPr>
+            <a:r>
+              <a:rPr lang="en-US" sz="1800" b="1" dirty="0">
+                <a:solidFill>
+                  <a:srgbClr val="FE4447"/>
+                </a:solidFill>
+                <a:latin typeface="Georgia" pitchFamily="34" charset="0"/>
+                <a:ea typeface="Georgia" pitchFamily="34" charset="-122"/>
+                <a:cs typeface="Georgia" pitchFamily="34" charset="-120"/>
+              </a:rPr>
+              <a:t>Teacher notes</a:t>
+            </a:r>
+            <a:endParaRPr lang="en-US" sz="1800" dirty="0"/>
+          </a:p>
+        </p:txBody>
+      </p:sp>
+      <p:sp>
+        <p:nvSpPr>
+          <p:cNvPr id="4" name="Text 2"/>
+          <p:cNvSpPr/>
+          <p:nvPr/>
+        </p:nvSpPr>
+        <p:spPr>
+          <a:xfrm>
+            <a:off x="634901" y="883593"/>
+            <a:ext cx="8102798" cy="731341"/>
+          </a:xfrm>
+          <a:prstGeom prst="rect">
+            <a:avLst/>
+          </a:prstGeom>
+          <a:noFill/>
+          <a:ln/>
+        </p:spPr>
+        <p:txBody>
+          <a:bodyPr wrap="square" lIns="0" tIns="0" rIns="0" bIns="0" rtlCol="0" anchor="t"/>
+          <a:lstStyle/>
+          <a:p>
+            <a:pPr algn="l" marL="342900" indent="-342900">
+              <a:lnSpc>
+                <a:spcPts val="1620"/>
+              </a:lnSpc>
+              <a:spcAft>
+                <a:spcPts val="300"/>
+              </a:spcAft>
+              <a:buSzPct val="100000"/>
+              <a:buChar char="•"/>
+            </a:pPr>
+            <a:r>
+              <a:rPr lang="en-US" sz="1200" dirty="0">
+                <a:solidFill>
+                  <a:srgbClr val="1C2833"/>
+                </a:solidFill>
+                <a:latin typeface="Arial" pitchFamily="34" charset="0"/>
+                <a:ea typeface="Arial" pitchFamily="34" charset="-122"/>
+                <a:cs typeface="Arial" pitchFamily="34" charset="-120"/>
+              </a:rPr>
+              <a:t>Some pairs will spend the entire 45 minutes colouring and lose the astronomy. Intervene at minute 20: "show me your written paragraph on axial tilt." If it doesn't exist yet, stop the colouring.</a:t>
+            </a:r>
+            <a:endParaRPr lang="en-US" sz="1200" dirty="0"/>
+          </a:p>
+          <a:p>
+            <a:pPr algn="l" marL="342900" indent="-342900">
+              <a:lnSpc>
+                <a:spcPts val="1620"/>
+              </a:lnSpc>
+              <a:spcAft>
+                <a:spcPts val="300"/>
+              </a:spcAft>
+              <a:buSzPct val="100000"/>
+              <a:buChar char="•"/>
+            </a:pPr>
+            <a:r>
+              <a:rPr lang="en-US" sz="1200" dirty="0">
+                <a:solidFill>
+                  <a:srgbClr val="1C2833"/>
+                </a:solidFill>
+                <a:latin typeface="Arial" pitchFamily="34" charset="0"/>
+                <a:ea typeface="Arial" pitchFamily="34" charset="-122"/>
+                <a:cs typeface="Arial" pitchFamily="34" charset="-120"/>
+              </a:rPr>
+              <a:t>A surprising number of pairs will get the </a:t>
+            </a:r>
+            <a:pPr algn="l" indent="0" marL="0">
+              <a:lnSpc>
+                <a:spcPts val="1620"/>
+              </a:lnSpc>
+              <a:spcAft>
+                <a:spcPts val="300"/>
+              </a:spcAft>
+              <a:buNone/>
+            </a:pPr>
+            <a:r>
+              <a:rPr lang="en-US" sz="1200" i="1" dirty="0">
+                <a:solidFill>
+                  <a:srgbClr val="1C2833"/>
+                </a:solidFill>
+                <a:latin typeface="Arial" pitchFamily="34" charset="0"/>
+                <a:ea typeface="Arial" pitchFamily="34" charset="-122"/>
+                <a:cs typeface="Arial" pitchFamily="34" charset="-120"/>
+              </a:rPr>
+              <a:t>rāśi</a:t>
+            </a:r>
+            <a:pPr algn="l" indent="0" marL="0">
+              <a:lnSpc>
+                <a:spcPts val="1620"/>
+              </a:lnSpc>
+              <a:spcAft>
+                <a:spcPts val="300"/>
+              </a:spcAft>
+              <a:buNone/>
+            </a:pPr>
+            <a:r>
+              <a:rPr lang="en-US" sz="1200" dirty="0">
+                <a:solidFill>
+                  <a:srgbClr val="1C2833"/>
+                </a:solidFill>
+                <a:latin typeface="Arial" pitchFamily="34" charset="0"/>
+                <a:ea typeface="Arial" pitchFamily="34" charset="-122"/>
+                <a:cs typeface="Arial" pitchFamily="34" charset="-120"/>
+              </a:rPr>
+              <a:t> order slightly wrong (especially </a:t>
+            </a:r>
+            <a:pPr algn="l" indent="0" marL="0">
+              <a:lnSpc>
+                <a:spcPts val="1620"/>
+              </a:lnSpc>
+              <a:spcAft>
+                <a:spcPts val="300"/>
+              </a:spcAft>
+              <a:buNone/>
+            </a:pPr>
+            <a:r>
+              <a:rPr lang="en-US" sz="1200" i="1" dirty="0">
+                <a:solidFill>
+                  <a:srgbClr val="1C2833"/>
+                </a:solidFill>
+                <a:latin typeface="Arial" pitchFamily="34" charset="0"/>
+                <a:ea typeface="Arial" pitchFamily="34" charset="-122"/>
+                <a:cs typeface="Arial" pitchFamily="34" charset="-120"/>
+              </a:rPr>
+              <a:t>Tulā ↔ Vṛścika</a:t>
+            </a:r>
+            <a:pPr algn="l" indent="0" marL="0">
+              <a:lnSpc>
+                <a:spcPts val="1620"/>
+              </a:lnSpc>
+              <a:spcAft>
+                <a:spcPts val="300"/>
+              </a:spcAft>
+              <a:buNone/>
+            </a:pPr>
+            <a:r>
+              <a:rPr lang="en-US" sz="1200" dirty="0">
+                <a:solidFill>
+                  <a:srgbClr val="1C2833"/>
+                </a:solidFill>
+                <a:latin typeface="Arial" pitchFamily="34" charset="0"/>
+                <a:ea typeface="Arial" pitchFamily="34" charset="-122"/>
+                <a:cs typeface="Arial" pitchFamily="34" charset="-120"/>
+              </a:rPr>
+              <a:t>). Catch this early.</a:t>
+            </a:r>
+            <a:endParaRPr lang="en-US" sz="1200" dirty="0"/>
+          </a:p>
+        </p:txBody>
+      </p:sp>
+      <p:sp>
+        <p:nvSpPr>
+          <p:cNvPr id="5" name="Text 3"/>
+          <p:cNvSpPr/>
+          <p:nvPr/>
+        </p:nvSpPr>
+        <p:spPr>
+          <a:xfrm>
+            <a:off x="406301" y="4434929"/>
+            <a:ext cx="8498026" cy="213271"/>
+          </a:xfrm>
+          <a:prstGeom prst="rect">
+            <a:avLst/>
+          </a:prstGeom>
+          <a:noFill/>
+          <a:ln/>
+        </p:spPr>
+        <p:txBody>
+          <a:bodyPr wrap="square" lIns="0" tIns="0" rIns="0" bIns="0" rtlCol="0" anchor="t"/>
+          <a:lstStyle/>
+          <a:p>
+            <a:pPr algn="l" indent="0" marL="0">
+              <a:lnSpc>
+                <a:spcPts val="1680"/>
+              </a:lnSpc>
+              <a:spcBef>
+                <a:spcPts val="300"/>
+              </a:spcBef>
+              <a:spcAft>
+                <a:spcPts val="300"/>
+              </a:spcAft>
+              <a:buNone/>
+            </a:pPr>
+            <a:r>
+              <a:rPr lang="en-US" sz="1200" dirty="0">
+                <a:solidFill>
+                  <a:srgbClr val="1C2833"/>
+                </a:solidFill>
+                <a:latin typeface="Arial" pitchFamily="34" charset="0"/>
+                <a:ea typeface="Arial" pitchFamily="34" charset="-122"/>
+                <a:cs typeface="Arial" pitchFamily="34" charset="-120"/>
+              </a:rPr>
+              <a:t>Middle ·  · IKS Curriculum</a:t>
+            </a:r>
+            <a:endParaRPr lang="en-US" sz="1200" dirty="0"/>
+          </a:p>
+        </p:txBody>
+      </p:sp>
+    </p:spTree>
+  </p:cSld>
+  <p:clrMapOvr>
+    <a:masterClrMapping/>
+  </p:clrMapOvr>
+</p:sld>
+</file>
+
+<file path=ppt/slides/slide16.xml><?xml version="1.0" encoding="utf-8"?>
+<p:sld xmlns:a="http://schemas.openxmlformats.org/drawingml/2006/main" xmlns:r="http://schemas.openxmlformats.org/officeDocument/2006/relationships" xmlns:p="http://schemas.openxmlformats.org/presentationml/2006/main">
+  <p:cSld name="Slide 16">
+    <p:bg>
+      <p:bgPr>
+        <a:solidFill>
+          <a:srgbClr val="FFFFFF"/>
+        </a:solidFill>
+      </p:bgPr>
+    </p:bg>
+    <p:spTree>
+      <p:nvGrpSpPr>
+        <p:cNvPr id="1" name=""/>
+        <p:cNvGrpSpPr/>
+        <p:nvPr/>
+      </p:nvGrpSpPr>
+      <p:grpSpPr>
+        <a:xfrm>
+          <a:off x="0" y="0"/>
+          <a:ext cx="0" cy="0"/>
+          <a:chOff x="0" y="0"/>
+          <a:chExt cx="0" cy="0"/>
+        </a:xfrm>
+      </p:grpSpPr>
+      <p:sp>
+        <p:nvSpPr>
+          <p:cNvPr id="2" name="Text 0"/>
+          <p:cNvSpPr/>
+          <p:nvPr/>
+        </p:nvSpPr>
+        <p:spPr>
+          <a:xfrm>
+            <a:off x="0" y="0"/>
+            <a:ext cx="9144000" cy="101501"/>
+          </a:xfrm>
+          <a:prstGeom prst="rect">
+            <a:avLst/>
+          </a:prstGeom>
+          <a:solidFill>
+            <a:srgbClr val="277884"/>
+          </a:solidFill>
+          <a:ln/>
+        </p:spPr>
+        <p:txBody>
+          <a:bodyPr wrap="square" rtlCol="0" anchor="ctr"/>
+          <a:lstStyle/>
+          <a:p>
+            <a:pPr indent="0" marL="0">
+              <a:buNone/>
+            </a:pPr>
+            <a:endParaRPr lang="en-US" dirty="0"/>
+          </a:p>
+        </p:txBody>
+      </p:sp>
+      <p:sp>
+        <p:nvSpPr>
+          <p:cNvPr id="3" name="Text 1"/>
+          <p:cNvSpPr/>
+          <p:nvPr/>
+        </p:nvSpPr>
+        <p:spPr>
+          <a:xfrm>
+            <a:off x="406301" y="457051"/>
+            <a:ext cx="8498026" cy="274290"/>
+          </a:xfrm>
+          <a:prstGeom prst="rect">
+            <a:avLst/>
+          </a:prstGeom>
+          <a:noFill/>
+          <a:ln/>
+        </p:spPr>
+        <p:txBody>
+          <a:bodyPr wrap="square" lIns="0" tIns="0" rIns="0" bIns="0" rtlCol="0" anchor="t"/>
+          <a:lstStyle/>
+          <a:p>
+            <a:pPr algn="l" indent="0" marL="0">
+              <a:lnSpc>
+                <a:spcPts val="2160"/>
+              </a:lnSpc>
+              <a:spcBef>
+                <a:spcPts val="600"/>
+              </a:spcBef>
+              <a:spcAft>
+                <a:spcPts val="800"/>
+              </a:spcAft>
+              <a:buNone/>
+            </a:pPr>
+            <a:r>
+              <a:rPr lang="en-US" sz="1800" b="1" dirty="0">
+                <a:solidFill>
+                  <a:srgbClr val="FE4447"/>
+                </a:solidFill>
+                <a:latin typeface="Georgia" pitchFamily="34" charset="0"/>
+                <a:ea typeface="Georgia" pitchFamily="34" charset="-122"/>
+                <a:cs typeface="Georgia" pitchFamily="34" charset="-120"/>
+              </a:rPr>
+              <a:t>Homework</a:t>
+            </a:r>
+            <a:endParaRPr lang="en-US" sz="1800" dirty="0"/>
+          </a:p>
+        </p:txBody>
+      </p:sp>
+      <p:sp>
+        <p:nvSpPr>
+          <p:cNvPr id="4" name="Text 2"/>
+          <p:cNvSpPr/>
+          <p:nvPr/>
+        </p:nvSpPr>
+        <p:spPr>
+          <a:xfrm>
+            <a:off x="634901" y="883593"/>
+            <a:ext cx="8102798" cy="525661"/>
+          </a:xfrm>
+          <a:prstGeom prst="rect">
+            <a:avLst/>
+          </a:prstGeom>
+          <a:noFill/>
+          <a:ln/>
+        </p:spPr>
+        <p:txBody>
+          <a:bodyPr wrap="square" lIns="0" tIns="0" rIns="0" bIns="0" rtlCol="0" anchor="t"/>
+          <a:lstStyle/>
+          <a:p>
+            <a:pPr algn="l" marL="342900" indent="-342900">
+              <a:lnSpc>
+                <a:spcPts val="1620"/>
+              </a:lnSpc>
+              <a:spcAft>
+                <a:spcPts val="300"/>
+              </a:spcAft>
+              <a:buSzPct val="100000"/>
+              <a:buChar char="•"/>
+            </a:pPr>
+            <a:r>
+              <a:rPr lang="en-US" sz="1200" dirty="0">
+                <a:solidFill>
+                  <a:srgbClr val="1C2833"/>
+                </a:solidFill>
+                <a:latin typeface="Arial" pitchFamily="34" charset="0"/>
+                <a:ea typeface="Arial" pitchFamily="34" charset="-122"/>
+                <a:cs typeface="Arial" pitchFamily="34" charset="-120"/>
+              </a:rPr>
+              <a:t>Finish at home what didn't get done in class. Bring back tomorrow ready to refine, not start.</a:t>
+            </a:r>
+            <a:endParaRPr lang="en-US" sz="1200" dirty="0"/>
+          </a:p>
+          <a:p>
+            <a:pPr algn="l" marL="342900" indent="-342900">
+              <a:lnSpc>
+                <a:spcPts val="1620"/>
+              </a:lnSpc>
+              <a:spcAft>
+                <a:spcPts val="300"/>
+              </a:spcAft>
+              <a:buSzPct val="100000"/>
+              <a:buChar char="•"/>
+            </a:pPr>
+            <a:r>
+              <a:rPr lang="en-US" sz="1200" dirty="0">
+                <a:solidFill>
+                  <a:srgbClr val="1C2833"/>
+                </a:solidFill>
+                <a:latin typeface="Arial" pitchFamily="34" charset="0"/>
+                <a:ea typeface="Arial" pitchFamily="34" charset="-122"/>
+                <a:cs typeface="Arial" pitchFamily="34" charset="-120"/>
+              </a:rPr>
+              <a:t>If the pair worked separately, agree (over WhatsApp or in person) who finishes what.</a:t>
             </a:r>
             <a:endParaRPr lang="en-US" sz="1200" dirty="0"/>
           </a:p>
@@ -2847,7 +4774,7 @@
                 <a:ea typeface="Georgia" pitchFamily="34" charset="-122"/>
                 <a:cs typeface="Georgia" pitchFamily="34" charset="-120"/>
               </a:rPr>
-              <a:t>Materials</a:t>
+              <a:t>Learning objective</a:t>
             </a:r>
             <a:endParaRPr lang="en-US" sz="1800" dirty="0"/>
           </a:p>
@@ -2862,7 +4789,7 @@
         <p:spPr>
           <a:xfrm>
             <a:off x="406301" y="870942"/>
-            <a:ext cx="8498026" cy="649337"/>
+            <a:ext cx="8498026" cy="426541"/>
           </a:xfrm>
           <a:prstGeom prst="rect">
             <a:avLst/>
@@ -2895,7 +4822,7 @@
                 <a:ea typeface="Arial" pitchFamily="34" charset="-122"/>
                 <a:cs typeface="Arial" pitchFamily="34" charset="-120"/>
               </a:rPr>
-              <a:t>– The in-progress </a:t>
+              <a:t>By the end of this session, every pair has a substantial draft of the </a:t>
             </a:r>
             <a:pPr algn="l" indent="0" marL="0">
               <a:lnSpc>
@@ -2941,7 +4868,7 @@
                 <a:ea typeface="Arial" pitchFamily="34" charset="-122"/>
                 <a:cs typeface="Arial" pitchFamily="34" charset="-120"/>
               </a:rPr>
-              <a:t>-wheel from Day 5 (one per pair) – Coloured pencils, sketch pens, markers – A4 / A3 chart paper for an optional larger wheel – Glue, scissors, ruler – The </a:t>
+              <a:t>-wheel project — labelled, coloured, with the four solstice/equinox markers and at least 6 of the 12 </a:t>
             </a:r>
             <a:pPr algn="l" indent="0" marL="0">
               <a:lnSpc>
@@ -2964,7 +4891,7 @@
                 <a:ea typeface="Arial" pitchFamily="34" charset="-122"/>
                 <a:cs typeface="Arial" pitchFamily="34" charset="-120"/>
               </a:rPr>
-              <a:t>sources.md</a:t>
+              <a:t>saṁkrānti</a:t>
             </a:r>
             <a:pPr algn="l" indent="0" marL="0">
               <a:lnSpc>
@@ -2987,53 +4914,7 @@
                 <a:ea typeface="Arial" pitchFamily="34" charset="-122"/>
                 <a:cs typeface="Arial" pitchFamily="34" charset="-120"/>
               </a:rPr>
-              <a:t> file printed for reference – Project rubric (</a:t>
-            </a:r>
-            <a:pPr algn="l" indent="0" marL="0">
-              <a:lnSpc>
-                <a:spcPts val="1680"/>
-              </a:lnSpc>
-              <a:spcBef>
-                <a:spcPts val="300"/>
-              </a:spcBef>
-              <a:spcAft>
-                <a:spcPts val="300"/>
-              </a:spcAft>
-              <a:buNone/>
-            </a:pPr>
-            <a:r>
-              <a:rPr lang="en-US" sz="1200" dirty="0">
-                <a:solidFill>
-                  <a:srgbClr val="1C2833"/>
-                </a:solidFill>
-                <a:latin typeface="Arial" pitchFamily="34" charset="0"/>
-                <a:ea typeface="Arial" pitchFamily="34" charset="-122"/>
-                <a:cs typeface="Arial" pitchFamily="34" charset="-120"/>
-              </a:rPr>
-              <a:t>assessments/rubric.md</a:t>
-            </a:r>
-            <a:pPr algn="l" indent="0" marL="0">
-              <a:lnSpc>
-                <a:spcPts val="1680"/>
-              </a:lnSpc>
-              <a:spcBef>
-                <a:spcPts val="300"/>
-              </a:spcBef>
-              <a:spcAft>
-                <a:spcPts val="300"/>
-              </a:spcAft>
-              <a:buNone/>
-            </a:pPr>
-            <a:r>
-              <a:rPr lang="en-US" sz="1200" dirty="0">
-                <a:solidFill>
-                  <a:srgbClr val="1C2833"/>
-                </a:solidFill>
-                <a:latin typeface="Arial" pitchFamily="34" charset="0"/>
-                <a:ea typeface="Arial" pitchFamily="34" charset="-122"/>
-                <a:cs typeface="Arial" pitchFamily="34" charset="-120"/>
-              </a:rPr>
-              <a:t>) — printed and visible</a:t>
+              <a:t> dates filled in.</a:t>
             </a:r>
             <a:endParaRPr lang="en-US" sz="1200" dirty="0"/>
           </a:p>
@@ -3191,7 +5072,7 @@
                 <a:ea typeface="Georgia" pitchFamily="34" charset="-122"/>
                 <a:cs typeface="Georgia" pitchFamily="34" charset="-120"/>
               </a:rPr>
-              <a:t>Lesson flow</a:t>
+              <a:t>Materials</a:t>
             </a:r>
             <a:endParaRPr lang="en-US" sz="1800" dirty="0"/>
           </a:p>
@@ -3200,6 +5081,292 @@
       <p:sp>
         <p:nvSpPr>
           <p:cNvPr id="4" name="Text 2"/>
+          <p:cNvSpPr/>
+          <p:nvPr/>
+        </p:nvSpPr>
+        <p:spPr>
+          <a:xfrm>
+            <a:off x="634901" y="883593"/>
+            <a:ext cx="8102798" cy="1519833"/>
+          </a:xfrm>
+          <a:prstGeom prst="rect">
+            <a:avLst/>
+          </a:prstGeom>
+          <a:noFill/>
+          <a:ln/>
+        </p:spPr>
+        <p:txBody>
+          <a:bodyPr wrap="square" lIns="0" tIns="0" rIns="0" bIns="0" rtlCol="0" anchor="t"/>
+          <a:lstStyle/>
+          <a:p>
+            <a:pPr algn="l" marL="342900" indent="-342900">
+              <a:lnSpc>
+                <a:spcPts val="1620"/>
+              </a:lnSpc>
+              <a:spcAft>
+                <a:spcPts val="300"/>
+              </a:spcAft>
+              <a:buSzPct val="100000"/>
+              <a:buChar char="•"/>
+            </a:pPr>
+            <a:r>
+              <a:rPr lang="en-US" sz="1200" dirty="0">
+                <a:solidFill>
+                  <a:srgbClr val="1C2833"/>
+                </a:solidFill>
+                <a:latin typeface="Arial" pitchFamily="34" charset="0"/>
+                <a:ea typeface="Arial" pitchFamily="34" charset="-122"/>
+                <a:cs typeface="Arial" pitchFamily="34" charset="-120"/>
+              </a:rPr>
+              <a:t>The in-progress </a:t>
+            </a:r>
+            <a:pPr algn="l" indent="0" marL="0">
+              <a:lnSpc>
+                <a:spcPts val="1620"/>
+              </a:lnSpc>
+              <a:spcAft>
+                <a:spcPts val="300"/>
+              </a:spcAft>
+              <a:buNone/>
+            </a:pPr>
+            <a:r>
+              <a:rPr lang="en-US" sz="1200" i="1" dirty="0">
+                <a:solidFill>
+                  <a:srgbClr val="1C2833"/>
+                </a:solidFill>
+                <a:latin typeface="Arial" pitchFamily="34" charset="0"/>
+                <a:ea typeface="Arial" pitchFamily="34" charset="-122"/>
+                <a:cs typeface="Arial" pitchFamily="34" charset="-120"/>
+              </a:rPr>
+              <a:t>rāśi</a:t>
+            </a:r>
+            <a:pPr algn="l" indent="0" marL="0">
+              <a:lnSpc>
+                <a:spcPts val="1620"/>
+              </a:lnSpc>
+              <a:spcAft>
+                <a:spcPts val="300"/>
+              </a:spcAft>
+              <a:buNone/>
+            </a:pPr>
+            <a:r>
+              <a:rPr lang="en-US" sz="1200" dirty="0">
+                <a:solidFill>
+                  <a:srgbClr val="1C2833"/>
+                </a:solidFill>
+                <a:latin typeface="Arial" pitchFamily="34" charset="0"/>
+                <a:ea typeface="Arial" pitchFamily="34" charset="-122"/>
+                <a:cs typeface="Arial" pitchFamily="34" charset="-120"/>
+              </a:rPr>
+              <a:t>-wheel from Day 5 (one per pair)</a:t>
+            </a:r>
+            <a:endParaRPr lang="en-US" sz="1200" dirty="0"/>
+          </a:p>
+          <a:p>
+            <a:pPr algn="l" marL="342900" indent="-342900">
+              <a:lnSpc>
+                <a:spcPts val="1620"/>
+              </a:lnSpc>
+              <a:spcAft>
+                <a:spcPts val="300"/>
+              </a:spcAft>
+              <a:buSzPct val="100000"/>
+              <a:buChar char="•"/>
+            </a:pPr>
+            <a:r>
+              <a:rPr lang="en-US" sz="1200" dirty="0">
+                <a:solidFill>
+                  <a:srgbClr val="1C2833"/>
+                </a:solidFill>
+                <a:latin typeface="Arial" pitchFamily="34" charset="0"/>
+                <a:ea typeface="Arial" pitchFamily="34" charset="-122"/>
+                <a:cs typeface="Arial" pitchFamily="34" charset="-120"/>
+              </a:rPr>
+              <a:t>Coloured pencils, sketch pens, markers</a:t>
+            </a:r>
+            <a:endParaRPr lang="en-US" sz="1200" dirty="0"/>
+          </a:p>
+          <a:p>
+            <a:pPr algn="l" marL="342900" indent="-342900">
+              <a:lnSpc>
+                <a:spcPts val="1620"/>
+              </a:lnSpc>
+              <a:spcAft>
+                <a:spcPts val="300"/>
+              </a:spcAft>
+              <a:buSzPct val="100000"/>
+              <a:buChar char="•"/>
+            </a:pPr>
+            <a:r>
+              <a:rPr lang="en-US" sz="1200" dirty="0">
+                <a:solidFill>
+                  <a:srgbClr val="1C2833"/>
+                </a:solidFill>
+                <a:latin typeface="Arial" pitchFamily="34" charset="0"/>
+                <a:ea typeface="Arial" pitchFamily="34" charset="-122"/>
+                <a:cs typeface="Arial" pitchFamily="34" charset="-120"/>
+              </a:rPr>
+              <a:t>A4 / A3 chart paper for an optional larger wheel</a:t>
+            </a:r>
+            <a:endParaRPr lang="en-US" sz="1200" dirty="0"/>
+          </a:p>
+          <a:p>
+            <a:pPr algn="l" marL="342900" indent="-342900">
+              <a:lnSpc>
+                <a:spcPts val="1620"/>
+              </a:lnSpc>
+              <a:spcAft>
+                <a:spcPts val="300"/>
+              </a:spcAft>
+              <a:buSzPct val="100000"/>
+              <a:buChar char="•"/>
+            </a:pPr>
+            <a:r>
+              <a:rPr lang="en-US" sz="1200" dirty="0">
+                <a:solidFill>
+                  <a:srgbClr val="1C2833"/>
+                </a:solidFill>
+                <a:latin typeface="Arial" pitchFamily="34" charset="0"/>
+                <a:ea typeface="Arial" pitchFamily="34" charset="-122"/>
+                <a:cs typeface="Arial" pitchFamily="34" charset="-120"/>
+              </a:rPr>
+              <a:t>Glue, scissors, ruler</a:t>
+            </a:r>
+            <a:endParaRPr lang="en-US" sz="1200" dirty="0"/>
+          </a:p>
+          <a:p>
+            <a:pPr algn="l" marL="342900" indent="-342900">
+              <a:lnSpc>
+                <a:spcPts val="1620"/>
+              </a:lnSpc>
+              <a:spcAft>
+                <a:spcPts val="300"/>
+              </a:spcAft>
+              <a:buSzPct val="100000"/>
+              <a:buChar char="•"/>
+            </a:pPr>
+            <a:r>
+              <a:rPr lang="en-US" sz="1200" dirty="0">
+                <a:solidFill>
+                  <a:srgbClr val="1C2833"/>
+                </a:solidFill>
+                <a:latin typeface="Arial" pitchFamily="34" charset="0"/>
+                <a:ea typeface="Arial" pitchFamily="34" charset="-122"/>
+                <a:cs typeface="Arial" pitchFamily="34" charset="-120"/>
+              </a:rPr>
+              <a:t>The </a:t>
+            </a:r>
+            <a:pPr algn="l" indent="0" marL="0">
+              <a:lnSpc>
+                <a:spcPts val="1620"/>
+              </a:lnSpc>
+              <a:spcAft>
+                <a:spcPts val="300"/>
+              </a:spcAft>
+              <a:buNone/>
+            </a:pPr>
+            <a:r>
+              <a:rPr lang="en-US" sz="1200" i="1" dirty="0">
+                <a:solidFill>
+                  <a:srgbClr val="1C2833"/>
+                </a:solidFill>
+                <a:latin typeface="Arial" pitchFamily="34" charset="0"/>
+                <a:ea typeface="Arial" pitchFamily="34" charset="-122"/>
+                <a:cs typeface="Arial" pitchFamily="34" charset="-120"/>
+              </a:rPr>
+              <a:t>sources.md</a:t>
+            </a:r>
+            <a:pPr algn="l" indent="0" marL="0">
+              <a:lnSpc>
+                <a:spcPts val="1620"/>
+              </a:lnSpc>
+              <a:spcAft>
+                <a:spcPts val="300"/>
+              </a:spcAft>
+              <a:buNone/>
+            </a:pPr>
+            <a:r>
+              <a:rPr lang="en-US" sz="1200" dirty="0">
+                <a:solidFill>
+                  <a:srgbClr val="1C2833"/>
+                </a:solidFill>
+                <a:latin typeface="Arial" pitchFamily="34" charset="0"/>
+                <a:ea typeface="Arial" pitchFamily="34" charset="-122"/>
+                <a:cs typeface="Arial" pitchFamily="34" charset="-120"/>
+              </a:rPr>
+              <a:t> file printed for reference</a:t>
+            </a:r>
+            <a:endParaRPr lang="en-US" sz="1200" dirty="0"/>
+          </a:p>
+          <a:p>
+            <a:pPr algn="l" marL="342900" indent="-342900">
+              <a:lnSpc>
+                <a:spcPts val="1620"/>
+              </a:lnSpc>
+              <a:spcAft>
+                <a:spcPts val="300"/>
+              </a:spcAft>
+              <a:buSzPct val="100000"/>
+              <a:buChar char="•"/>
+            </a:pPr>
+            <a:r>
+              <a:rPr lang="en-US" sz="1200" dirty="0">
+                <a:solidFill>
+                  <a:srgbClr val="1C2833"/>
+                </a:solidFill>
+                <a:latin typeface="Arial" pitchFamily="34" charset="0"/>
+                <a:ea typeface="Arial" pitchFamily="34" charset="-122"/>
+                <a:cs typeface="Arial" pitchFamily="34" charset="-120"/>
+              </a:rPr>
+              <a:t>Project rubric (</a:t>
+            </a:r>
+            <a:pPr algn="l" indent="0" marL="0">
+              <a:lnSpc>
+                <a:spcPts val="1620"/>
+              </a:lnSpc>
+              <a:spcAft>
+                <a:spcPts val="300"/>
+              </a:spcAft>
+              <a:buNone/>
+            </a:pPr>
+            <a:r>
+              <a:rPr lang="en-US" sz="1200" dirty="0">
+                <a:solidFill>
+                  <a:srgbClr val="1C2833"/>
+                </a:solidFill>
+                <a:latin typeface="Arial" pitchFamily="34" charset="0"/>
+                <a:ea typeface="Arial" pitchFamily="34" charset="-122"/>
+                <a:cs typeface="Arial" pitchFamily="34" charset="-120"/>
+              </a:rPr>
+              <a:t>assessments/rubric.md</a:t>
+            </a:r>
+            <a:pPr algn="l" indent="0" marL="0">
+              <a:lnSpc>
+                <a:spcPts val="1620"/>
+              </a:lnSpc>
+              <a:spcAft>
+                <a:spcPts val="300"/>
+              </a:spcAft>
+              <a:buNone/>
+            </a:pPr>
+            <a:r>
+              <a:rPr lang="en-US" sz="1200" dirty="0">
+                <a:solidFill>
+                  <a:srgbClr val="1C2833"/>
+                </a:solidFill>
+                <a:latin typeface="Arial" pitchFamily="34" charset="0"/>
+                <a:ea typeface="Arial" pitchFamily="34" charset="-122"/>
+                <a:cs typeface="Arial" pitchFamily="34" charset="-120"/>
+              </a:rPr>
+              <a:t>) — printed and visible</a:t>
+            </a:r>
+            <a:endParaRPr lang="en-US" sz="1200" dirty="0"/>
+          </a:p>
+        </p:txBody>
+      </p:sp>
+      <p:sp>
+        <p:nvSpPr>
+          <p:cNvPr id="5" name="Text 3"/>
           <p:cNvSpPr/>
           <p:nvPr/>
         </p:nvSpPr>
@@ -3349,7 +5516,7 @@
                 <a:ea typeface="Georgia" pitchFamily="34" charset="-122"/>
                 <a:cs typeface="Georgia" pitchFamily="34" charset="-120"/>
               </a:rPr>
-              <a:t>Warm-up (5 min)</a:t>
+              <a:t>Lesson flow</a:t>
             </a:r>
             <a:endParaRPr lang="en-US" sz="1800" dirty="0"/>
           </a:p>
@@ -3358,238 +5525,6 @@
       <p:sp>
         <p:nvSpPr>
           <p:cNvPr id="4" name="Text 2"/>
-          <p:cNvSpPr/>
-          <p:nvPr/>
-        </p:nvSpPr>
-        <p:spPr>
-          <a:xfrm>
-            <a:off x="406301" y="870942"/>
-            <a:ext cx="8498026" cy="639812"/>
-          </a:xfrm>
-          <a:prstGeom prst="rect">
-            <a:avLst/>
-          </a:prstGeom>
-          <a:noFill/>
-          <a:ln/>
-        </p:spPr>
-        <p:txBody>
-          <a:bodyPr wrap="square" lIns="0" tIns="0" rIns="0" bIns="0" rtlCol="0" anchor="t"/>
-          <a:lstStyle/>
-          <a:p>
-            <a:pPr algn="l" indent="0" marL="0">
-              <a:lnSpc>
-                <a:spcPts val="1680"/>
-              </a:lnSpc>
-              <a:spcBef>
-                <a:spcPts val="300"/>
-              </a:spcBef>
-              <a:spcAft>
-                <a:spcPts val="300"/>
-              </a:spcAft>
-              <a:buNone/>
-            </a:pPr>
-            <a:r>
-              <a:rPr lang="en-US" sz="1200" dirty="0">
-                <a:solidFill>
-                  <a:srgbClr val="1C2833"/>
-                </a:solidFill>
-                <a:latin typeface="Arial" pitchFamily="34" charset="0"/>
-                <a:ea typeface="Arial" pitchFamily="34" charset="-122"/>
-                <a:cs typeface="Arial" pitchFamily="34" charset="-120"/>
-              </a:rPr>
-              <a:t>– Recap the project brief (5 sentences): each pair builds a </a:t>
-            </a:r>
-            <a:pPr algn="l" indent="0" marL="0">
-              <a:lnSpc>
-                <a:spcPts val="1680"/>
-              </a:lnSpc>
-              <a:spcBef>
-                <a:spcPts val="300"/>
-              </a:spcBef>
-              <a:spcAft>
-                <a:spcPts val="300"/>
-              </a:spcAft>
-              <a:buNone/>
-            </a:pPr>
-            <a:r>
-              <a:rPr lang="en-US" sz="1200" i="1" dirty="0">
-                <a:solidFill>
-                  <a:srgbClr val="1C2833"/>
-                </a:solidFill>
-                <a:latin typeface="Arial" pitchFamily="34" charset="0"/>
-                <a:ea typeface="Arial" pitchFamily="34" charset="-122"/>
-                <a:cs typeface="Arial" pitchFamily="34" charset="-120"/>
-              </a:rPr>
-              <a:t>rāśi</a:t>
-            </a:r>
-            <a:pPr algn="l" indent="0" marL="0">
-              <a:lnSpc>
-                <a:spcPts val="1680"/>
-              </a:lnSpc>
-              <a:spcBef>
-                <a:spcPts val="300"/>
-              </a:spcBef>
-              <a:spcAft>
-                <a:spcPts val="300"/>
-              </a:spcAft>
-              <a:buNone/>
-            </a:pPr>
-            <a:r>
-              <a:rPr lang="en-US" sz="1200" dirty="0">
-                <a:solidFill>
-                  <a:srgbClr val="1C2833"/>
-                </a:solidFill>
-                <a:latin typeface="Arial" pitchFamily="34" charset="0"/>
-                <a:ea typeface="Arial" pitchFamily="34" charset="-122"/>
-                <a:cs typeface="Arial" pitchFamily="34" charset="-120"/>
-              </a:rPr>
-              <a:t>-wheel that shows BOTH the </a:t>
-            </a:r>
-            <a:pPr algn="l" indent="0" marL="0">
-              <a:lnSpc>
-                <a:spcPts val="1680"/>
-              </a:lnSpc>
-              <a:spcBef>
-                <a:spcPts val="300"/>
-              </a:spcBef>
-              <a:spcAft>
-                <a:spcPts val="300"/>
-              </a:spcAft>
-              <a:buNone/>
-            </a:pPr>
-            <a:r>
-              <a:rPr lang="en-US" sz="1200" i="1" dirty="0">
-                <a:solidFill>
-                  <a:srgbClr val="1C2833"/>
-                </a:solidFill>
-                <a:latin typeface="Arial" pitchFamily="34" charset="0"/>
-                <a:ea typeface="Arial" pitchFamily="34" charset="-122"/>
-                <a:cs typeface="Arial" pitchFamily="34" charset="-120"/>
-              </a:rPr>
-              <a:t>sāyana</a:t>
-            </a:r>
-            <a:pPr algn="l" indent="0" marL="0">
-              <a:lnSpc>
-                <a:spcPts val="1680"/>
-              </a:lnSpc>
-              <a:spcBef>
-                <a:spcPts val="300"/>
-              </a:spcBef>
-              <a:spcAft>
-                <a:spcPts val="300"/>
-              </a:spcAft>
-              <a:buNone/>
-            </a:pPr>
-            <a:r>
-              <a:rPr lang="en-US" sz="1200" dirty="0">
-                <a:solidFill>
-                  <a:srgbClr val="1C2833"/>
-                </a:solidFill>
-                <a:latin typeface="Arial" pitchFamily="34" charset="0"/>
-                <a:ea typeface="Arial" pitchFamily="34" charset="-122"/>
-                <a:cs typeface="Arial" pitchFamily="34" charset="-120"/>
-              </a:rPr>
-              <a:t> and </a:t>
-            </a:r>
-            <a:pPr algn="l" indent="0" marL="0">
-              <a:lnSpc>
-                <a:spcPts val="1680"/>
-              </a:lnSpc>
-              <a:spcBef>
-                <a:spcPts val="300"/>
-              </a:spcBef>
-              <a:spcAft>
-                <a:spcPts val="300"/>
-              </a:spcAft>
-              <a:buNone/>
-            </a:pPr>
-            <a:r>
-              <a:rPr lang="en-US" sz="1200" i="1" dirty="0">
-                <a:solidFill>
-                  <a:srgbClr val="1C2833"/>
-                </a:solidFill>
-                <a:latin typeface="Arial" pitchFamily="34" charset="0"/>
-                <a:ea typeface="Arial" pitchFamily="34" charset="-122"/>
-                <a:cs typeface="Arial" pitchFamily="34" charset="-120"/>
-              </a:rPr>
-              <a:t>nirayana</a:t>
-            </a:r>
-            <a:pPr algn="l" indent="0" marL="0">
-              <a:lnSpc>
-                <a:spcPts val="1680"/>
-              </a:lnSpc>
-              <a:spcBef>
-                <a:spcPts val="300"/>
-              </a:spcBef>
-              <a:spcAft>
-                <a:spcPts val="300"/>
-              </a:spcAft>
-              <a:buNone/>
-            </a:pPr>
-            <a:r>
-              <a:rPr lang="en-US" sz="1200" dirty="0">
-                <a:solidFill>
-                  <a:srgbClr val="1C2833"/>
-                </a:solidFill>
-                <a:latin typeface="Arial" pitchFamily="34" charset="0"/>
-                <a:ea typeface="Arial" pitchFamily="34" charset="-122"/>
-                <a:cs typeface="Arial" pitchFamily="34" charset="-120"/>
-              </a:rPr>
-              <a:t> dates for the four turning-points, the 12 </a:t>
-            </a:r>
-            <a:pPr algn="l" indent="0" marL="0">
-              <a:lnSpc>
-                <a:spcPts val="1680"/>
-              </a:lnSpc>
-              <a:spcBef>
-                <a:spcPts val="300"/>
-              </a:spcBef>
-              <a:spcAft>
-                <a:spcPts val="300"/>
-              </a:spcAft>
-              <a:buNone/>
-            </a:pPr>
-            <a:r>
-              <a:rPr lang="en-US" sz="1200" i="1" dirty="0">
-                <a:solidFill>
-                  <a:srgbClr val="1C2833"/>
-                </a:solidFill>
-                <a:latin typeface="Arial" pitchFamily="34" charset="0"/>
-                <a:ea typeface="Arial" pitchFamily="34" charset="-122"/>
-                <a:cs typeface="Arial" pitchFamily="34" charset="-120"/>
-              </a:rPr>
-              <a:t>rāśi</a:t>
-            </a:r>
-            <a:pPr algn="l" indent="0" marL="0">
-              <a:lnSpc>
-                <a:spcPts val="1680"/>
-              </a:lnSpc>
-              <a:spcBef>
-                <a:spcPts val="300"/>
-              </a:spcBef>
-              <a:spcAft>
-                <a:spcPts val="300"/>
-              </a:spcAft>
-              <a:buNone/>
-            </a:pPr>
-            <a:r>
-              <a:rPr lang="en-US" sz="1200" dirty="0">
-                <a:solidFill>
-                  <a:srgbClr val="1C2833"/>
-                </a:solidFill>
-                <a:latin typeface="Arial" pitchFamily="34" charset="0"/>
-                <a:ea typeface="Arial" pitchFamily="34" charset="-122"/>
-                <a:cs typeface="Arial" pitchFamily="34" charset="-120"/>
-              </a:rPr>
-              <a:t> names with English/Greek equivalents, and at least one paragraph linking it to axial tilt and seasons. – Show the rubric (it should already be on the board). Quick Q&amp;A: 2 minutes for any rubric clarifications.</a:t>
-            </a:r>
-            <a:endParaRPr lang="en-US" sz="1200" dirty="0"/>
-          </a:p>
-        </p:txBody>
-      </p:sp>
-      <p:sp>
-        <p:nvSpPr>
-          <p:cNvPr id="5" name="Text 3"/>
           <p:cNvSpPr/>
           <p:nvPr/>
         </p:nvSpPr>
@@ -3739,7 +5674,7 @@
                 <a:ea typeface="Georgia" pitchFamily="34" charset="-122"/>
                 <a:cs typeface="Georgia" pitchFamily="34" charset="-120"/>
               </a:rPr>
-              <a:t>Core (5 min)</a:t>
+              <a:t>Warm-up (5 min)</a:t>
             </a:r>
             <a:endParaRPr lang="en-US" sz="1800" dirty="0"/>
           </a:p>
@@ -3753,8 +5688,8 @@
         </p:nvSpPr>
         <p:spPr>
           <a:xfrm>
-            <a:off x="406301" y="870942"/>
-            <a:ext cx="8498026" cy="213271"/>
+            <a:off x="634901" y="883593"/>
+            <a:ext cx="8102798" cy="937022"/>
           </a:xfrm>
           <a:prstGeom prst="rect">
             <a:avLst/>
@@ -3766,454 +5701,218 @@
           <a:bodyPr wrap="square" lIns="0" tIns="0" rIns="0" bIns="0" rtlCol="0" anchor="t"/>
           <a:lstStyle/>
           <a:p>
-            <a:pPr algn="l" indent="0" marL="0">
-              <a:lnSpc>
-                <a:spcPts val="1680"/>
-              </a:lnSpc>
-              <a:spcBef>
-                <a:spcPts val="300"/>
-              </a:spcBef>
-              <a:spcAft>
-                <a:spcPts val="300"/>
-              </a:spcAft>
-              <a:buNone/>
-            </a:pPr>
-            <a:r>
-              <a:rPr lang="en-US" sz="1200" dirty="0">
-                <a:solidFill>
-                  <a:srgbClr val="1C2833"/>
-                </a:solidFill>
-                <a:latin typeface="Arial" pitchFamily="34" charset="0"/>
-                <a:ea typeface="Arial" pitchFamily="34" charset="-122"/>
-                <a:cs typeface="Arial" pitchFamily="34" charset="-120"/>
-              </a:rPr>
-              <a:t>The teacher explicitly walks through the "Meets" target for the project:</a:t>
+            <a:pPr algn="l" marL="342900" indent="-342900">
+              <a:lnSpc>
+                <a:spcPts val="1620"/>
+              </a:lnSpc>
+              <a:spcAft>
+                <a:spcPts val="300"/>
+              </a:spcAft>
+              <a:buSzPct val="100000"/>
+              <a:buChar char="•"/>
+            </a:pPr>
+            <a:r>
+              <a:rPr lang="en-US" sz="1200" dirty="0">
+                <a:solidFill>
+                  <a:srgbClr val="1C2833"/>
+                </a:solidFill>
+                <a:latin typeface="Arial" pitchFamily="34" charset="0"/>
+                <a:ea typeface="Arial" pitchFamily="34" charset="-122"/>
+                <a:cs typeface="Arial" pitchFamily="34" charset="-120"/>
+              </a:rPr>
+              <a:t>Recap the project brief (5 sentences): each pair builds a </a:t>
+            </a:r>
+            <a:pPr algn="l" indent="0" marL="0">
+              <a:lnSpc>
+                <a:spcPts val="1620"/>
+              </a:lnSpc>
+              <a:spcAft>
+                <a:spcPts val="300"/>
+              </a:spcAft>
+              <a:buNone/>
+            </a:pPr>
+            <a:r>
+              <a:rPr lang="en-US" sz="1200" i="1" dirty="0">
+                <a:solidFill>
+                  <a:srgbClr val="1C2833"/>
+                </a:solidFill>
+                <a:latin typeface="Arial" pitchFamily="34" charset="0"/>
+                <a:ea typeface="Arial" pitchFamily="34" charset="-122"/>
+                <a:cs typeface="Arial" pitchFamily="34" charset="-120"/>
+              </a:rPr>
+              <a:t>rāśi</a:t>
+            </a:r>
+            <a:pPr algn="l" indent="0" marL="0">
+              <a:lnSpc>
+                <a:spcPts val="1620"/>
+              </a:lnSpc>
+              <a:spcAft>
+                <a:spcPts val="300"/>
+              </a:spcAft>
+              <a:buNone/>
+            </a:pPr>
+            <a:r>
+              <a:rPr lang="en-US" sz="1200" dirty="0">
+                <a:solidFill>
+                  <a:srgbClr val="1C2833"/>
+                </a:solidFill>
+                <a:latin typeface="Arial" pitchFamily="34" charset="0"/>
+                <a:ea typeface="Arial" pitchFamily="34" charset="-122"/>
+                <a:cs typeface="Arial" pitchFamily="34" charset="-120"/>
+              </a:rPr>
+              <a:t>-wheel that shows BOTH the </a:t>
+            </a:r>
+            <a:pPr algn="l" indent="0" marL="0">
+              <a:lnSpc>
+                <a:spcPts val="1620"/>
+              </a:lnSpc>
+              <a:spcAft>
+                <a:spcPts val="300"/>
+              </a:spcAft>
+              <a:buNone/>
+            </a:pPr>
+            <a:r>
+              <a:rPr lang="en-US" sz="1200" i="1" dirty="0">
+                <a:solidFill>
+                  <a:srgbClr val="1C2833"/>
+                </a:solidFill>
+                <a:latin typeface="Arial" pitchFamily="34" charset="0"/>
+                <a:ea typeface="Arial" pitchFamily="34" charset="-122"/>
+                <a:cs typeface="Arial" pitchFamily="34" charset="-120"/>
+              </a:rPr>
+              <a:t>sāyana</a:t>
+            </a:r>
+            <a:pPr algn="l" indent="0" marL="0">
+              <a:lnSpc>
+                <a:spcPts val="1620"/>
+              </a:lnSpc>
+              <a:spcAft>
+                <a:spcPts val="300"/>
+              </a:spcAft>
+              <a:buNone/>
+            </a:pPr>
+            <a:r>
+              <a:rPr lang="en-US" sz="1200" dirty="0">
+                <a:solidFill>
+                  <a:srgbClr val="1C2833"/>
+                </a:solidFill>
+                <a:latin typeface="Arial" pitchFamily="34" charset="0"/>
+                <a:ea typeface="Arial" pitchFamily="34" charset="-122"/>
+                <a:cs typeface="Arial" pitchFamily="34" charset="-120"/>
+              </a:rPr>
+              <a:t> and </a:t>
+            </a:r>
+            <a:pPr algn="l" indent="0" marL="0">
+              <a:lnSpc>
+                <a:spcPts val="1620"/>
+              </a:lnSpc>
+              <a:spcAft>
+                <a:spcPts val="300"/>
+              </a:spcAft>
+              <a:buNone/>
+            </a:pPr>
+            <a:r>
+              <a:rPr lang="en-US" sz="1200" i="1" dirty="0">
+                <a:solidFill>
+                  <a:srgbClr val="1C2833"/>
+                </a:solidFill>
+                <a:latin typeface="Arial" pitchFamily="34" charset="0"/>
+                <a:ea typeface="Arial" pitchFamily="34" charset="-122"/>
+                <a:cs typeface="Arial" pitchFamily="34" charset="-120"/>
+              </a:rPr>
+              <a:t>nirayana</a:t>
+            </a:r>
+            <a:pPr algn="l" indent="0" marL="0">
+              <a:lnSpc>
+                <a:spcPts val="1620"/>
+              </a:lnSpc>
+              <a:spcAft>
+                <a:spcPts val="300"/>
+              </a:spcAft>
+              <a:buNone/>
+            </a:pPr>
+            <a:r>
+              <a:rPr lang="en-US" sz="1200" dirty="0">
+                <a:solidFill>
+                  <a:srgbClr val="1C2833"/>
+                </a:solidFill>
+                <a:latin typeface="Arial" pitchFamily="34" charset="0"/>
+                <a:ea typeface="Arial" pitchFamily="34" charset="-122"/>
+                <a:cs typeface="Arial" pitchFamily="34" charset="-120"/>
+              </a:rPr>
+              <a:t> dates for the four turning-points, the 12 </a:t>
+            </a:r>
+            <a:pPr algn="l" indent="0" marL="0">
+              <a:lnSpc>
+                <a:spcPts val="1620"/>
+              </a:lnSpc>
+              <a:spcAft>
+                <a:spcPts val="300"/>
+              </a:spcAft>
+              <a:buNone/>
+            </a:pPr>
+            <a:r>
+              <a:rPr lang="en-US" sz="1200" i="1" dirty="0">
+                <a:solidFill>
+                  <a:srgbClr val="1C2833"/>
+                </a:solidFill>
+                <a:latin typeface="Arial" pitchFamily="34" charset="0"/>
+                <a:ea typeface="Arial" pitchFamily="34" charset="-122"/>
+                <a:cs typeface="Arial" pitchFamily="34" charset="-120"/>
+              </a:rPr>
+              <a:t>rāśi</a:t>
+            </a:r>
+            <a:pPr algn="l" indent="0" marL="0">
+              <a:lnSpc>
+                <a:spcPts val="1620"/>
+              </a:lnSpc>
+              <a:spcAft>
+                <a:spcPts val="300"/>
+              </a:spcAft>
+              <a:buNone/>
+            </a:pPr>
+            <a:r>
+              <a:rPr lang="en-US" sz="1200" dirty="0">
+                <a:solidFill>
+                  <a:srgbClr val="1C2833"/>
+                </a:solidFill>
+                <a:latin typeface="Arial" pitchFamily="34" charset="0"/>
+                <a:ea typeface="Arial" pitchFamily="34" charset="-122"/>
+                <a:cs typeface="Arial" pitchFamily="34" charset="-120"/>
+              </a:rPr>
+              <a:t> names with English/Greek equivalents, and at least one paragraph linking it to axial tilt and seasons.</a:t>
             </a:r>
             <a:endParaRPr lang="en-US" sz="1200" dirty="0"/>
           </a:p>
+          <a:p>
+            <a:pPr algn="l" marL="342900" indent="-342900">
+              <a:lnSpc>
+                <a:spcPts val="1620"/>
+              </a:lnSpc>
+              <a:spcAft>
+                <a:spcPts val="300"/>
+              </a:spcAft>
+              <a:buSzPct val="100000"/>
+              <a:buChar char="•"/>
+            </a:pPr>
+            <a:r>
+              <a:rPr lang="en-US" sz="1200" dirty="0">
+                <a:solidFill>
+                  <a:srgbClr val="1C2833"/>
+                </a:solidFill>
+                <a:latin typeface="Arial" pitchFamily="34" charset="0"/>
+                <a:ea typeface="Arial" pitchFamily="34" charset="-122"/>
+                <a:cs typeface="Arial" pitchFamily="34" charset="-120"/>
+              </a:rPr>
+              <a:t>Show the rubric (it should already be on the board). Quick Q&amp;A: 2 minutes for any rubric clarifications.</a:t>
+            </a:r>
+            <a:endParaRPr lang="en-US" sz="1200" dirty="0"/>
+          </a:p>
         </p:txBody>
       </p:sp>
       <p:sp>
         <p:nvSpPr>
           <p:cNvPr id="5" name="Text 3"/>
-          <p:cNvSpPr/>
-          <p:nvPr/>
-        </p:nvSpPr>
-        <p:spPr>
-          <a:xfrm>
-            <a:off x="406301" y="1160413"/>
-            <a:ext cx="8498026" cy="853083"/>
-          </a:xfrm>
-          <a:prstGeom prst="rect">
-            <a:avLst/>
-          </a:prstGeom>
-          <a:noFill/>
-          <a:ln/>
-        </p:spPr>
-        <p:txBody>
-          <a:bodyPr wrap="square" lIns="0" tIns="0" rIns="0" bIns="0" rtlCol="0" anchor="t"/>
-          <a:lstStyle/>
-          <a:p>
-            <a:pPr algn="l" indent="0" marL="0">
-              <a:lnSpc>
-                <a:spcPts val="1680"/>
-              </a:lnSpc>
-              <a:spcBef>
-                <a:spcPts val="300"/>
-              </a:spcBef>
-              <a:spcAft>
-                <a:spcPts val="300"/>
-              </a:spcAft>
-              <a:buNone/>
-            </a:pPr>
-            <a:r>
-              <a:rPr lang="en-US" sz="1200" dirty="0">
-                <a:solidFill>
-                  <a:srgbClr val="1C2833"/>
-                </a:solidFill>
-                <a:latin typeface="Arial" pitchFamily="34" charset="0"/>
-                <a:ea typeface="Arial" pitchFamily="34" charset="-122"/>
-                <a:cs typeface="Arial" pitchFamily="34" charset="-120"/>
-              </a:rPr>
-              <a:t>– 12 </a:t>
-            </a:r>
-            <a:pPr algn="l" indent="0" marL="0">
-              <a:lnSpc>
-                <a:spcPts val="1680"/>
-              </a:lnSpc>
-              <a:spcBef>
-                <a:spcPts val="300"/>
-              </a:spcBef>
-              <a:spcAft>
-                <a:spcPts val="300"/>
-              </a:spcAft>
-              <a:buNone/>
-            </a:pPr>
-            <a:r>
-              <a:rPr lang="en-US" sz="1200" i="1" dirty="0">
-                <a:solidFill>
-                  <a:srgbClr val="1C2833"/>
-                </a:solidFill>
-                <a:latin typeface="Arial" pitchFamily="34" charset="0"/>
-                <a:ea typeface="Arial" pitchFamily="34" charset="-122"/>
-                <a:cs typeface="Arial" pitchFamily="34" charset="-120"/>
-              </a:rPr>
-              <a:t>rāśi</a:t>
-            </a:r>
-            <a:pPr algn="l" indent="0" marL="0">
-              <a:lnSpc>
-                <a:spcPts val="1680"/>
-              </a:lnSpc>
-              <a:spcBef>
-                <a:spcPts val="300"/>
-              </a:spcBef>
-              <a:spcAft>
-                <a:spcPts val="300"/>
-              </a:spcAft>
-              <a:buNone/>
-            </a:pPr>
-            <a:r>
-              <a:rPr lang="en-US" sz="1200" dirty="0">
-                <a:solidFill>
-                  <a:srgbClr val="1C2833"/>
-                </a:solidFill>
-                <a:latin typeface="Arial" pitchFamily="34" charset="0"/>
-                <a:ea typeface="Arial" pitchFamily="34" charset="-122"/>
-                <a:cs typeface="Arial" pitchFamily="34" charset="-120"/>
-              </a:rPr>
-              <a:t> names in correct order ✓ – English / Greek equivalents matching ✓ – Approximate </a:t>
-            </a:r>
-            <a:pPr algn="l" indent="0" marL="0">
-              <a:lnSpc>
-                <a:spcPts val="1680"/>
-              </a:lnSpc>
-              <a:spcBef>
-                <a:spcPts val="300"/>
-              </a:spcBef>
-              <a:spcAft>
-                <a:spcPts val="300"/>
-              </a:spcAft>
-              <a:buNone/>
-            </a:pPr>
-            <a:r>
-              <a:rPr lang="en-US" sz="1200" i="1" dirty="0">
-                <a:solidFill>
-                  <a:srgbClr val="1C2833"/>
-                </a:solidFill>
-                <a:latin typeface="Arial" pitchFamily="34" charset="0"/>
-                <a:ea typeface="Arial" pitchFamily="34" charset="-122"/>
-                <a:cs typeface="Arial" pitchFamily="34" charset="-120"/>
-              </a:rPr>
-              <a:t>nirayana</a:t>
-            </a:r>
-            <a:pPr algn="l" indent="0" marL="0">
-              <a:lnSpc>
-                <a:spcPts val="1680"/>
-              </a:lnSpc>
-              <a:spcBef>
-                <a:spcPts val="300"/>
-              </a:spcBef>
-              <a:spcAft>
-                <a:spcPts val="300"/>
-              </a:spcAft>
-              <a:buNone/>
-            </a:pPr>
-            <a:r>
-              <a:rPr lang="en-US" sz="1200" dirty="0">
-                <a:solidFill>
-                  <a:srgbClr val="1C2833"/>
-                </a:solidFill>
-                <a:latin typeface="Arial" pitchFamily="34" charset="0"/>
-                <a:ea typeface="Arial" pitchFamily="34" charset="-122"/>
-                <a:cs typeface="Arial" pitchFamily="34" charset="-120"/>
-              </a:rPr>
-              <a:t> date ranges (e.g. Meṣa = 14 Apr – 14 May) ✓ – All four solstice / equinox markers labelled with both </a:t>
-            </a:r>
-            <a:pPr algn="l" indent="0" marL="0">
-              <a:lnSpc>
-                <a:spcPts val="1680"/>
-              </a:lnSpc>
-              <a:spcBef>
-                <a:spcPts val="300"/>
-              </a:spcBef>
-              <a:spcAft>
-                <a:spcPts val="300"/>
-              </a:spcAft>
-              <a:buNone/>
-            </a:pPr>
-            <a:r>
-              <a:rPr lang="en-US" sz="1200" i="1" dirty="0">
-                <a:solidFill>
-                  <a:srgbClr val="1C2833"/>
-                </a:solidFill>
-                <a:latin typeface="Arial" pitchFamily="34" charset="0"/>
-                <a:ea typeface="Arial" pitchFamily="34" charset="-122"/>
-                <a:cs typeface="Arial" pitchFamily="34" charset="-120"/>
-              </a:rPr>
-              <a:t>sāyana</a:t>
-            </a:r>
-            <a:pPr algn="l" indent="0" marL="0">
-              <a:lnSpc>
-                <a:spcPts val="1680"/>
-              </a:lnSpc>
-              <a:spcBef>
-                <a:spcPts val="300"/>
-              </a:spcBef>
-              <a:spcAft>
-                <a:spcPts val="300"/>
-              </a:spcAft>
-              <a:buNone/>
-            </a:pPr>
-            <a:r>
-              <a:rPr lang="en-US" sz="1200" dirty="0">
-                <a:solidFill>
-                  <a:srgbClr val="1C2833"/>
-                </a:solidFill>
-                <a:latin typeface="Arial" pitchFamily="34" charset="0"/>
-                <a:ea typeface="Arial" pitchFamily="34" charset="-122"/>
-                <a:cs typeface="Arial" pitchFamily="34" charset="-120"/>
-              </a:rPr>
-              <a:t> and </a:t>
-            </a:r>
-            <a:pPr algn="l" indent="0" marL="0">
-              <a:lnSpc>
-                <a:spcPts val="1680"/>
-              </a:lnSpc>
-              <a:spcBef>
-                <a:spcPts val="300"/>
-              </a:spcBef>
-              <a:spcAft>
-                <a:spcPts val="300"/>
-              </a:spcAft>
-              <a:buNone/>
-            </a:pPr>
-            <a:r>
-              <a:rPr lang="en-US" sz="1200" i="1" dirty="0">
-                <a:solidFill>
-                  <a:srgbClr val="1C2833"/>
-                </a:solidFill>
-                <a:latin typeface="Arial" pitchFamily="34" charset="0"/>
-                <a:ea typeface="Arial" pitchFamily="34" charset="-122"/>
-                <a:cs typeface="Arial" pitchFamily="34" charset="-120"/>
-              </a:rPr>
-              <a:t>nirayana</a:t>
-            </a:r>
-            <a:pPr algn="l" indent="0" marL="0">
-              <a:lnSpc>
-                <a:spcPts val="1680"/>
-              </a:lnSpc>
-              <a:spcBef>
-                <a:spcPts val="300"/>
-              </a:spcBef>
-              <a:spcAft>
-                <a:spcPts val="300"/>
-              </a:spcAft>
-              <a:buNone/>
-            </a:pPr>
-            <a:r>
-              <a:rPr lang="en-US" sz="1200" dirty="0">
-                <a:solidFill>
-                  <a:srgbClr val="1C2833"/>
-                </a:solidFill>
-                <a:latin typeface="Arial" pitchFamily="34" charset="0"/>
-                <a:ea typeface="Arial" pitchFamily="34" charset="-122"/>
-                <a:cs typeface="Arial" pitchFamily="34" charset="-120"/>
-              </a:rPr>
-              <a:t> dates ✓ – A 4-sentence written explanation of why we have seasons (axial tilt) ✓ – Citation to </a:t>
-            </a:r>
-            <a:pPr algn="l" indent="0" marL="0">
-              <a:lnSpc>
-                <a:spcPts val="1680"/>
-              </a:lnSpc>
-              <a:spcBef>
-                <a:spcPts val="300"/>
-              </a:spcBef>
-              <a:spcAft>
-                <a:spcPts val="300"/>
-              </a:spcAft>
-              <a:buNone/>
-            </a:pPr>
-            <a:r>
-              <a:rPr lang="en-US" sz="1200" i="1" dirty="0">
-                <a:solidFill>
-                  <a:srgbClr val="1C2833"/>
-                </a:solidFill>
-                <a:latin typeface="Arial" pitchFamily="34" charset="0"/>
-                <a:ea typeface="Arial" pitchFamily="34" charset="-122"/>
-                <a:cs typeface="Arial" pitchFamily="34" charset="-120"/>
-              </a:rPr>
-              <a:t>Sūrya-siddhānta</a:t>
-            </a:r>
-            <a:pPr algn="l" indent="0" marL="0">
-              <a:lnSpc>
-                <a:spcPts val="1680"/>
-              </a:lnSpc>
-              <a:spcBef>
-                <a:spcPts val="300"/>
-              </a:spcBef>
-              <a:spcAft>
-                <a:spcPts val="300"/>
-              </a:spcAft>
-              <a:buNone/>
-            </a:pPr>
-            <a:r>
-              <a:rPr lang="en-US" sz="1200" dirty="0">
-                <a:solidFill>
-                  <a:srgbClr val="1C2833"/>
-                </a:solidFill>
-                <a:latin typeface="Arial" pitchFamily="34" charset="0"/>
-                <a:ea typeface="Arial" pitchFamily="34" charset="-122"/>
-                <a:cs typeface="Arial" pitchFamily="34" charset="-120"/>
-              </a:rPr>
-              <a:t> OR </a:t>
-            </a:r>
-            <a:pPr algn="l" indent="0" marL="0">
-              <a:lnSpc>
-                <a:spcPts val="1680"/>
-              </a:lnSpc>
-              <a:spcBef>
-                <a:spcPts val="300"/>
-              </a:spcBef>
-              <a:spcAft>
-                <a:spcPts val="300"/>
-              </a:spcAft>
-              <a:buNone/>
-            </a:pPr>
-            <a:r>
-              <a:rPr lang="en-US" sz="1200" i="1" dirty="0">
-                <a:solidFill>
-                  <a:srgbClr val="1C2833"/>
-                </a:solidFill>
-                <a:latin typeface="Arial" pitchFamily="34" charset="0"/>
-                <a:ea typeface="Arial" pitchFamily="34" charset="-122"/>
-                <a:cs typeface="Arial" pitchFamily="34" charset="-120"/>
-              </a:rPr>
-              <a:t>Bṛhat Saṁhitā</a:t>
-            </a:r>
-            <a:pPr algn="l" indent="0" marL="0">
-              <a:lnSpc>
-                <a:spcPts val="1680"/>
-              </a:lnSpc>
-              <a:spcBef>
-                <a:spcPts val="300"/>
-              </a:spcBef>
-              <a:spcAft>
-                <a:spcPts val="300"/>
-              </a:spcAft>
-              <a:buNone/>
-            </a:pPr>
-            <a:r>
-              <a:rPr lang="en-US" sz="1200" dirty="0">
-                <a:solidFill>
-                  <a:srgbClr val="1C2833"/>
-                </a:solidFill>
-                <a:latin typeface="Arial" pitchFamily="34" charset="0"/>
-                <a:ea typeface="Arial" pitchFamily="34" charset="-122"/>
-                <a:cs typeface="Arial" pitchFamily="34" charset="-120"/>
-              </a:rPr>
-              <a:t> OR an NCERT chapter ✓</a:t>
-            </a:r>
-            <a:endParaRPr lang="en-US" sz="1200" dirty="0"/>
-          </a:p>
-        </p:txBody>
-      </p:sp>
-      <p:sp>
-        <p:nvSpPr>
-          <p:cNvPr id="6" name="Text 4"/>
-          <p:cNvSpPr/>
-          <p:nvPr/>
-        </p:nvSpPr>
-        <p:spPr>
-          <a:xfrm>
-            <a:off x="406301" y="2089696"/>
-            <a:ext cx="8498026" cy="426541"/>
-          </a:xfrm>
-          <a:prstGeom prst="rect">
-            <a:avLst/>
-          </a:prstGeom>
-          <a:noFill/>
-          <a:ln/>
-        </p:spPr>
-        <p:txBody>
-          <a:bodyPr wrap="square" lIns="0" tIns="0" rIns="0" bIns="0" rtlCol="0" anchor="t"/>
-          <a:lstStyle/>
-          <a:p>
-            <a:pPr algn="l" indent="0" marL="0">
-              <a:lnSpc>
-                <a:spcPts val="1680"/>
-              </a:lnSpc>
-              <a:spcBef>
-                <a:spcPts val="300"/>
-              </a:spcBef>
-              <a:spcAft>
-                <a:spcPts val="300"/>
-              </a:spcAft>
-              <a:buNone/>
-            </a:pPr>
-            <a:r>
-              <a:rPr lang="en-US" sz="1200" dirty="0">
-                <a:solidFill>
-                  <a:srgbClr val="1C2833"/>
-                </a:solidFill>
-                <a:latin typeface="Arial" pitchFamily="34" charset="0"/>
-                <a:ea typeface="Arial" pitchFamily="34" charset="-122"/>
-                <a:cs typeface="Arial" pitchFamily="34" charset="-120"/>
-              </a:rPr>
-              <a:t>To </a:t>
-            </a:r>
-            <a:pPr algn="l" indent="0" marL="0">
-              <a:lnSpc>
-                <a:spcPts val="1680"/>
-              </a:lnSpc>
-              <a:spcBef>
-                <a:spcPts val="300"/>
-              </a:spcBef>
-              <a:spcAft>
-                <a:spcPts val="300"/>
-              </a:spcAft>
-              <a:buNone/>
-            </a:pPr>
-            <a:r>
-              <a:rPr lang="en-US" sz="1200" b="1" dirty="0">
-                <a:solidFill>
-                  <a:srgbClr val="1C2833"/>
-                </a:solidFill>
-                <a:latin typeface="Arial" pitchFamily="34" charset="0"/>
-                <a:ea typeface="Arial" pitchFamily="34" charset="-122"/>
-                <a:cs typeface="Arial" pitchFamily="34" charset="-120"/>
-              </a:rPr>
-              <a:t>Exceed</a:t>
-            </a:r>
-            <a:pPr algn="l" indent="0" marL="0">
-              <a:lnSpc>
-                <a:spcPts val="1680"/>
-              </a:lnSpc>
-              <a:spcBef>
-                <a:spcPts val="300"/>
-              </a:spcBef>
-              <a:spcAft>
-                <a:spcPts val="300"/>
-              </a:spcAft>
-              <a:buNone/>
-            </a:pPr>
-            <a:r>
-              <a:rPr lang="en-US" sz="1200" dirty="0">
-                <a:solidFill>
-                  <a:srgbClr val="1C2833"/>
-                </a:solidFill>
-                <a:latin typeface="Arial" pitchFamily="34" charset="0"/>
-                <a:ea typeface="Arial" pitchFamily="34" charset="-122"/>
-                <a:cs typeface="Arial" pitchFamily="34" charset="-120"/>
-              </a:rPr>
-              <a:t>, add ONE of: – A clearly-drawn precession diagram showing the wobble cone – A second wheel for Greek-origin star-name comparisons – A short paragraph on the cross-cultural Sanskrit-Greek-Babylonian zodiac correspondence</a:t>
-            </a:r>
-            <a:endParaRPr lang="en-US" sz="1200" dirty="0"/>
-          </a:p>
-        </p:txBody>
-      </p:sp>
-      <p:sp>
-        <p:nvSpPr>
-          <p:cNvPr id="7" name="Text 5"/>
           <p:cNvSpPr/>
           <p:nvPr/>
         </p:nvSpPr>
@@ -4363,7 +6062,7 @@
                 <a:ea typeface="Georgia" pitchFamily="34" charset="-122"/>
                 <a:cs typeface="Georgia" pitchFamily="34" charset="-120"/>
               </a:rPr>
-              <a:t>Build time (30 min)</a:t>
+              <a:t>Core (5 min)</a:t>
             </a:r>
             <a:endParaRPr lang="en-US" sz="1800" dirty="0"/>
           </a:p>
@@ -4378,54 +6077,6 @@
         <p:spPr>
           <a:xfrm>
             <a:off x="406301" y="870942"/>
-            <a:ext cx="8498026" cy="426541"/>
-          </a:xfrm>
-          <a:prstGeom prst="rect">
-            <a:avLst/>
-          </a:prstGeom>
-          <a:noFill/>
-          <a:ln/>
-        </p:spPr>
-        <p:txBody>
-          <a:bodyPr wrap="square" lIns="0" tIns="0" rIns="0" bIns="0" rtlCol="0" anchor="t"/>
-          <a:lstStyle/>
-          <a:p>
-            <a:pPr algn="l" indent="0" marL="0">
-              <a:lnSpc>
-                <a:spcPts val="1680"/>
-              </a:lnSpc>
-              <a:spcBef>
-                <a:spcPts val="300"/>
-              </a:spcBef>
-              <a:spcAft>
-                <a:spcPts val="300"/>
-              </a:spcAft>
-              <a:buNone/>
-            </a:pPr>
-            <a:r>
-              <a:rPr lang="en-US" sz="1200" dirty="0">
-                <a:solidFill>
-                  <a:srgbClr val="1C2833"/>
-                </a:solidFill>
-                <a:latin typeface="Arial" pitchFamily="34" charset="0"/>
-                <a:ea typeface="Arial" pitchFamily="34" charset="-122"/>
-                <a:cs typeface="Arial" pitchFamily="34" charset="-120"/>
-              </a:rPr>
-              <a:t>Pairs work in silence first (10 min) to get the labels down, then collaborative (20 min) to add the explanatory text, colour, and diagrams.</a:t>
-            </a:r>
-            <a:endParaRPr lang="en-US" sz="1200" dirty="0"/>
-          </a:p>
-        </p:txBody>
-      </p:sp>
-      <p:sp>
-        <p:nvSpPr>
-          <p:cNvPr id="5" name="Text 3"/>
-          <p:cNvSpPr/>
-          <p:nvPr/>
-        </p:nvSpPr>
-        <p:spPr>
-          <a:xfrm>
-            <a:off x="406301" y="1373684"/>
             <a:ext cx="8498026" cy="213271"/>
           </a:xfrm>
           <a:prstGeom prst="rect">
@@ -4459,7 +6110,7 @@
                 <a:ea typeface="Arial" pitchFamily="34" charset="-122"/>
                 <a:cs typeface="Arial" pitchFamily="34" charset="-120"/>
               </a:rPr>
-              <a:t>Teacher circulates:</a:t>
+              <a:t>The teacher explicitly walks through the "Meets" target for the project:</a:t>
             </a:r>
             <a:endParaRPr lang="en-US" sz="1200" dirty="0"/>
           </a:p>
@@ -4467,55 +6118,7 @@
       </p:sp>
       <p:sp>
         <p:nvSpPr>
-          <p:cNvPr id="6" name="Text 4"/>
-          <p:cNvSpPr/>
-          <p:nvPr/>
-        </p:nvSpPr>
-        <p:spPr>
-          <a:xfrm>
-            <a:off x="406301" y="1663154"/>
-            <a:ext cx="8498026" cy="639812"/>
-          </a:xfrm>
-          <a:prstGeom prst="rect">
-            <a:avLst/>
-          </a:prstGeom>
-          <a:noFill/>
-          <a:ln/>
-        </p:spPr>
-        <p:txBody>
-          <a:bodyPr wrap="square" lIns="0" tIns="0" rIns="0" bIns="0" rtlCol="0" anchor="t"/>
-          <a:lstStyle/>
-          <a:p>
-            <a:pPr algn="l" indent="0" marL="0">
-              <a:lnSpc>
-                <a:spcPts val="1680"/>
-              </a:lnSpc>
-              <a:spcBef>
-                <a:spcPts val="300"/>
-              </a:spcBef>
-              <a:spcAft>
-                <a:spcPts val="300"/>
-              </a:spcAft>
-              <a:buNone/>
-            </a:pPr>
-            <a:r>
-              <a:rPr lang="en-US" sz="1200" dirty="0">
-                <a:solidFill>
-                  <a:srgbClr val="1C2833"/>
-                </a:solidFill>
-                <a:latin typeface="Arial" pitchFamily="34" charset="0"/>
-                <a:ea typeface="Arial" pitchFamily="34" charset="-122"/>
-                <a:cs typeface="Arial" pitchFamily="34" charset="-120"/>
-              </a:rPr>
-              <a:t>– For pairs stuck on labelling: hand them the printed reference table from Day 5. – For pairs stuck on axial-tilt explanation: redirect to the Day 2 sketch in their notebook. – For pairs racing ahead: ask "what would happen if the tilt were 0°?" or "how would a Babylonian astronomer label this wheel differently?"</a:t>
-            </a:r>
-            <a:endParaRPr lang="en-US" sz="1200" dirty="0"/>
-          </a:p>
-        </p:txBody>
-      </p:sp>
-      <p:sp>
-        <p:nvSpPr>
-          <p:cNvPr id="7" name="Text 5"/>
+          <p:cNvPr id="5" name="Text 3"/>
           <p:cNvSpPr/>
           <p:nvPr/>
         </p:nvSpPr>
@@ -4665,7 +6268,7 @@
                 <a:ea typeface="Georgia" pitchFamily="34" charset="-122"/>
                 <a:cs typeface="Georgia" pitchFamily="34" charset="-120"/>
               </a:rPr>
-              <a:t>Check-in (5 min)</a:t>
+              <a:t>Core (5 min) (cont.)</a:t>
             </a:r>
             <a:endParaRPr lang="en-US" sz="1800" dirty="0"/>
           </a:p>
@@ -4679,8 +6282,8 @@
         </p:nvSpPr>
         <p:spPr>
           <a:xfrm>
-            <a:off x="406301" y="870942"/>
-            <a:ext cx="8498026" cy="426541"/>
+            <a:off x="634901" y="883593"/>
+            <a:ext cx="8102798" cy="1500783"/>
           </a:xfrm>
           <a:prstGeom prst="rect">
             <a:avLst/>
@@ -4692,130 +6295,394 @@
           <a:bodyPr wrap="square" lIns="0" tIns="0" rIns="0" bIns="0" rtlCol="0" anchor="t"/>
           <a:lstStyle/>
           <a:p>
-            <a:pPr algn="l" indent="0" marL="0">
-              <a:lnSpc>
-                <a:spcPts val="1680"/>
-              </a:lnSpc>
-              <a:spcBef>
-                <a:spcPts val="300"/>
-              </a:spcBef>
-              <a:spcAft>
-                <a:spcPts val="300"/>
-              </a:spcAft>
-              <a:buNone/>
-            </a:pPr>
-            <a:r>
-              <a:rPr lang="en-US" sz="1200" dirty="0">
-                <a:solidFill>
-                  <a:srgbClr val="1C2833"/>
-                </a:solidFill>
-                <a:latin typeface="Arial" pitchFamily="34" charset="0"/>
-                <a:ea typeface="Arial" pitchFamily="34" charset="-122"/>
-                <a:cs typeface="Arial" pitchFamily="34" charset="-120"/>
-              </a:rPr>
-              <a:t>Stop work at minute 40. Each pair holds up their current draft. The teacher does a quick visual scan and notes 2–3 pairs to circle back to first thing tomorrow.</a:t>
+            <a:pPr algn="l" marL="342900" indent="-342900">
+              <a:lnSpc>
+                <a:spcPts val="1620"/>
+              </a:lnSpc>
+              <a:spcAft>
+                <a:spcPts val="300"/>
+              </a:spcAft>
+              <a:buSzPct val="100000"/>
+              <a:buChar char="•"/>
+            </a:pPr>
+            <a:r>
+              <a:rPr lang="en-US" sz="1200" dirty="0">
+                <a:solidFill>
+                  <a:srgbClr val="1C2833"/>
+                </a:solidFill>
+                <a:latin typeface="Arial" pitchFamily="34" charset="0"/>
+                <a:ea typeface="Arial" pitchFamily="34" charset="-122"/>
+                <a:cs typeface="Arial" pitchFamily="34" charset="-120"/>
+              </a:rPr>
+              <a:t>12 </a:t>
+            </a:r>
+            <a:pPr algn="l" indent="0" marL="0">
+              <a:lnSpc>
+                <a:spcPts val="1620"/>
+              </a:lnSpc>
+              <a:spcAft>
+                <a:spcPts val="300"/>
+              </a:spcAft>
+              <a:buNone/>
+            </a:pPr>
+            <a:r>
+              <a:rPr lang="en-US" sz="1200" i="1" dirty="0">
+                <a:solidFill>
+                  <a:srgbClr val="1C2833"/>
+                </a:solidFill>
+                <a:latin typeface="Arial" pitchFamily="34" charset="0"/>
+                <a:ea typeface="Arial" pitchFamily="34" charset="-122"/>
+                <a:cs typeface="Arial" pitchFamily="34" charset="-120"/>
+              </a:rPr>
+              <a:t>rāśi</a:t>
+            </a:r>
+            <a:pPr algn="l" indent="0" marL="0">
+              <a:lnSpc>
+                <a:spcPts val="1620"/>
+              </a:lnSpc>
+              <a:spcAft>
+                <a:spcPts val="300"/>
+              </a:spcAft>
+              <a:buNone/>
+            </a:pPr>
+            <a:r>
+              <a:rPr lang="en-US" sz="1200" dirty="0">
+                <a:solidFill>
+                  <a:srgbClr val="1C2833"/>
+                </a:solidFill>
+                <a:latin typeface="Arial" pitchFamily="34" charset="0"/>
+                <a:ea typeface="Arial" pitchFamily="34" charset="-122"/>
+                <a:cs typeface="Arial" pitchFamily="34" charset="-120"/>
+              </a:rPr>
+              <a:t> names in correct order ✓</a:t>
             </a:r>
             <a:endParaRPr lang="en-US" sz="1200" dirty="0"/>
           </a:p>
+          <a:p>
+            <a:pPr algn="l" marL="342900" indent="-342900">
+              <a:lnSpc>
+                <a:spcPts val="1620"/>
+              </a:lnSpc>
+              <a:spcAft>
+                <a:spcPts val="300"/>
+              </a:spcAft>
+              <a:buSzPct val="100000"/>
+              <a:buChar char="•"/>
+            </a:pPr>
+            <a:r>
+              <a:rPr lang="en-US" sz="1200" dirty="0">
+                <a:solidFill>
+                  <a:srgbClr val="1C2833"/>
+                </a:solidFill>
+                <a:latin typeface="Arial" pitchFamily="34" charset="0"/>
+                <a:ea typeface="Arial" pitchFamily="34" charset="-122"/>
+                <a:cs typeface="Arial" pitchFamily="34" charset="-120"/>
+              </a:rPr>
+              <a:t>English / Greek equivalents matching ✓</a:t>
+            </a:r>
+            <a:endParaRPr lang="en-US" sz="1200" dirty="0"/>
+          </a:p>
+          <a:p>
+            <a:pPr algn="l" marL="342900" indent="-342900">
+              <a:lnSpc>
+                <a:spcPts val="1620"/>
+              </a:lnSpc>
+              <a:spcAft>
+                <a:spcPts val="300"/>
+              </a:spcAft>
+              <a:buSzPct val="100000"/>
+              <a:buChar char="•"/>
+            </a:pPr>
+            <a:r>
+              <a:rPr lang="en-US" sz="1200" dirty="0">
+                <a:solidFill>
+                  <a:srgbClr val="1C2833"/>
+                </a:solidFill>
+                <a:latin typeface="Arial" pitchFamily="34" charset="0"/>
+                <a:ea typeface="Arial" pitchFamily="34" charset="-122"/>
+                <a:cs typeface="Arial" pitchFamily="34" charset="-120"/>
+              </a:rPr>
+              <a:t>Approximate </a:t>
+            </a:r>
+            <a:pPr algn="l" indent="0" marL="0">
+              <a:lnSpc>
+                <a:spcPts val="1620"/>
+              </a:lnSpc>
+              <a:spcAft>
+                <a:spcPts val="300"/>
+              </a:spcAft>
+              <a:buNone/>
+            </a:pPr>
+            <a:r>
+              <a:rPr lang="en-US" sz="1200" i="1" dirty="0">
+                <a:solidFill>
+                  <a:srgbClr val="1C2833"/>
+                </a:solidFill>
+                <a:latin typeface="Arial" pitchFamily="34" charset="0"/>
+                <a:ea typeface="Arial" pitchFamily="34" charset="-122"/>
+                <a:cs typeface="Arial" pitchFamily="34" charset="-120"/>
+              </a:rPr>
+              <a:t>nirayana</a:t>
+            </a:r>
+            <a:pPr algn="l" indent="0" marL="0">
+              <a:lnSpc>
+                <a:spcPts val="1620"/>
+              </a:lnSpc>
+              <a:spcAft>
+                <a:spcPts val="300"/>
+              </a:spcAft>
+              <a:buNone/>
+            </a:pPr>
+            <a:r>
+              <a:rPr lang="en-US" sz="1200" dirty="0">
+                <a:solidFill>
+                  <a:srgbClr val="1C2833"/>
+                </a:solidFill>
+                <a:latin typeface="Arial" pitchFamily="34" charset="0"/>
+                <a:ea typeface="Arial" pitchFamily="34" charset="-122"/>
+                <a:cs typeface="Arial" pitchFamily="34" charset="-120"/>
+              </a:rPr>
+              <a:t> date ranges (e.g. Meṣa = 14 Apr – 14 May) ✓</a:t>
+            </a:r>
+            <a:endParaRPr lang="en-US" sz="1200" dirty="0"/>
+          </a:p>
+          <a:p>
+            <a:pPr algn="l" marL="342900" indent="-342900">
+              <a:lnSpc>
+                <a:spcPts val="1620"/>
+              </a:lnSpc>
+              <a:spcAft>
+                <a:spcPts val="300"/>
+              </a:spcAft>
+              <a:buSzPct val="100000"/>
+              <a:buChar char="•"/>
+            </a:pPr>
+            <a:r>
+              <a:rPr lang="en-US" sz="1200" dirty="0">
+                <a:solidFill>
+                  <a:srgbClr val="1C2833"/>
+                </a:solidFill>
+                <a:latin typeface="Arial" pitchFamily="34" charset="0"/>
+                <a:ea typeface="Arial" pitchFamily="34" charset="-122"/>
+                <a:cs typeface="Arial" pitchFamily="34" charset="-120"/>
+              </a:rPr>
+              <a:t>All four solstice / equinox markers labelled with both </a:t>
+            </a:r>
+            <a:pPr algn="l" indent="0" marL="0">
+              <a:lnSpc>
+                <a:spcPts val="1620"/>
+              </a:lnSpc>
+              <a:spcAft>
+                <a:spcPts val="300"/>
+              </a:spcAft>
+              <a:buNone/>
+            </a:pPr>
+            <a:r>
+              <a:rPr lang="en-US" sz="1200" i="1" dirty="0">
+                <a:solidFill>
+                  <a:srgbClr val="1C2833"/>
+                </a:solidFill>
+                <a:latin typeface="Arial" pitchFamily="34" charset="0"/>
+                <a:ea typeface="Arial" pitchFamily="34" charset="-122"/>
+                <a:cs typeface="Arial" pitchFamily="34" charset="-120"/>
+              </a:rPr>
+              <a:t>sāyana</a:t>
+            </a:r>
+            <a:pPr algn="l" indent="0" marL="0">
+              <a:lnSpc>
+                <a:spcPts val="1620"/>
+              </a:lnSpc>
+              <a:spcAft>
+                <a:spcPts val="300"/>
+              </a:spcAft>
+              <a:buNone/>
+            </a:pPr>
+            <a:r>
+              <a:rPr lang="en-US" sz="1200" dirty="0">
+                <a:solidFill>
+                  <a:srgbClr val="1C2833"/>
+                </a:solidFill>
+                <a:latin typeface="Arial" pitchFamily="34" charset="0"/>
+                <a:ea typeface="Arial" pitchFamily="34" charset="-122"/>
+                <a:cs typeface="Arial" pitchFamily="34" charset="-120"/>
+              </a:rPr>
+              <a:t> and </a:t>
+            </a:r>
+            <a:pPr algn="l" indent="0" marL="0">
+              <a:lnSpc>
+                <a:spcPts val="1620"/>
+              </a:lnSpc>
+              <a:spcAft>
+                <a:spcPts val="300"/>
+              </a:spcAft>
+              <a:buNone/>
+            </a:pPr>
+            <a:r>
+              <a:rPr lang="en-US" sz="1200" i="1" dirty="0">
+                <a:solidFill>
+                  <a:srgbClr val="1C2833"/>
+                </a:solidFill>
+                <a:latin typeface="Arial" pitchFamily="34" charset="0"/>
+                <a:ea typeface="Arial" pitchFamily="34" charset="-122"/>
+                <a:cs typeface="Arial" pitchFamily="34" charset="-120"/>
+              </a:rPr>
+              <a:t>nirayana</a:t>
+            </a:r>
+            <a:pPr algn="l" indent="0" marL="0">
+              <a:lnSpc>
+                <a:spcPts val="1620"/>
+              </a:lnSpc>
+              <a:spcAft>
+                <a:spcPts val="300"/>
+              </a:spcAft>
+              <a:buNone/>
+            </a:pPr>
+            <a:r>
+              <a:rPr lang="en-US" sz="1200" dirty="0">
+                <a:solidFill>
+                  <a:srgbClr val="1C2833"/>
+                </a:solidFill>
+                <a:latin typeface="Arial" pitchFamily="34" charset="0"/>
+                <a:ea typeface="Arial" pitchFamily="34" charset="-122"/>
+                <a:cs typeface="Arial" pitchFamily="34" charset="-120"/>
+              </a:rPr>
+              <a:t> dates ✓</a:t>
+            </a:r>
+            <a:endParaRPr lang="en-US" sz="1200" dirty="0"/>
+          </a:p>
+          <a:p>
+            <a:pPr algn="l" marL="342900" indent="-342900">
+              <a:lnSpc>
+                <a:spcPts val="1620"/>
+              </a:lnSpc>
+              <a:spcAft>
+                <a:spcPts val="300"/>
+              </a:spcAft>
+              <a:buSzPct val="100000"/>
+              <a:buChar char="•"/>
+            </a:pPr>
+            <a:r>
+              <a:rPr lang="en-US" sz="1200" dirty="0">
+                <a:solidFill>
+                  <a:srgbClr val="1C2833"/>
+                </a:solidFill>
+                <a:latin typeface="Arial" pitchFamily="34" charset="0"/>
+                <a:ea typeface="Arial" pitchFamily="34" charset="-122"/>
+                <a:cs typeface="Arial" pitchFamily="34" charset="-120"/>
+              </a:rPr>
+              <a:t>A 4-sentence written explanation of why we have seasons (axial tilt) ✓</a:t>
+            </a:r>
+            <a:endParaRPr lang="en-US" sz="1200" dirty="0"/>
+          </a:p>
+          <a:p>
+            <a:pPr algn="l" marL="342900" indent="-342900">
+              <a:lnSpc>
+                <a:spcPts val="1620"/>
+              </a:lnSpc>
+              <a:spcAft>
+                <a:spcPts val="300"/>
+              </a:spcAft>
+              <a:buSzPct val="100000"/>
+              <a:buChar char="•"/>
+            </a:pPr>
+            <a:r>
+              <a:rPr lang="en-US" sz="1200" dirty="0">
+                <a:solidFill>
+                  <a:srgbClr val="1C2833"/>
+                </a:solidFill>
+                <a:latin typeface="Arial" pitchFamily="34" charset="0"/>
+                <a:ea typeface="Arial" pitchFamily="34" charset="-122"/>
+                <a:cs typeface="Arial" pitchFamily="34" charset="-120"/>
+              </a:rPr>
+              <a:t>Citation to </a:t>
+            </a:r>
+            <a:pPr algn="l" indent="0" marL="0">
+              <a:lnSpc>
+                <a:spcPts val="1620"/>
+              </a:lnSpc>
+              <a:spcAft>
+                <a:spcPts val="300"/>
+              </a:spcAft>
+              <a:buNone/>
+            </a:pPr>
+            <a:r>
+              <a:rPr lang="en-US" sz="1200" i="1" dirty="0">
+                <a:solidFill>
+                  <a:srgbClr val="1C2833"/>
+                </a:solidFill>
+                <a:latin typeface="Arial" pitchFamily="34" charset="0"/>
+                <a:ea typeface="Arial" pitchFamily="34" charset="-122"/>
+                <a:cs typeface="Arial" pitchFamily="34" charset="-120"/>
+              </a:rPr>
+              <a:t>Sūrya-siddhānta</a:t>
+            </a:r>
+            <a:pPr algn="l" indent="0" marL="0">
+              <a:lnSpc>
+                <a:spcPts val="1620"/>
+              </a:lnSpc>
+              <a:spcAft>
+                <a:spcPts val="300"/>
+              </a:spcAft>
+              <a:buNone/>
+            </a:pPr>
+            <a:r>
+              <a:rPr lang="en-US" sz="1200" dirty="0">
+                <a:solidFill>
+                  <a:srgbClr val="1C2833"/>
+                </a:solidFill>
+                <a:latin typeface="Arial" pitchFamily="34" charset="0"/>
+                <a:ea typeface="Arial" pitchFamily="34" charset="-122"/>
+                <a:cs typeface="Arial" pitchFamily="34" charset="-120"/>
+              </a:rPr>
+              <a:t> OR </a:t>
+            </a:r>
+            <a:pPr algn="l" indent="0" marL="0">
+              <a:lnSpc>
+                <a:spcPts val="1620"/>
+              </a:lnSpc>
+              <a:spcAft>
+                <a:spcPts val="300"/>
+              </a:spcAft>
+              <a:buNone/>
+            </a:pPr>
+            <a:r>
+              <a:rPr lang="en-US" sz="1200" i="1" dirty="0">
+                <a:solidFill>
+                  <a:srgbClr val="1C2833"/>
+                </a:solidFill>
+                <a:latin typeface="Arial" pitchFamily="34" charset="0"/>
+                <a:ea typeface="Arial" pitchFamily="34" charset="-122"/>
+                <a:cs typeface="Arial" pitchFamily="34" charset="-120"/>
+              </a:rPr>
+              <a:t>Bṛhat Saṁhitā</a:t>
+            </a:r>
+            <a:pPr algn="l" indent="0" marL="0">
+              <a:lnSpc>
+                <a:spcPts val="1620"/>
+              </a:lnSpc>
+              <a:spcAft>
+                <a:spcPts val="300"/>
+              </a:spcAft>
+              <a:buNone/>
+            </a:pPr>
+            <a:r>
+              <a:rPr lang="en-US" sz="1200" dirty="0">
+                <a:solidFill>
+                  <a:srgbClr val="1C2833"/>
+                </a:solidFill>
+                <a:latin typeface="Arial" pitchFamily="34" charset="0"/>
+                <a:ea typeface="Arial" pitchFamily="34" charset="-122"/>
+                <a:cs typeface="Arial" pitchFamily="34" charset="-120"/>
+              </a:rPr>
+              <a:t> OR an NCERT chapter ✓</a:t>
+            </a:r>
+            <a:endParaRPr lang="en-US" sz="1200" dirty="0"/>
+          </a:p>
         </p:txBody>
       </p:sp>
       <p:sp>
         <p:nvSpPr>
           <p:cNvPr id="5" name="Text 3"/>
-          <p:cNvSpPr/>
-          <p:nvPr/>
-        </p:nvSpPr>
-        <p:spPr>
-          <a:xfrm>
-            <a:off x="406301" y="1373684"/>
-            <a:ext cx="8498026" cy="426541"/>
-          </a:xfrm>
-          <a:prstGeom prst="rect">
-            <a:avLst/>
-          </a:prstGeom>
-          <a:noFill/>
-          <a:ln/>
-        </p:spPr>
-        <p:txBody>
-          <a:bodyPr wrap="square" lIns="0" tIns="0" rIns="0" bIns="0" rtlCol="0" anchor="t"/>
-          <a:lstStyle/>
-          <a:p>
-            <a:pPr algn="l" indent="0" marL="0">
-              <a:lnSpc>
-                <a:spcPts val="1680"/>
-              </a:lnSpc>
-              <a:spcBef>
-                <a:spcPts val="300"/>
-              </a:spcBef>
-              <a:spcAft>
-                <a:spcPts val="300"/>
-              </a:spcAft>
-              <a:buNone/>
-            </a:pPr>
-            <a:r>
-              <a:rPr lang="en-US" sz="1200" dirty="0">
-                <a:solidFill>
-                  <a:srgbClr val="1C2833"/>
-                </a:solidFill>
-                <a:latin typeface="Arial" pitchFamily="34" charset="0"/>
-                <a:ea typeface="Arial" pitchFamily="34" charset="-122"/>
-                <a:cs typeface="Arial" pitchFamily="34" charset="-120"/>
-              </a:rPr>
-              <a:t>– Exit prompt: </a:t>
-            </a:r>
-            <a:pPr algn="l" indent="0" marL="0">
-              <a:lnSpc>
-                <a:spcPts val="1680"/>
-              </a:lnSpc>
-              <a:spcBef>
-                <a:spcPts val="300"/>
-              </a:spcBef>
-              <a:spcAft>
-                <a:spcPts val="300"/>
-              </a:spcAft>
-              <a:buNone/>
-            </a:pPr>
-            <a:r>
-              <a:rPr lang="en-US" sz="1200" i="1" dirty="0">
-                <a:solidFill>
-                  <a:srgbClr val="1C2833"/>
-                </a:solidFill>
-                <a:latin typeface="Arial" pitchFamily="34" charset="0"/>
-                <a:ea typeface="Arial" pitchFamily="34" charset="-122"/>
-                <a:cs typeface="Arial" pitchFamily="34" charset="-120"/>
-              </a:rPr>
-              <a:t>"What's the ONE thing you still need to finish before tomorrow?"</a:t>
-            </a:r>
-            <a:pPr algn="l" indent="0" marL="0">
-              <a:lnSpc>
-                <a:spcPts val="1680"/>
-              </a:lnSpc>
-              <a:spcBef>
-                <a:spcPts val="300"/>
-              </a:spcBef>
-              <a:spcAft>
-                <a:spcPts val="300"/>
-              </a:spcAft>
-              <a:buNone/>
-            </a:pPr>
-            <a:r>
-              <a:rPr lang="en-US" sz="1200" dirty="0">
-                <a:solidFill>
-                  <a:srgbClr val="1C2833"/>
-                </a:solidFill>
-                <a:latin typeface="Arial" pitchFamily="34" charset="0"/>
-                <a:ea typeface="Arial" pitchFamily="34" charset="-122"/>
-                <a:cs typeface="Arial" pitchFamily="34" charset="-120"/>
-              </a:rPr>
-              <a:t> – Write it on a sticky note attached to the wheel.</a:t>
-            </a:r>
-            <a:endParaRPr lang="en-US" sz="1200" dirty="0"/>
-          </a:p>
-        </p:txBody>
-      </p:sp>
-      <p:sp>
-        <p:nvSpPr>
-          <p:cNvPr id="6" name="Text 4"/>
           <p:cNvSpPr/>
           <p:nvPr/>
         </p:nvSpPr>
@@ -4965,7 +6832,7 @@
                 <a:ea typeface="Georgia" pitchFamily="34" charset="-122"/>
                 <a:cs typeface="Georgia" pitchFamily="34" charset="-120"/>
               </a:rPr>
-              <a:t>Pair coaching prompts (for the teacher)</a:t>
+              <a:t>Core (5 min) (cont.)</a:t>
             </a:r>
             <a:endParaRPr lang="en-US" sz="1800" dirty="0"/>
           </a:p>
@@ -5005,15 +6872,61 @@
               <a:buNone/>
             </a:pPr>
             <a:r>
-              <a:rPr lang="en-US" sz="1200" i="1" dirty="0">
-                <a:solidFill>
-                  <a:srgbClr val="1C2833"/>
-                </a:solidFill>
-                <a:latin typeface="Arial" pitchFamily="34" charset="0"/>
-                <a:ea typeface="Arial" pitchFamily="34" charset="-122"/>
-                <a:cs typeface="Arial" pitchFamily="34" charset="-120"/>
-              </a:rPr>
-              <a:t>Each row: If you see ... · Try saying ....</a:t>
+              <a:rPr lang="en-US" sz="1200" dirty="0">
+                <a:solidFill>
+                  <a:srgbClr val="1C2833"/>
+                </a:solidFill>
+                <a:latin typeface="Arial" pitchFamily="34" charset="0"/>
+                <a:ea typeface="Arial" pitchFamily="34" charset="-122"/>
+                <a:cs typeface="Arial" pitchFamily="34" charset="-120"/>
+              </a:rPr>
+              <a:t>To </a:t>
+            </a:r>
+            <a:pPr algn="l" indent="0" marL="0">
+              <a:lnSpc>
+                <a:spcPts val="1680"/>
+              </a:lnSpc>
+              <a:spcBef>
+                <a:spcPts val="300"/>
+              </a:spcBef>
+              <a:spcAft>
+                <a:spcPts val="300"/>
+              </a:spcAft>
+              <a:buNone/>
+            </a:pPr>
+            <a:r>
+              <a:rPr lang="en-US" sz="1200" b="1" dirty="0">
+                <a:solidFill>
+                  <a:srgbClr val="1C2833"/>
+                </a:solidFill>
+                <a:latin typeface="Arial" pitchFamily="34" charset="0"/>
+                <a:ea typeface="Arial" pitchFamily="34" charset="-122"/>
+                <a:cs typeface="Arial" pitchFamily="34" charset="-120"/>
+              </a:rPr>
+              <a:t>Exceed</a:t>
+            </a:r>
+            <a:pPr algn="l" indent="0" marL="0">
+              <a:lnSpc>
+                <a:spcPts val="1680"/>
+              </a:lnSpc>
+              <a:spcBef>
+                <a:spcPts val="300"/>
+              </a:spcBef>
+              <a:spcAft>
+                <a:spcPts val="300"/>
+              </a:spcAft>
+              <a:buNone/>
+            </a:pPr>
+            <a:r>
+              <a:rPr lang="en-US" sz="1200" dirty="0">
+                <a:solidFill>
+                  <a:srgbClr val="1C2833"/>
+                </a:solidFill>
+                <a:latin typeface="Arial" pitchFamily="34" charset="0"/>
+                <a:ea typeface="Arial" pitchFamily="34" charset="-122"/>
+                <a:cs typeface="Arial" pitchFamily="34" charset="-120"/>
+              </a:rPr>
+              <a:t>, add ONE of:</a:t>
             </a:r>
             <a:endParaRPr lang="en-US" sz="1200" dirty="0"/>
           </a:p>
@@ -5028,7 +6941,7 @@
         <p:spPr>
           <a:xfrm>
             <a:off x="634901" y="1173063"/>
-            <a:ext cx="8102798" cy="525661"/>
+            <a:ext cx="8102798" cy="769441"/>
           </a:xfrm>
           <a:prstGeom prst="rect">
             <a:avLst/>
@@ -5051,35 +6964,15 @@
               <a:buChar char="•"/>
             </a:pPr>
             <a:r>
-              <a:rPr lang="en-US" sz="1200" b="1" dirty="0">
-                <a:solidFill>
-                  <a:srgbClr val="1C2833"/>
-                </a:solidFill>
-                <a:latin typeface="Arial" pitchFamily="34" charset="0"/>
-                <a:ea typeface="Arial" pitchFamily="34" charset="-122"/>
-                <a:cs typeface="Arial" pitchFamily="34" charset="-120"/>
-              </a:rPr>
-              <a:t>One partner doing all the drawing</a:t>
-            </a:r>
-            <a:pPr algn="l" indent="0" marL="0">
-              <a:lnSpc>
-                <a:spcPts val="1620"/>
-              </a:lnSpc>
-              <a:spcAft>
-                <a:spcPts val="300"/>
-              </a:spcAft>
-              <a:buNone/>
-            </a:pPr>
-            <a:r>
-              <a:rPr lang="en-US" sz="1200" dirty="0">
-                <a:solidFill>
-                  <a:srgbClr val="1C2833"/>
-                </a:solidFill>
-                <a:latin typeface="Arial" pitchFamily="34" charset="0"/>
-                <a:ea typeface="Arial" pitchFamily="34" charset="-122"/>
-                <a:cs typeface="Arial" pitchFamily="34" charset="-120"/>
-              </a:rPr>
-              <a:t> — "Tell me what your partner is contributing. Where will their writing go?"</a:t>
+              <a:rPr lang="en-US" sz="1200" dirty="0">
+                <a:solidFill>
+                  <a:srgbClr val="1C2833"/>
+                </a:solidFill>
+                <a:latin typeface="Arial" pitchFamily="34" charset="0"/>
+                <a:ea typeface="Arial" pitchFamily="34" charset="-122"/>
+                <a:cs typeface="Arial" pitchFamily="34" charset="-120"/>
+              </a:rPr>
+              <a:t>A clearly-drawn precession diagram showing the wobble cone</a:t>
             </a:r>
             <a:endParaRPr lang="en-US" sz="1200" dirty="0"/>
           </a:p>
@@ -5095,200 +6988,18 @@
               <a:buChar char="•"/>
             </a:pPr>
             <a:r>
-              <a:rPr lang="en-US" sz="1200" b="1" dirty="0">
-                <a:solidFill>
-                  <a:srgbClr val="1C2833"/>
-                </a:solidFill>
-                <a:latin typeface="Arial" pitchFamily="34" charset="0"/>
-                <a:ea typeface="Arial" pitchFamily="34" charset="-122"/>
-                <a:cs typeface="Arial" pitchFamily="34" charset="-120"/>
-              </a:rPr>
-              <a:t>A wheel with English names only</a:t>
-            </a:r>
-            <a:pPr algn="l" indent="0" marL="0">
-              <a:lnSpc>
-                <a:spcPts val="1620"/>
-              </a:lnSpc>
-              <a:spcAft>
-                <a:spcPts val="300"/>
-              </a:spcAft>
-              <a:buNone/>
-            </a:pPr>
-            <a:r>
-              <a:rPr lang="en-US" sz="1200" dirty="0">
-                <a:solidFill>
-                  <a:srgbClr val="1C2833"/>
-                </a:solidFill>
-                <a:latin typeface="Arial" pitchFamily="34" charset="0"/>
-                <a:ea typeface="Arial" pitchFamily="34" charset="-122"/>
-                <a:cs typeface="Arial" pitchFamily="34" charset="-120"/>
-              </a:rPr>
-              <a:t> — "Where do the Sanskrit names go? Show me."</a:t>
+              <a:rPr lang="en-US" sz="1200" dirty="0">
+                <a:solidFill>
+                  <a:srgbClr val="1C2833"/>
+                </a:solidFill>
+                <a:latin typeface="Arial" pitchFamily="34" charset="0"/>
+                <a:ea typeface="Arial" pitchFamily="34" charset="-122"/>
+                <a:cs typeface="Arial" pitchFamily="34" charset="-120"/>
+              </a:rPr>
+              <a:t>A second wheel for Greek-origin star-name comparisons</a:t>
             </a:r>
             <a:endParaRPr lang="en-US" sz="1200" dirty="0"/>
           </a:p>
-        </p:txBody>
-      </p:sp>
-      <p:sp>
-        <p:nvSpPr>
-          <p:cNvPr id="6" name="Text 4"/>
-          <p:cNvSpPr/>
-          <p:nvPr/>
-        </p:nvSpPr>
-        <p:spPr>
-          <a:xfrm>
-            <a:off x="406301" y="1787575"/>
-            <a:ext cx="8498026" cy="426541"/>
-          </a:xfrm>
-          <a:prstGeom prst="rect">
-            <a:avLst/>
-          </a:prstGeom>
-          <a:noFill/>
-          <a:ln/>
-        </p:spPr>
-        <p:txBody>
-          <a:bodyPr wrap="square" lIns="0" tIns="0" rIns="0" bIns="0" rtlCol="0" anchor="t"/>
-          <a:lstStyle/>
-          <a:p>
-            <a:pPr algn="l" indent="0" marL="0">
-              <a:lnSpc>
-                <a:spcPts val="1680"/>
-              </a:lnSpc>
-              <a:spcBef>
-                <a:spcPts val="300"/>
-              </a:spcBef>
-              <a:spcAft>
-                <a:spcPts val="300"/>
-              </a:spcAft>
-              <a:buNone/>
-            </a:pPr>
-            <a:r>
-              <a:rPr lang="en-US" sz="1200" dirty="0">
-                <a:solidFill>
-                  <a:srgbClr val="1C2833"/>
-                </a:solidFill>
-                <a:latin typeface="Arial" pitchFamily="34" charset="0"/>
-                <a:ea typeface="Arial" pitchFamily="34" charset="-122"/>
-                <a:cs typeface="Arial" pitchFamily="34" charset="-120"/>
-              </a:rPr>
-              <a:t>– Confusion about </a:t>
-            </a:r>
-            <a:pPr algn="l" indent="0" marL="0">
-              <a:lnSpc>
-                <a:spcPts val="1680"/>
-              </a:lnSpc>
-              <a:spcBef>
-                <a:spcPts val="300"/>
-              </a:spcBef>
-              <a:spcAft>
-                <a:spcPts val="300"/>
-              </a:spcAft>
-              <a:buNone/>
-            </a:pPr>
-            <a:r>
-              <a:rPr lang="en-US" sz="1200" i="1" dirty="0">
-                <a:solidFill>
-                  <a:srgbClr val="1C2833"/>
-                </a:solidFill>
-                <a:latin typeface="Arial" pitchFamily="34" charset="0"/>
-                <a:ea typeface="Arial" pitchFamily="34" charset="-122"/>
-                <a:cs typeface="Arial" pitchFamily="34" charset="-120"/>
-              </a:rPr>
-              <a:t>sāyana</a:t>
-            </a:r>
-            <a:pPr algn="l" indent="0" marL="0">
-              <a:lnSpc>
-                <a:spcPts val="1680"/>
-              </a:lnSpc>
-              <a:spcBef>
-                <a:spcPts val="300"/>
-              </a:spcBef>
-              <a:spcAft>
-                <a:spcPts val="300"/>
-              </a:spcAft>
-              <a:buNone/>
-            </a:pPr>
-            <a:r>
-              <a:rPr lang="en-US" sz="1200" dirty="0">
-                <a:solidFill>
-                  <a:srgbClr val="1C2833"/>
-                </a:solidFill>
-                <a:latin typeface="Arial" pitchFamily="34" charset="0"/>
-                <a:ea typeface="Arial" pitchFamily="34" charset="-122"/>
-                <a:cs typeface="Arial" pitchFamily="34" charset="-120"/>
-              </a:rPr>
-              <a:t> vs </a:t>
-            </a:r>
-            <a:pPr algn="l" indent="0" marL="0">
-              <a:lnSpc>
-                <a:spcPts val="1680"/>
-              </a:lnSpc>
-              <a:spcBef>
-                <a:spcPts val="300"/>
-              </a:spcBef>
-              <a:spcAft>
-                <a:spcPts val="300"/>
-              </a:spcAft>
-              <a:buNone/>
-            </a:pPr>
-            <a:r>
-              <a:rPr lang="en-US" sz="1200" i="1" dirty="0">
-                <a:solidFill>
-                  <a:srgbClr val="1C2833"/>
-                </a:solidFill>
-                <a:latin typeface="Arial" pitchFamily="34" charset="0"/>
-                <a:ea typeface="Arial" pitchFamily="34" charset="-122"/>
-                <a:cs typeface="Arial" pitchFamily="34" charset="-120"/>
-              </a:rPr>
-              <a:t>nirayana</a:t>
-            </a:r>
-            <a:pPr algn="l" indent="0" marL="0">
-              <a:lnSpc>
-                <a:spcPts val="1680"/>
-              </a:lnSpc>
-              <a:spcBef>
-                <a:spcPts val="300"/>
-              </a:spcBef>
-              <a:spcAft>
-                <a:spcPts val="300"/>
-              </a:spcAft>
-              <a:buNone/>
-            </a:pPr>
-            <a:r>
-              <a:rPr lang="en-US" sz="1200" dirty="0">
-                <a:solidFill>
-                  <a:srgbClr val="1C2833"/>
-                </a:solidFill>
-                <a:latin typeface="Arial" pitchFamily="34" charset="0"/>
-                <a:ea typeface="Arial" pitchFamily="34" charset="-122"/>
-                <a:cs typeface="Arial" pitchFamily="34" charset="-120"/>
-              </a:rPr>
-              <a:t> — "Pick the four turning-points. Write the December solstice date on one line. Now write the Makara Saṁkrānti date below it. They're different — your job is to make that visible on the wheel."</a:t>
-            </a:r>
-            <a:endParaRPr lang="en-US" sz="1200" dirty="0"/>
-          </a:p>
-        </p:txBody>
-      </p:sp>
-      <p:sp>
-        <p:nvSpPr>
-          <p:cNvPr id="7" name="Text 5"/>
-          <p:cNvSpPr/>
-          <p:nvPr/>
-        </p:nvSpPr>
-        <p:spPr>
-          <a:xfrm>
-            <a:off x="634901" y="2302966"/>
-            <a:ext cx="8102798" cy="487561"/>
-          </a:xfrm>
-          <a:prstGeom prst="rect">
-            <a:avLst/>
-          </a:prstGeom>
-          <a:noFill/>
-          <a:ln/>
-        </p:spPr>
-        <p:txBody>
-          <a:bodyPr wrap="square" lIns="0" tIns="0" rIns="0" bIns="0" rtlCol="0" anchor="t"/>
-          <a:lstStyle/>
           <a:p>
             <a:pPr algn="l" marL="342900" indent="-342900">
               <a:lnSpc>
@@ -5301,35 +7012,15 @@
               <a:buChar char="•"/>
             </a:pPr>
             <a:r>
-              <a:rPr lang="en-US" sz="1200" b="1" dirty="0">
-                <a:solidFill>
-                  <a:srgbClr val="1C2833"/>
-                </a:solidFill>
-                <a:latin typeface="Arial" pitchFamily="34" charset="0"/>
-                <a:ea typeface="Arial" pitchFamily="34" charset="-122"/>
-                <a:cs typeface="Arial" pitchFamily="34" charset="-120"/>
-              </a:rPr>
-              <a:t>Beautiful art, no astronomy</a:t>
-            </a:r>
-            <a:pPr algn="l" indent="0" marL="0">
-              <a:lnSpc>
-                <a:spcPts val="1620"/>
-              </a:lnSpc>
-              <a:spcAft>
-                <a:spcPts val="300"/>
-              </a:spcAft>
-              <a:buNone/>
-            </a:pPr>
-            <a:r>
-              <a:rPr lang="en-US" sz="1200" dirty="0">
-                <a:solidFill>
-                  <a:srgbClr val="1C2833"/>
-                </a:solidFill>
-                <a:latin typeface="Arial" pitchFamily="34" charset="0"/>
-                <a:ea typeface="Arial" pitchFamily="34" charset="-122"/>
-                <a:cs typeface="Arial" pitchFamily="34" charset="-120"/>
-              </a:rPr>
-              <a:t> — "Where on the wheel does the reader learn that the seasons come from axial tilt? Add a sentence."</a:t>
+              <a:rPr lang="en-US" sz="1200" dirty="0">
+                <a:solidFill>
+                  <a:srgbClr val="1C2833"/>
+                </a:solidFill>
+                <a:latin typeface="Arial" pitchFamily="34" charset="0"/>
+                <a:ea typeface="Arial" pitchFamily="34" charset="-122"/>
+                <a:cs typeface="Arial" pitchFamily="34" charset="-120"/>
+              </a:rPr>
+              <a:t>A short paragraph on the cross-cultural Sanskrit-Greek-Babylonian zodiac correspondence</a:t>
             </a:r>
             <a:endParaRPr lang="en-US" sz="1200" dirty="0"/>
           </a:p>
@@ -5337,7 +7028,7 @@
       </p:sp>
       <p:sp>
         <p:nvSpPr>
-          <p:cNvPr id="8" name="Text 6"/>
+          <p:cNvPr id="6" name="Text 4"/>
           <p:cNvSpPr/>
           <p:nvPr/>
         </p:nvSpPr>
@@ -5487,7 +7178,7 @@
                 <a:ea typeface="Georgia" pitchFamily="34" charset="-122"/>
                 <a:cs typeface="Georgia" pitchFamily="34" charset="-120"/>
               </a:rPr>
-              <a:t>Differentiation</a:t>
+              <a:t>Build time (30 min)</a:t>
             </a:r>
             <a:endParaRPr lang="en-US" sz="1800" dirty="0"/>
           </a:p>
@@ -5501,8 +7192,8 @@
         </p:nvSpPr>
         <p:spPr>
           <a:xfrm>
-            <a:off x="634901" y="883593"/>
-            <a:ext cx="8102798" cy="937022"/>
+            <a:off x="406301" y="870942"/>
+            <a:ext cx="8498026" cy="426541"/>
           </a:xfrm>
           <a:prstGeom prst="rect">
             <a:avLst/>
@@ -5514,290 +7205,76 @@
           <a:bodyPr wrap="square" lIns="0" tIns="0" rIns="0" bIns="0" rtlCol="0" anchor="t"/>
           <a:lstStyle/>
           <a:p>
-            <a:pPr algn="l" marL="342900" indent="-342900">
-              <a:lnSpc>
-                <a:spcPts val="1620"/>
-              </a:lnSpc>
-              <a:spcAft>
-                <a:spcPts val="300"/>
-              </a:spcAft>
-              <a:buSzPct val="100000"/>
-              <a:buChar char="•"/>
-            </a:pPr>
-            <a:r>
-              <a:rPr lang="en-US" sz="1200" b="1" dirty="0">
-                <a:solidFill>
-                  <a:srgbClr val="1C2833"/>
-                </a:solidFill>
-                <a:latin typeface="Arial" pitchFamily="34" charset="0"/>
-                <a:ea typeface="Arial" pitchFamily="34" charset="-122"/>
-                <a:cs typeface="Arial" pitchFamily="34" charset="-120"/>
-              </a:rPr>
-              <a:t>One tier up:</a:t>
-            </a:r>
-            <a:pPr algn="l" indent="0" marL="0">
-              <a:lnSpc>
-                <a:spcPts val="1620"/>
-              </a:lnSpc>
-              <a:spcAft>
-                <a:spcPts val="300"/>
-              </a:spcAft>
-              <a:buNone/>
-            </a:pPr>
-            <a:r>
-              <a:rPr lang="en-US" sz="1200" dirty="0">
-                <a:solidFill>
-                  <a:srgbClr val="1C2833"/>
-                </a:solidFill>
-                <a:latin typeface="Arial" pitchFamily="34" charset="0"/>
-                <a:ea typeface="Arial" pitchFamily="34" charset="-122"/>
-                <a:cs typeface="Arial" pitchFamily="34" charset="-120"/>
-              </a:rPr>
-              <a:t> Add a second concentric ring showing the Western horoscope (</a:t>
-            </a:r>
-            <a:pPr algn="l" indent="0" marL="0">
-              <a:lnSpc>
-                <a:spcPts val="1620"/>
-              </a:lnSpc>
-              <a:spcAft>
-                <a:spcPts val="300"/>
-              </a:spcAft>
-              <a:buNone/>
-            </a:pPr>
-            <a:r>
-              <a:rPr lang="en-US" sz="1200" i="1" dirty="0">
-                <a:solidFill>
-                  <a:srgbClr val="1C2833"/>
-                </a:solidFill>
-                <a:latin typeface="Arial" pitchFamily="34" charset="0"/>
-                <a:ea typeface="Arial" pitchFamily="34" charset="-122"/>
-                <a:cs typeface="Arial" pitchFamily="34" charset="-120"/>
-              </a:rPr>
-              <a:t>sāyana</a:t>
-            </a:r>
-            <a:pPr algn="l" indent="0" marL="0">
-              <a:lnSpc>
-                <a:spcPts val="1620"/>
-              </a:lnSpc>
-              <a:spcAft>
-                <a:spcPts val="300"/>
-              </a:spcAft>
-              <a:buNone/>
-            </a:pPr>
-            <a:r>
-              <a:rPr lang="en-US" sz="1200" dirty="0">
-                <a:solidFill>
-                  <a:srgbClr val="1C2833"/>
-                </a:solidFill>
-                <a:latin typeface="Arial" pitchFamily="34" charset="0"/>
-                <a:ea typeface="Arial" pitchFamily="34" charset="-122"/>
-                <a:cs typeface="Arial" pitchFamily="34" charset="-120"/>
-              </a:rPr>
-              <a:t>) date range for each </a:t>
-            </a:r>
-            <a:pPr algn="l" indent="0" marL="0">
-              <a:lnSpc>
-                <a:spcPts val="1620"/>
-              </a:lnSpc>
-              <a:spcAft>
-                <a:spcPts val="300"/>
-              </a:spcAft>
-              <a:buNone/>
-            </a:pPr>
-            <a:r>
-              <a:rPr lang="en-US" sz="1200" i="1" dirty="0">
-                <a:solidFill>
-                  <a:srgbClr val="1C2833"/>
-                </a:solidFill>
-                <a:latin typeface="Arial" pitchFamily="34" charset="0"/>
-                <a:ea typeface="Arial" pitchFamily="34" charset="-122"/>
-                <a:cs typeface="Arial" pitchFamily="34" charset="-120"/>
-              </a:rPr>
-              <a:t>rāśi</a:t>
-            </a:r>
-            <a:pPr algn="l" indent="0" marL="0">
-              <a:lnSpc>
-                <a:spcPts val="1620"/>
-              </a:lnSpc>
-              <a:spcAft>
-                <a:spcPts val="300"/>
-              </a:spcAft>
-              <a:buNone/>
-            </a:pPr>
-            <a:r>
-              <a:rPr lang="en-US" sz="1200" dirty="0">
-                <a:solidFill>
-                  <a:srgbClr val="1C2833"/>
-                </a:solidFill>
-                <a:latin typeface="Arial" pitchFamily="34" charset="0"/>
-                <a:ea typeface="Arial" pitchFamily="34" charset="-122"/>
-                <a:cs typeface="Arial" pitchFamily="34" charset="-120"/>
-              </a:rPr>
-              <a:t>. The reader should be able to compare the two rings at a glance.</a:t>
+            <a:pPr algn="l" indent="0" marL="0">
+              <a:lnSpc>
+                <a:spcPts val="1680"/>
+              </a:lnSpc>
+              <a:spcBef>
+                <a:spcPts val="300"/>
+              </a:spcBef>
+              <a:spcAft>
+                <a:spcPts val="300"/>
+              </a:spcAft>
+              <a:buNone/>
+            </a:pPr>
+            <a:r>
+              <a:rPr lang="en-US" sz="1200" dirty="0">
+                <a:solidFill>
+                  <a:srgbClr val="1C2833"/>
+                </a:solidFill>
+                <a:latin typeface="Arial" pitchFamily="34" charset="0"/>
+                <a:ea typeface="Arial" pitchFamily="34" charset="-122"/>
+                <a:cs typeface="Arial" pitchFamily="34" charset="-120"/>
+              </a:rPr>
+              <a:t>Pairs work in silence first (10 min) to get the labels down, then collaborative (20 min) to add the explanatory text, colour, and diagrams.</a:t>
             </a:r>
             <a:endParaRPr lang="en-US" sz="1200" dirty="0"/>
           </a:p>
-          <a:p>
-            <a:pPr algn="l" marL="342900" indent="-342900">
-              <a:lnSpc>
-                <a:spcPts val="1620"/>
-              </a:lnSpc>
-              <a:spcAft>
-                <a:spcPts val="300"/>
-              </a:spcAft>
-              <a:buSzPct val="100000"/>
-              <a:buChar char="•"/>
-            </a:pPr>
-            <a:r>
-              <a:rPr lang="en-US" sz="1200" b="1" dirty="0">
-                <a:solidFill>
-                  <a:srgbClr val="1C2833"/>
-                </a:solidFill>
-                <a:latin typeface="Arial" pitchFamily="34" charset="0"/>
-                <a:ea typeface="Arial" pitchFamily="34" charset="-122"/>
-                <a:cs typeface="Arial" pitchFamily="34" charset="-120"/>
-              </a:rPr>
-              <a:t>One tier down:</a:t>
-            </a:r>
-            <a:pPr algn="l" indent="0" marL="0">
-              <a:lnSpc>
-                <a:spcPts val="1620"/>
-              </a:lnSpc>
-              <a:spcAft>
-                <a:spcPts val="300"/>
-              </a:spcAft>
-              <a:buNone/>
-            </a:pPr>
-            <a:r>
-              <a:rPr lang="en-US" sz="1200" dirty="0">
-                <a:solidFill>
-                  <a:srgbClr val="1C2833"/>
-                </a:solidFill>
-                <a:latin typeface="Arial" pitchFamily="34" charset="0"/>
-                <a:ea typeface="Arial" pitchFamily="34" charset="-122"/>
-                <a:cs typeface="Arial" pitchFamily="34" charset="-120"/>
-              </a:rPr>
-              <a:t> Drop the </a:t>
-            </a:r>
-            <a:pPr algn="l" indent="0" marL="0">
-              <a:lnSpc>
-                <a:spcPts val="1620"/>
-              </a:lnSpc>
-              <a:spcAft>
-                <a:spcPts val="300"/>
-              </a:spcAft>
-              <a:buNone/>
-            </a:pPr>
-            <a:r>
-              <a:rPr lang="en-US" sz="1200" i="1" dirty="0">
-                <a:solidFill>
-                  <a:srgbClr val="1C2833"/>
-                </a:solidFill>
-                <a:latin typeface="Arial" pitchFamily="34" charset="0"/>
-                <a:ea typeface="Arial" pitchFamily="34" charset="-122"/>
-                <a:cs typeface="Arial" pitchFamily="34" charset="-120"/>
-              </a:rPr>
-              <a:t>sāyana</a:t>
-            </a:r>
-            <a:pPr algn="l" indent="0" marL="0">
-              <a:lnSpc>
-                <a:spcPts val="1620"/>
-              </a:lnSpc>
-              <a:spcAft>
-                <a:spcPts val="300"/>
-              </a:spcAft>
-              <a:buNone/>
-            </a:pPr>
-            <a:r>
-              <a:rPr lang="en-US" sz="1200" dirty="0">
-                <a:solidFill>
-                  <a:srgbClr val="1C2833"/>
-                </a:solidFill>
-                <a:latin typeface="Arial" pitchFamily="34" charset="0"/>
-                <a:ea typeface="Arial" pitchFamily="34" charset="-122"/>
-                <a:cs typeface="Arial" pitchFamily="34" charset="-120"/>
-              </a:rPr>
-              <a:t> / </a:t>
-            </a:r>
-            <a:pPr algn="l" indent="0" marL="0">
-              <a:lnSpc>
-                <a:spcPts val="1620"/>
-              </a:lnSpc>
-              <a:spcAft>
-                <a:spcPts val="300"/>
-              </a:spcAft>
-              <a:buNone/>
-            </a:pPr>
-            <a:r>
-              <a:rPr lang="en-US" sz="1200" i="1" dirty="0">
-                <a:solidFill>
-                  <a:srgbClr val="1C2833"/>
-                </a:solidFill>
-                <a:latin typeface="Arial" pitchFamily="34" charset="0"/>
-                <a:ea typeface="Arial" pitchFamily="34" charset="-122"/>
-                <a:cs typeface="Arial" pitchFamily="34" charset="-120"/>
-              </a:rPr>
-              <a:t>nirayana</a:t>
-            </a:r>
-            <a:pPr algn="l" indent="0" marL="0">
-              <a:lnSpc>
-                <a:spcPts val="1620"/>
-              </a:lnSpc>
-              <a:spcAft>
-                <a:spcPts val="300"/>
-              </a:spcAft>
-              <a:buNone/>
-            </a:pPr>
-            <a:r>
-              <a:rPr lang="en-US" sz="1200" dirty="0">
-                <a:solidFill>
-                  <a:srgbClr val="1C2833"/>
-                </a:solidFill>
-                <a:latin typeface="Arial" pitchFamily="34" charset="0"/>
-                <a:ea typeface="Arial" pitchFamily="34" charset="-122"/>
-                <a:cs typeface="Arial" pitchFamily="34" charset="-120"/>
-              </a:rPr>
-              <a:t> dual labelling. Just label one set of dates clearly. The </a:t>
-            </a:r>
-            <a:pPr algn="l" indent="0" marL="0">
-              <a:lnSpc>
-                <a:spcPts val="1620"/>
-              </a:lnSpc>
-              <a:spcAft>
-                <a:spcPts val="300"/>
-              </a:spcAft>
-              <a:buNone/>
-            </a:pPr>
-            <a:r>
-              <a:rPr lang="en-US" sz="1200" i="1" dirty="0">
-                <a:solidFill>
-                  <a:srgbClr val="1C2833"/>
-                </a:solidFill>
-                <a:latin typeface="Arial" pitchFamily="34" charset="0"/>
-                <a:ea typeface="Arial" pitchFamily="34" charset="-122"/>
-                <a:cs typeface="Arial" pitchFamily="34" charset="-120"/>
-              </a:rPr>
-              <a:t>ayanāṁśa</a:t>
-            </a:r>
-            <a:pPr algn="l" indent="0" marL="0">
-              <a:lnSpc>
-                <a:spcPts val="1620"/>
-              </a:lnSpc>
-              <a:spcAft>
-                <a:spcPts val="300"/>
-              </a:spcAft>
-              <a:buNone/>
-            </a:pPr>
-            <a:r>
-              <a:rPr lang="en-US" sz="1200" dirty="0">
-                <a:solidFill>
-                  <a:srgbClr val="1C2833"/>
-                </a:solidFill>
-                <a:latin typeface="Arial" pitchFamily="34" charset="0"/>
-                <a:ea typeface="Arial" pitchFamily="34" charset="-122"/>
-                <a:cs typeface="Arial" pitchFamily="34" charset="-120"/>
-              </a:rPr>
-              <a:t> concept appears only in the written paragraph.</a:t>
+        </p:txBody>
+      </p:sp>
+      <p:sp>
+        <p:nvSpPr>
+          <p:cNvPr id="5" name="Text 3"/>
+          <p:cNvSpPr/>
+          <p:nvPr/>
+        </p:nvSpPr>
+        <p:spPr>
+          <a:xfrm>
+            <a:off x="406301" y="1373684"/>
+            <a:ext cx="8498026" cy="213271"/>
+          </a:xfrm>
+          <a:prstGeom prst="rect">
+            <a:avLst/>
+          </a:prstGeom>
+          <a:noFill/>
+          <a:ln/>
+        </p:spPr>
+        <p:txBody>
+          <a:bodyPr wrap="square" lIns="0" tIns="0" rIns="0" bIns="0" rtlCol="0" anchor="t"/>
+          <a:lstStyle/>
+          <a:p>
+            <a:pPr algn="l" indent="0" marL="0">
+              <a:lnSpc>
+                <a:spcPts val="1680"/>
+              </a:lnSpc>
+              <a:spcBef>
+                <a:spcPts val="300"/>
+              </a:spcBef>
+              <a:spcAft>
+                <a:spcPts val="300"/>
+              </a:spcAft>
+              <a:buNone/>
+            </a:pPr>
+            <a:r>
+              <a:rPr lang="en-US" sz="1200" dirty="0">
+                <a:solidFill>
+                  <a:srgbClr val="1C2833"/>
+                </a:solidFill>
+                <a:latin typeface="Arial" pitchFamily="34" charset="0"/>
+                <a:ea typeface="Arial" pitchFamily="34" charset="-122"/>
+                <a:cs typeface="Arial" pitchFamily="34" charset="-120"/>
+              </a:rPr>
+              <a:t>Teacher circulates:</a:t>
             </a:r>
             <a:endParaRPr lang="en-US" sz="1200" dirty="0"/>
           </a:p>
@@ -5805,7 +7282,7 @@
       </p:sp>
       <p:sp>
         <p:nvSpPr>
-          <p:cNvPr id="5" name="Text 3"/>
+          <p:cNvPr id="6" name="Text 4"/>
           <p:cNvSpPr/>
           <p:nvPr/>
         </p:nvSpPr>
